--- a/docs/presentations/Sage300SDK_2027_0WebSDKOverview.pptx
+++ b/docs/presentations/Sage300SDK_2027_0WebSDKOverview.pptx
@@ -5,67 +5,68 @@
     <p:sldMasterId id="2147483648" r:id="rId1"/>
   </p:sldMasterIdLst>
   <p:notesMasterIdLst>
-    <p:notesMasterId r:id="rId41"/>
+    <p:notesMasterId r:id="rId42"/>
   </p:notesMasterIdLst>
   <p:sldIdLst>
     <p:sldId id="258" r:id="rId2"/>
     <p:sldId id="573" r:id="rId3"/>
     <p:sldId id="591" r:id="rId4"/>
     <p:sldId id="277" r:id="rId5"/>
-    <p:sldId id="285" r:id="rId6"/>
-    <p:sldId id="594" r:id="rId7"/>
-    <p:sldId id="610" r:id="rId8"/>
-    <p:sldId id="623" r:id="rId9"/>
-    <p:sldId id="622" r:id="rId10"/>
-    <p:sldId id="611" r:id="rId11"/>
-    <p:sldId id="612" r:id="rId12"/>
-    <p:sldId id="613" r:id="rId13"/>
-    <p:sldId id="614" r:id="rId14"/>
-    <p:sldId id="615" r:id="rId15"/>
-    <p:sldId id="616" r:id="rId16"/>
-    <p:sldId id="617" r:id="rId17"/>
-    <p:sldId id="618" r:id="rId18"/>
-    <p:sldId id="619" r:id="rId19"/>
-    <p:sldId id="620" r:id="rId20"/>
-    <p:sldId id="621" r:id="rId21"/>
-    <p:sldId id="624" r:id="rId22"/>
-    <p:sldId id="522" r:id="rId23"/>
-    <p:sldId id="595" r:id="rId24"/>
-    <p:sldId id="625" r:id="rId25"/>
-    <p:sldId id="596" r:id="rId26"/>
-    <p:sldId id="597" r:id="rId27"/>
-    <p:sldId id="626" r:id="rId28"/>
-    <p:sldId id="627" r:id="rId29"/>
-    <p:sldId id="598" r:id="rId30"/>
-    <p:sldId id="599" r:id="rId31"/>
-    <p:sldId id="606" r:id="rId32"/>
-    <p:sldId id="607" r:id="rId33"/>
-    <p:sldId id="588" r:id="rId34"/>
-    <p:sldId id="609" r:id="rId35"/>
-    <p:sldId id="608" r:id="rId36"/>
-    <p:sldId id="600" r:id="rId37"/>
-    <p:sldId id="603" r:id="rId38"/>
-    <p:sldId id="601" r:id="rId39"/>
-    <p:sldId id="477" r:id="rId40"/>
+    <p:sldId id="628" r:id="rId6"/>
+    <p:sldId id="285" r:id="rId7"/>
+    <p:sldId id="594" r:id="rId8"/>
+    <p:sldId id="610" r:id="rId9"/>
+    <p:sldId id="623" r:id="rId10"/>
+    <p:sldId id="622" r:id="rId11"/>
+    <p:sldId id="611" r:id="rId12"/>
+    <p:sldId id="612" r:id="rId13"/>
+    <p:sldId id="613" r:id="rId14"/>
+    <p:sldId id="614" r:id="rId15"/>
+    <p:sldId id="615" r:id="rId16"/>
+    <p:sldId id="616" r:id="rId17"/>
+    <p:sldId id="617" r:id="rId18"/>
+    <p:sldId id="618" r:id="rId19"/>
+    <p:sldId id="619" r:id="rId20"/>
+    <p:sldId id="620" r:id="rId21"/>
+    <p:sldId id="621" r:id="rId22"/>
+    <p:sldId id="624" r:id="rId23"/>
+    <p:sldId id="522" r:id="rId24"/>
+    <p:sldId id="595" r:id="rId25"/>
+    <p:sldId id="625" r:id="rId26"/>
+    <p:sldId id="596" r:id="rId27"/>
+    <p:sldId id="597" r:id="rId28"/>
+    <p:sldId id="626" r:id="rId29"/>
+    <p:sldId id="627" r:id="rId30"/>
+    <p:sldId id="598" r:id="rId31"/>
+    <p:sldId id="599" r:id="rId32"/>
+    <p:sldId id="606" r:id="rId33"/>
+    <p:sldId id="607" r:id="rId34"/>
+    <p:sldId id="588" r:id="rId35"/>
+    <p:sldId id="609" r:id="rId36"/>
+    <p:sldId id="608" r:id="rId37"/>
+    <p:sldId id="600" r:id="rId38"/>
+    <p:sldId id="603" r:id="rId39"/>
+    <p:sldId id="601" r:id="rId40"/>
+    <p:sldId id="477" r:id="rId41"/>
   </p:sldIdLst>
   <p:sldSz cx="12192000" cy="6858000"/>
   <p:notesSz cx="6858000" cy="9144000"/>
   <p:embeddedFontLst>
     <p:embeddedFont>
       <p:font typeface="Sage Headline Black" panose="02010A03040201060103" pitchFamily="2" charset="0"/>
-      <p:bold r:id="rId42"/>
+      <p:bold r:id="rId43"/>
     </p:embeddedFont>
     <p:embeddedFont>
       <p:font typeface="Sage Text" panose="02010503040201060103" pitchFamily="2" charset="0"/>
-      <p:regular r:id="rId43"/>
-      <p:bold r:id="rId44"/>
-      <p:italic r:id="rId45"/>
-      <p:boldItalic r:id="rId46"/>
+      <p:regular r:id="rId44"/>
+      <p:bold r:id="rId45"/>
+      <p:italic r:id="rId46"/>
+      <p:boldItalic r:id="rId47"/>
     </p:embeddedFont>
     <p:embeddedFont>
       <p:font typeface="Sage Text Light" panose="02010303040201060103" pitchFamily="2" charset="0"/>
-      <p:regular r:id="rId47"/>
-      <p:italic r:id="rId48"/>
+      <p:regular r:id="rId48"/>
+      <p:italic r:id="rId49"/>
     </p:embeddedFont>
   </p:embeddedFontLst>
   <p:defaultTextStyle>
@@ -3618,7 +3619,7 @@
           <a:p>
             <a:fld id="{EC0ECC91-7099-9546-9775-79C77D0DA930}" type="datetimeFigureOut">
               <a:rPr lang="en-US" smtClean="0"/>
-              <a:t>7/23/2026</a:t>
+              <a:t>8/26/2026</a:t>
             </a:fld>
             <a:endParaRPr lang="en-US"/>
           </a:p>
@@ -4043,7 +4044,7 @@
     </p:spTree>
     <p:extLst>
       <p:ext uri="{BB962C8B-B14F-4D97-AF65-F5344CB8AC3E}">
-        <p14:creationId xmlns:p14="http://schemas.microsoft.com/office/powerpoint/2010/main" val="320652491"/>
+        <p14:creationId xmlns:p14="http://schemas.microsoft.com/office/powerpoint/2010/main" val="3954966456"/>
       </p:ext>
     </p:extLst>
   </p:cSld>
@@ -4127,7 +4128,7 @@
     </p:spTree>
     <p:extLst>
       <p:ext uri="{BB962C8B-B14F-4D97-AF65-F5344CB8AC3E}">
-        <p14:creationId xmlns:p14="http://schemas.microsoft.com/office/powerpoint/2010/main" val="1352175018"/>
+        <p14:creationId xmlns:p14="http://schemas.microsoft.com/office/powerpoint/2010/main" val="320652491"/>
       </p:ext>
     </p:extLst>
   </p:cSld>
@@ -4211,7 +4212,7 @@
     </p:spTree>
     <p:extLst>
       <p:ext uri="{BB962C8B-B14F-4D97-AF65-F5344CB8AC3E}">
-        <p14:creationId xmlns:p14="http://schemas.microsoft.com/office/powerpoint/2010/main" val="2319372096"/>
+        <p14:creationId xmlns:p14="http://schemas.microsoft.com/office/powerpoint/2010/main" val="1352175018"/>
       </p:ext>
     </p:extLst>
   </p:cSld>
@@ -4295,7 +4296,7 @@
     </p:spTree>
     <p:extLst>
       <p:ext uri="{BB962C8B-B14F-4D97-AF65-F5344CB8AC3E}">
-        <p14:creationId xmlns:p14="http://schemas.microsoft.com/office/powerpoint/2010/main" val="3187356296"/>
+        <p14:creationId xmlns:p14="http://schemas.microsoft.com/office/powerpoint/2010/main" val="2319372096"/>
       </p:ext>
     </p:extLst>
   </p:cSld>
@@ -4379,7 +4380,7 @@
     </p:spTree>
     <p:extLst>
       <p:ext uri="{BB962C8B-B14F-4D97-AF65-F5344CB8AC3E}">
-        <p14:creationId xmlns:p14="http://schemas.microsoft.com/office/powerpoint/2010/main" val="3960621029"/>
+        <p14:creationId xmlns:p14="http://schemas.microsoft.com/office/powerpoint/2010/main" val="3187356296"/>
       </p:ext>
     </p:extLst>
   </p:cSld>
@@ -4463,7 +4464,7 @@
     </p:spTree>
     <p:extLst>
       <p:ext uri="{BB962C8B-B14F-4D97-AF65-F5344CB8AC3E}">
-        <p14:creationId xmlns:p14="http://schemas.microsoft.com/office/powerpoint/2010/main" val="1079205080"/>
+        <p14:creationId xmlns:p14="http://schemas.microsoft.com/office/powerpoint/2010/main" val="3960621029"/>
       </p:ext>
     </p:extLst>
   </p:cSld>
@@ -4539,6 +4540,90 @@
             <a:fld id="{E1B92A93-8262-254D-8F5A-CE19795D22F6}" type="slidenum">
               <a:rPr lang="en-US" smtClean="0"/>
               <a:t>38</a:t>
+            </a:fld>
+            <a:endParaRPr lang="en-US"/>
+          </a:p>
+        </p:txBody>
+      </p:sp>
+    </p:spTree>
+    <p:extLst>
+      <p:ext uri="{BB962C8B-B14F-4D97-AF65-F5344CB8AC3E}">
+        <p14:creationId xmlns:p14="http://schemas.microsoft.com/office/powerpoint/2010/main" val="1079205080"/>
+      </p:ext>
+    </p:extLst>
+  </p:cSld>
+  <p:clrMapOvr>
+    <a:masterClrMapping/>
+  </p:clrMapOvr>
+</p:notes>
+</file>
+
+<file path=ppt/notesSlides/notesSlide17.xml><?xml version="1.0" encoding="utf-8"?>
+<p:notes xmlns:a="http://schemas.openxmlformats.org/drawingml/2006/main" xmlns:r="http://schemas.openxmlformats.org/officeDocument/2006/relationships" xmlns:p="http://schemas.openxmlformats.org/presentationml/2006/main">
+  <p:cSld>
+    <p:spTree>
+      <p:nvGrpSpPr>
+        <p:cNvPr id="1" name=""/>
+        <p:cNvGrpSpPr/>
+        <p:nvPr/>
+      </p:nvGrpSpPr>
+      <p:grpSpPr>
+        <a:xfrm>
+          <a:off x="0" y="0"/>
+          <a:ext cx="0" cy="0"/>
+          <a:chOff x="0" y="0"/>
+          <a:chExt cx="0" cy="0"/>
+        </a:xfrm>
+      </p:grpSpPr>
+      <p:sp>
+        <p:nvSpPr>
+          <p:cNvPr id="2" name="Slide Image Placeholder 1"/>
+          <p:cNvSpPr>
+            <a:spLocks noGrp="1" noRot="1" noChangeAspect="1"/>
+          </p:cNvSpPr>
+          <p:nvPr>
+            <p:ph type="sldImg"/>
+          </p:nvPr>
+        </p:nvSpPr>
+        <p:spPr/>
+      </p:sp>
+      <p:sp>
+        <p:nvSpPr>
+          <p:cNvPr id="3" name="Notes Placeholder 2"/>
+          <p:cNvSpPr>
+            <a:spLocks noGrp="1"/>
+          </p:cNvSpPr>
+          <p:nvPr>
+            <p:ph type="body" idx="1"/>
+          </p:nvPr>
+        </p:nvSpPr>
+        <p:spPr/>
+        <p:txBody>
+          <a:bodyPr/>
+          <a:lstStyle/>
+          <a:p>
+            <a:endParaRPr lang="en-US" dirty="0"/>
+          </a:p>
+        </p:txBody>
+      </p:sp>
+      <p:sp>
+        <p:nvSpPr>
+          <p:cNvPr id="4" name="Slide Number Placeholder 3"/>
+          <p:cNvSpPr>
+            <a:spLocks noGrp="1"/>
+          </p:cNvSpPr>
+          <p:nvPr>
+            <p:ph type="sldNum" sz="quarter" idx="5"/>
+          </p:nvPr>
+        </p:nvSpPr>
+        <p:spPr/>
+        <p:txBody>
+          <a:bodyPr/>
+          <a:lstStyle/>
+          <a:p>
+            <a:fld id="{E1B92A93-8262-254D-8F5A-CE19795D22F6}" type="slidenum">
+              <a:rPr lang="en-US" smtClean="0"/>
+              <a:t>39</a:t>
             </a:fld>
             <a:endParaRPr lang="en-US"/>
           </a:p>
@@ -4790,7 +4875,7 @@
           <a:p>
             <a:fld id="{E1B92A93-8262-254D-8F5A-CE19795D22F6}" type="slidenum">
               <a:rPr lang="en-US" smtClean="0"/>
-              <a:t>22</a:t>
+              <a:t>5</a:t>
             </a:fld>
             <a:endParaRPr lang="en-US"/>
           </a:p>
@@ -4799,7 +4884,7 @@
     </p:spTree>
     <p:extLst>
       <p:ext uri="{BB962C8B-B14F-4D97-AF65-F5344CB8AC3E}">
-        <p14:creationId xmlns:p14="http://schemas.microsoft.com/office/powerpoint/2010/main" val="1171594404"/>
+        <p14:creationId xmlns:p14="http://schemas.microsoft.com/office/powerpoint/2010/main" val="1536147590"/>
       </p:ext>
     </p:extLst>
   </p:cSld>
@@ -4874,7 +4959,7 @@
           <a:p>
             <a:fld id="{E1B92A93-8262-254D-8F5A-CE19795D22F6}" type="slidenum">
               <a:rPr lang="en-US" smtClean="0"/>
-              <a:t>24</a:t>
+              <a:t>23</a:t>
             </a:fld>
             <a:endParaRPr lang="en-US"/>
           </a:p>
@@ -4883,7 +4968,7 @@
     </p:spTree>
     <p:extLst>
       <p:ext uri="{BB962C8B-B14F-4D97-AF65-F5344CB8AC3E}">
-        <p14:creationId xmlns:p14="http://schemas.microsoft.com/office/powerpoint/2010/main" val="1828253761"/>
+        <p14:creationId xmlns:p14="http://schemas.microsoft.com/office/powerpoint/2010/main" val="1171594404"/>
       </p:ext>
     </p:extLst>
   </p:cSld>
@@ -4958,7 +5043,91 @@
           <a:p>
             <a:fld id="{E1B92A93-8262-254D-8F5A-CE19795D22F6}" type="slidenum">
               <a:rPr lang="en-US" smtClean="0"/>
-              <a:t>26</a:t>
+              <a:t>25</a:t>
+            </a:fld>
+            <a:endParaRPr lang="en-US"/>
+          </a:p>
+        </p:txBody>
+      </p:sp>
+    </p:spTree>
+    <p:extLst>
+      <p:ext uri="{BB962C8B-B14F-4D97-AF65-F5344CB8AC3E}">
+        <p14:creationId xmlns:p14="http://schemas.microsoft.com/office/powerpoint/2010/main" val="1828253761"/>
+      </p:ext>
+    </p:extLst>
+  </p:cSld>
+  <p:clrMapOvr>
+    <a:masterClrMapping/>
+  </p:clrMapOvr>
+</p:notes>
+</file>
+
+<file path=ppt/notesSlides/notesSlide7.xml><?xml version="1.0" encoding="utf-8"?>
+<p:notes xmlns:a="http://schemas.openxmlformats.org/drawingml/2006/main" xmlns:r="http://schemas.openxmlformats.org/officeDocument/2006/relationships" xmlns:p="http://schemas.openxmlformats.org/presentationml/2006/main">
+  <p:cSld>
+    <p:spTree>
+      <p:nvGrpSpPr>
+        <p:cNvPr id="1" name=""/>
+        <p:cNvGrpSpPr/>
+        <p:nvPr/>
+      </p:nvGrpSpPr>
+      <p:grpSpPr>
+        <a:xfrm>
+          <a:off x="0" y="0"/>
+          <a:ext cx="0" cy="0"/>
+          <a:chOff x="0" y="0"/>
+          <a:chExt cx="0" cy="0"/>
+        </a:xfrm>
+      </p:grpSpPr>
+      <p:sp>
+        <p:nvSpPr>
+          <p:cNvPr id="2" name="Slide Image Placeholder 1"/>
+          <p:cNvSpPr>
+            <a:spLocks noGrp="1" noRot="1" noChangeAspect="1"/>
+          </p:cNvSpPr>
+          <p:nvPr>
+            <p:ph type="sldImg"/>
+          </p:nvPr>
+        </p:nvSpPr>
+        <p:spPr/>
+      </p:sp>
+      <p:sp>
+        <p:nvSpPr>
+          <p:cNvPr id="3" name="Notes Placeholder 2"/>
+          <p:cNvSpPr>
+            <a:spLocks noGrp="1"/>
+          </p:cNvSpPr>
+          <p:nvPr>
+            <p:ph type="body" idx="1"/>
+          </p:nvPr>
+        </p:nvSpPr>
+        <p:spPr/>
+        <p:txBody>
+          <a:bodyPr/>
+          <a:lstStyle/>
+          <a:p>
+            <a:endParaRPr lang="en-US" dirty="0"/>
+          </a:p>
+        </p:txBody>
+      </p:sp>
+      <p:sp>
+        <p:nvSpPr>
+          <p:cNvPr id="4" name="Slide Number Placeholder 3"/>
+          <p:cNvSpPr>
+            <a:spLocks noGrp="1"/>
+          </p:cNvSpPr>
+          <p:nvPr>
+            <p:ph type="sldNum" sz="quarter" idx="5"/>
+          </p:nvPr>
+        </p:nvSpPr>
+        <p:spPr/>
+        <p:txBody>
+          <a:bodyPr/>
+          <a:lstStyle/>
+          <a:p>
+            <a:fld id="{E1B92A93-8262-254D-8F5A-CE19795D22F6}" type="slidenum">
+              <a:rPr lang="en-US" smtClean="0"/>
+              <a:t>27</a:t>
             </a:fld>
             <a:endParaRPr lang="en-US"/>
           </a:p>
@@ -4977,7 +5146,7 @@
 </p:notes>
 </file>
 
-<file path=ppt/notesSlides/notesSlide7.xml><?xml version="1.0" encoding="utf-8"?>
+<file path=ppt/notesSlides/notesSlide8.xml><?xml version="1.0" encoding="utf-8"?>
 <p:notes xmlns:a="http://schemas.openxmlformats.org/drawingml/2006/main" xmlns:r="http://schemas.openxmlformats.org/officeDocument/2006/relationships" xmlns:p="http://schemas.openxmlformats.org/presentationml/2006/main">
   <p:cSld>
     <p:spTree>
@@ -5066,7 +5235,7 @@
           <a:p>
             <a:fld id="{E1B92A93-8262-254D-8F5A-CE19795D22F6}" type="slidenum">
               <a:rPr lang="en-US" smtClean="0"/>
-              <a:t>28</a:t>
+              <a:t>29</a:t>
             </a:fld>
             <a:endParaRPr lang="en-US"/>
           </a:p>
@@ -5076,90 +5245,6 @@
     <p:extLst>
       <p:ext uri="{BB962C8B-B14F-4D97-AF65-F5344CB8AC3E}">
         <p14:creationId xmlns:p14="http://schemas.microsoft.com/office/powerpoint/2010/main" val="3930448999"/>
-      </p:ext>
-    </p:extLst>
-  </p:cSld>
-  <p:clrMapOvr>
-    <a:masterClrMapping/>
-  </p:clrMapOvr>
-</p:notes>
-</file>
-
-<file path=ppt/notesSlides/notesSlide8.xml><?xml version="1.0" encoding="utf-8"?>
-<p:notes xmlns:a="http://schemas.openxmlformats.org/drawingml/2006/main" xmlns:r="http://schemas.openxmlformats.org/officeDocument/2006/relationships" xmlns:p="http://schemas.openxmlformats.org/presentationml/2006/main">
-  <p:cSld>
-    <p:spTree>
-      <p:nvGrpSpPr>
-        <p:cNvPr id="1" name=""/>
-        <p:cNvGrpSpPr/>
-        <p:nvPr/>
-      </p:nvGrpSpPr>
-      <p:grpSpPr>
-        <a:xfrm>
-          <a:off x="0" y="0"/>
-          <a:ext cx="0" cy="0"/>
-          <a:chOff x="0" y="0"/>
-          <a:chExt cx="0" cy="0"/>
-        </a:xfrm>
-      </p:grpSpPr>
-      <p:sp>
-        <p:nvSpPr>
-          <p:cNvPr id="2" name="Slide Image Placeholder 1"/>
-          <p:cNvSpPr>
-            <a:spLocks noGrp="1" noRot="1" noChangeAspect="1"/>
-          </p:cNvSpPr>
-          <p:nvPr>
-            <p:ph type="sldImg"/>
-          </p:nvPr>
-        </p:nvSpPr>
-        <p:spPr/>
-      </p:sp>
-      <p:sp>
-        <p:nvSpPr>
-          <p:cNvPr id="3" name="Notes Placeholder 2"/>
-          <p:cNvSpPr>
-            <a:spLocks noGrp="1"/>
-          </p:cNvSpPr>
-          <p:nvPr>
-            <p:ph type="body" idx="1"/>
-          </p:nvPr>
-        </p:nvSpPr>
-        <p:spPr/>
-        <p:txBody>
-          <a:bodyPr/>
-          <a:lstStyle/>
-          <a:p>
-            <a:endParaRPr lang="en-US" dirty="0"/>
-          </a:p>
-        </p:txBody>
-      </p:sp>
-      <p:sp>
-        <p:nvSpPr>
-          <p:cNvPr id="4" name="Slide Number Placeholder 3"/>
-          <p:cNvSpPr>
-            <a:spLocks noGrp="1"/>
-          </p:cNvSpPr>
-          <p:nvPr>
-            <p:ph type="sldNum" sz="quarter" idx="5"/>
-          </p:nvPr>
-        </p:nvSpPr>
-        <p:spPr/>
-        <p:txBody>
-          <a:bodyPr/>
-          <a:lstStyle/>
-          <a:p>
-            <a:fld id="{E1B92A93-8262-254D-8F5A-CE19795D22F6}" type="slidenum">
-              <a:rPr lang="en-US" smtClean="0"/>
-              <a:t>30</a:t>
-            </a:fld>
-            <a:endParaRPr lang="en-US"/>
-          </a:p>
-        </p:txBody>
-      </p:sp>
-    </p:spTree>
-    <p:extLst>
-      <p:ext uri="{BB962C8B-B14F-4D97-AF65-F5344CB8AC3E}">
-        <p14:creationId xmlns:p14="http://schemas.microsoft.com/office/powerpoint/2010/main" val="3160403875"/>
       </p:ext>
     </p:extLst>
   </p:cSld>
@@ -5243,7 +5328,7 @@
     </p:spTree>
     <p:extLst>
       <p:ext uri="{BB962C8B-B14F-4D97-AF65-F5344CB8AC3E}">
-        <p14:creationId xmlns:p14="http://schemas.microsoft.com/office/powerpoint/2010/main" val="3954966456"/>
+        <p14:creationId xmlns:p14="http://schemas.microsoft.com/office/powerpoint/2010/main" val="3160403875"/>
       </p:ext>
     </p:extLst>
   </p:cSld>
@@ -8950,7 +9035,7 @@
           <a:p>
             <a:r>
               <a:rPr lang="en-US" dirty="0"/>
-              <a:t>July 2026</a:t>
+              <a:t>August 2026</a:t>
             </a:r>
           </a:p>
         </p:txBody>
@@ -10095,6 +10180,409 @@
           <a:p>
             <a:r>
               <a:rPr lang="en-US" dirty="0"/>
+              <a:t>Code Generation Wizard</a:t>
+            </a:r>
+          </a:p>
+        </p:txBody>
+      </p:sp>
+      <p:sp>
+        <p:nvSpPr>
+          <p:cNvPr id="54" name="TextBox 53">
+            <a:extLst>
+              <a:ext uri="{FF2B5EF4-FFF2-40B4-BE49-F238E27FC236}">
+                <a16:creationId xmlns:a16="http://schemas.microsoft.com/office/drawing/2014/main" id="{F2370D7B-846B-8CA3-39B2-C805DBE05ECB}"/>
+              </a:ext>
+            </a:extLst>
+          </p:cNvPr>
+          <p:cNvSpPr txBox="1"/>
+          <p:nvPr/>
+        </p:nvSpPr>
+        <p:spPr>
+          <a:xfrm>
+            <a:off x="7025562" y="4566558"/>
+            <a:ext cx="4791995" cy="887604"/>
+          </a:xfrm>
+          <a:prstGeom prst="rect">
+            <a:avLst/>
+          </a:prstGeom>
+          <a:noFill/>
+        </p:spPr>
+        <p:txBody>
+          <a:bodyPr wrap="square" lIns="0" tIns="0" rIns="0" bIns="0" rtlCol="0">
+            <a:noAutofit/>
+          </a:bodyPr>
+          <a:lstStyle/>
+          <a:p>
+            <a:pPr marL="285750" indent="-285750" algn="l">
+              <a:buFont typeface="Arial" panose="020B0604020202020204" pitchFamily="34" charset="0"/>
+              <a:buChar char="•"/>
+            </a:pPr>
+            <a:r>
+              <a:rPr lang="en-US" sz="1600" dirty="0">
+                <a:latin typeface="Sage Text" panose="02010503040201060103" pitchFamily="2" charset="77"/>
+              </a:rPr>
+              <a:t>Added to the Wizard Package</a:t>
+            </a:r>
+          </a:p>
+          <a:p>
+            <a:pPr marL="285750" indent="-285750" algn="l">
+              <a:buFont typeface="Arial" panose="020B0604020202020204" pitchFamily="34" charset="0"/>
+              <a:buChar char="•"/>
+            </a:pPr>
+            <a:r>
+              <a:rPr lang="en-US" sz="1600" dirty="0">
+                <a:latin typeface="Sage Text" panose="02010503040201060103" pitchFamily="2" charset="77"/>
+              </a:rPr>
+              <a:t>Added Web API code generation for 2025.1</a:t>
+            </a:r>
+          </a:p>
+        </p:txBody>
+      </p:sp>
+      <p:pic>
+        <p:nvPicPr>
+          <p:cNvPr id="57" name="Picture 56">
+            <a:extLst>
+              <a:ext uri="{FF2B5EF4-FFF2-40B4-BE49-F238E27FC236}">
+                <a16:creationId xmlns:a16="http://schemas.microsoft.com/office/drawing/2014/main" id="{A9CFDC2F-8E0A-BEA7-2BC4-2257666AEE1A}"/>
+              </a:ext>
+            </a:extLst>
+          </p:cNvPr>
+          <p:cNvPicPr>
+            <a:picLocks noChangeAspect="1"/>
+          </p:cNvPicPr>
+          <p:nvPr/>
+        </p:nvPicPr>
+        <p:blipFill>
+          <a:blip r:embed="rId2"/>
+          <a:stretch>
+            <a:fillRect/>
+          </a:stretch>
+        </p:blipFill>
+        <p:spPr>
+          <a:xfrm>
+            <a:off x="419099" y="1820426"/>
+            <a:ext cx="2265580" cy="1398164"/>
+          </a:xfrm>
+          <a:prstGeom prst="rect">
+            <a:avLst/>
+          </a:prstGeom>
+        </p:spPr>
+      </p:pic>
+      <p:sp>
+        <p:nvSpPr>
+          <p:cNvPr id="58" name="TextBox 57">
+            <a:extLst>
+              <a:ext uri="{FF2B5EF4-FFF2-40B4-BE49-F238E27FC236}">
+                <a16:creationId xmlns:a16="http://schemas.microsoft.com/office/drawing/2014/main" id="{961244FC-FFEC-9259-CE9D-9DC3544F17A7}"/>
+              </a:ext>
+            </a:extLst>
+          </p:cNvPr>
+          <p:cNvSpPr txBox="1"/>
+          <p:nvPr/>
+        </p:nvSpPr>
+        <p:spPr>
+          <a:xfrm>
+            <a:off x="406602" y="3374154"/>
+            <a:ext cx="4423868" cy="887604"/>
+          </a:xfrm>
+          <a:prstGeom prst="rect">
+            <a:avLst/>
+          </a:prstGeom>
+          <a:noFill/>
+        </p:spPr>
+        <p:txBody>
+          <a:bodyPr wrap="square" lIns="0" tIns="0" rIns="0" bIns="0" rtlCol="0">
+            <a:noAutofit/>
+          </a:bodyPr>
+          <a:lstStyle/>
+          <a:p>
+            <a:pPr marL="285750" indent="-285750" algn="l">
+              <a:buFont typeface="Arial" panose="020B0604020202020204" pitchFamily="34" charset="0"/>
+              <a:buChar char="•"/>
+            </a:pPr>
+            <a:r>
+              <a:rPr lang="en-US" sz="1600" b="0" i="0" dirty="0">
+                <a:solidFill>
+                  <a:schemeClr val="tx1"/>
+                </a:solidFill>
+                <a:latin typeface="Sage Text" panose="02010503040201060103" pitchFamily="2" charset="77"/>
+              </a:rPr>
+              <a:t>Only accessible in Visual Studio 2022 or 2026</a:t>
+            </a:r>
+          </a:p>
+        </p:txBody>
+      </p:sp>
+      <p:pic>
+        <p:nvPicPr>
+          <p:cNvPr id="59" name="Picture 58">
+            <a:extLst>
+              <a:ext uri="{FF2B5EF4-FFF2-40B4-BE49-F238E27FC236}">
+                <a16:creationId xmlns:a16="http://schemas.microsoft.com/office/drawing/2014/main" id="{4D0DA847-A3EB-AC80-EA3D-B0CAF4AD5013}"/>
+              </a:ext>
+            </a:extLst>
+          </p:cNvPr>
+          <p:cNvPicPr>
+            <a:picLocks noChangeAspect="1"/>
+          </p:cNvPicPr>
+          <p:nvPr/>
+        </p:nvPicPr>
+        <p:blipFill>
+          <a:blip r:embed="rId3">
+            <a:extLst>
+              <a:ext uri="{28A0092B-C50C-407E-A947-70E740481C1C}">
+                <a14:useLocalDpi xmlns:a14="http://schemas.microsoft.com/office/drawing/2010/main" val="0"/>
+              </a:ext>
+            </a:extLst>
+          </a:blip>
+          <a:srcRect/>
+          <a:stretch>
+            <a:fillRect/>
+          </a:stretch>
+        </p:blipFill>
+        <p:spPr bwMode="auto">
+          <a:xfrm>
+            <a:off x="374442" y="4055900"/>
+            <a:ext cx="5848350" cy="1171575"/>
+          </a:xfrm>
+          <a:prstGeom prst="rect">
+            <a:avLst/>
+          </a:prstGeom>
+          <a:noFill/>
+          <a:ln>
+            <a:noFill/>
+          </a:ln>
+        </p:spPr>
+      </p:pic>
+      <p:sp>
+        <p:nvSpPr>
+          <p:cNvPr id="60" name="TextBox 59">
+            <a:extLst>
+              <a:ext uri="{FF2B5EF4-FFF2-40B4-BE49-F238E27FC236}">
+                <a16:creationId xmlns:a16="http://schemas.microsoft.com/office/drawing/2014/main" id="{762783B5-FD4E-BC08-47E6-35BC4116609A}"/>
+              </a:ext>
+            </a:extLst>
+          </p:cNvPr>
+          <p:cNvSpPr txBox="1"/>
+          <p:nvPr/>
+        </p:nvSpPr>
+        <p:spPr>
+          <a:xfrm>
+            <a:off x="406602" y="5338150"/>
+            <a:ext cx="4423868" cy="887604"/>
+          </a:xfrm>
+          <a:prstGeom prst="rect">
+            <a:avLst/>
+          </a:prstGeom>
+          <a:noFill/>
+        </p:spPr>
+        <p:txBody>
+          <a:bodyPr wrap="square" lIns="0" tIns="0" rIns="0" bIns="0" rtlCol="0">
+            <a:noAutofit/>
+          </a:bodyPr>
+          <a:lstStyle/>
+          <a:p>
+            <a:pPr marL="285750" indent="-285750" algn="l">
+              <a:buFont typeface="Arial" panose="020B0604020202020204" pitchFamily="34" charset="0"/>
+              <a:buChar char="•"/>
+            </a:pPr>
+            <a:r>
+              <a:rPr lang="en-US" sz="1600" b="0" i="0" dirty="0">
+                <a:solidFill>
+                  <a:schemeClr val="tx1"/>
+                </a:solidFill>
+                <a:latin typeface="Sage Text" panose="02010503040201060103" pitchFamily="2" charset="77"/>
+              </a:rPr>
+              <a:t>Access from Extensions</a:t>
+            </a:r>
+            <a:r>
+              <a:rPr lang="en-US" sz="1600" dirty="0">
+                <a:latin typeface="Sage Text" panose="02010503040201060103" pitchFamily="2" charset="77"/>
+              </a:rPr>
+              <a:t>/Sage 300 menu</a:t>
+            </a:r>
+          </a:p>
+        </p:txBody>
+      </p:sp>
+      <p:pic>
+        <p:nvPicPr>
+          <p:cNvPr id="62" name="Picture 61">
+            <a:extLst>
+              <a:ext uri="{FF2B5EF4-FFF2-40B4-BE49-F238E27FC236}">
+                <a16:creationId xmlns:a16="http://schemas.microsoft.com/office/drawing/2014/main" id="{557637A0-E7D1-65F9-CE53-EEE6768A1F0E}"/>
+              </a:ext>
+            </a:extLst>
+          </p:cNvPr>
+          <p:cNvPicPr>
+            <a:picLocks noChangeAspect="1"/>
+          </p:cNvPicPr>
+          <p:nvPr/>
+        </p:nvPicPr>
+        <p:blipFill>
+          <a:blip r:embed="rId4"/>
+          <a:stretch>
+            <a:fillRect/>
+          </a:stretch>
+        </p:blipFill>
+        <p:spPr>
+          <a:xfrm>
+            <a:off x="6894347" y="657401"/>
+            <a:ext cx="4686300" cy="3667125"/>
+          </a:xfrm>
+          <a:prstGeom prst="rect">
+            <a:avLst/>
+          </a:prstGeom>
+        </p:spPr>
+      </p:pic>
+      <p:pic>
+        <p:nvPicPr>
+          <p:cNvPr id="5" name="Picture 4">
+            <a:extLst>
+              <a:ext uri="{FF2B5EF4-FFF2-40B4-BE49-F238E27FC236}">
+                <a16:creationId xmlns:a16="http://schemas.microsoft.com/office/drawing/2014/main" id="{ECFA9E63-4A52-C747-4EF1-E7398F74FCC4}"/>
+              </a:ext>
+            </a:extLst>
+          </p:cNvPr>
+          <p:cNvPicPr>
+            <a:picLocks noChangeAspect="1"/>
+          </p:cNvPicPr>
+          <p:nvPr/>
+        </p:nvPicPr>
+        <p:blipFill>
+          <a:blip r:embed="rId5"/>
+          <a:stretch>
+            <a:fillRect/>
+          </a:stretch>
+        </p:blipFill>
+        <p:spPr>
+          <a:xfrm>
+            <a:off x="3559501" y="1820426"/>
+            <a:ext cx="2528877" cy="1399342"/>
+          </a:xfrm>
+          <a:prstGeom prst="rect">
+            <a:avLst/>
+          </a:prstGeom>
+        </p:spPr>
+      </p:pic>
+    </p:spTree>
+    <p:extLst>
+      <p:ext uri="{BB962C8B-B14F-4D97-AF65-F5344CB8AC3E}">
+        <p14:creationId xmlns:p14="http://schemas.microsoft.com/office/powerpoint/2010/main" val="769047783"/>
+      </p:ext>
+    </p:extLst>
+  </p:cSld>
+  <p:clrMapOvr>
+    <a:masterClrMapping/>
+  </p:clrMapOvr>
+</p:sld>
+</file>
+
+<file path=ppt/slides/slide11.xml><?xml version="1.0" encoding="utf-8"?>
+<p:sld xmlns:a="http://schemas.openxmlformats.org/drawingml/2006/main" xmlns:r="http://schemas.openxmlformats.org/officeDocument/2006/relationships" xmlns:p="http://schemas.openxmlformats.org/presentationml/2006/main">
+  <p:cSld>
+    <p:spTree>
+      <p:nvGrpSpPr>
+        <p:cNvPr id="1" name=""/>
+        <p:cNvGrpSpPr/>
+        <p:nvPr/>
+      </p:nvGrpSpPr>
+      <p:grpSpPr>
+        <a:xfrm>
+          <a:off x="0" y="0"/>
+          <a:ext cx="0" cy="0"/>
+          <a:chOff x="0" y="0"/>
+          <a:chExt cx="0" cy="0"/>
+        </a:xfrm>
+      </p:grpSpPr>
+      <p:sp>
+        <p:nvSpPr>
+          <p:cNvPr id="2" name="Title 1">
+            <a:extLst>
+              <a:ext uri="{FF2B5EF4-FFF2-40B4-BE49-F238E27FC236}">
+                <a16:creationId xmlns:a16="http://schemas.microsoft.com/office/drawing/2014/main" id="{BA6C69B8-5719-314E-939A-ECE8F8D96F02}"/>
+              </a:ext>
+            </a:extLst>
+          </p:cNvPr>
+          <p:cNvSpPr>
+            <a:spLocks noGrp="1"/>
+          </p:cNvSpPr>
+          <p:nvPr>
+            <p:ph type="title"/>
+          </p:nvPr>
+        </p:nvSpPr>
+        <p:spPr/>
+        <p:txBody>
+          <a:bodyPr/>
+          <a:lstStyle/>
+          <a:p>
+            <a:r>
+              <a:rPr lang="en-US" dirty="0"/>
+              <a:t>Wizards</a:t>
+            </a:r>
+          </a:p>
+        </p:txBody>
+      </p:sp>
+      <p:sp>
+        <p:nvSpPr>
+          <p:cNvPr id="4" name="Slide Number Placeholder 3">
+            <a:extLst>
+              <a:ext uri="{FF2B5EF4-FFF2-40B4-BE49-F238E27FC236}">
+                <a16:creationId xmlns:a16="http://schemas.microsoft.com/office/drawing/2014/main" id="{7DB49043-0D36-3944-8C61-89B95273C808}"/>
+              </a:ext>
+            </a:extLst>
+          </p:cNvPr>
+          <p:cNvSpPr>
+            <a:spLocks noGrp="1"/>
+          </p:cNvSpPr>
+          <p:nvPr>
+            <p:ph type="sldNum" sz="quarter" idx="10"/>
+          </p:nvPr>
+        </p:nvSpPr>
+        <p:spPr/>
+        <p:txBody>
+          <a:bodyPr/>
+          <a:lstStyle/>
+          <a:p>
+            <a:r>
+              <a:rPr lang="en-US"/>
+              <a:t>Page </a:t>
+            </a:r>
+            <a:fld id="{888928BD-9DD5-4B49-B597-3FD2BD4272DD}" type="slidenum">
+              <a:rPr smtClean="0"/>
+              <a:pPr/>
+              <a:t>11</a:t>
+            </a:fld>
+            <a:endParaRPr dirty="0"/>
+          </a:p>
+        </p:txBody>
+      </p:sp>
+      <p:sp>
+        <p:nvSpPr>
+          <p:cNvPr id="53" name="Text Placeholder 2">
+            <a:extLst>
+              <a:ext uri="{FF2B5EF4-FFF2-40B4-BE49-F238E27FC236}">
+                <a16:creationId xmlns:a16="http://schemas.microsoft.com/office/drawing/2014/main" id="{58DA4C5B-4108-11B9-A843-26E66321E63A}"/>
+              </a:ext>
+            </a:extLst>
+          </p:cNvPr>
+          <p:cNvSpPr>
+            <a:spLocks noGrp="1"/>
+          </p:cNvSpPr>
+          <p:nvPr>
+            <p:ph type="body" sz="quarter" idx="12"/>
+          </p:nvPr>
+        </p:nvSpPr>
+        <p:spPr>
+          <a:xfrm>
+            <a:off x="419098" y="1138680"/>
+            <a:ext cx="11346180" cy="438912"/>
+          </a:xfrm>
+        </p:spPr>
+        <p:txBody>
+          <a:bodyPr/>
+          <a:lstStyle/>
+          <a:p>
+            <a:r>
+              <a:rPr lang="en-US" dirty="0"/>
               <a:t>Finder Generator</a:t>
             </a:r>
           </a:p>
@@ -10379,7 +10867,7 @@
 </p:sld>
 </file>
 
-<file path=ppt/slides/slide11.xml><?xml version="1.0" encoding="utf-8"?>
+<file path=ppt/slides/slide12.xml><?xml version="1.0" encoding="utf-8"?>
 <p:sld xmlns:a="http://schemas.openxmlformats.org/drawingml/2006/main" xmlns:r="http://schemas.openxmlformats.org/officeDocument/2006/relationships" xmlns:p="http://schemas.openxmlformats.org/presentationml/2006/main">
   <p:cSld>
     <p:spTree>
@@ -10452,7 +10940,7 @@
             <a:fld id="{888928BD-9DD5-4B49-B597-3FD2BD4272DD}" type="slidenum">
               <a:rPr smtClean="0"/>
               <a:pPr/>
-              <a:t>11</a:t>
+              <a:t>12</a:t>
             </a:fld>
             <a:endParaRPr dirty="0"/>
           </a:p>
@@ -10770,7 +11258,7 @@
 </p:sld>
 </file>
 
-<file path=ppt/slides/slide12.xml><?xml version="1.0" encoding="utf-8"?>
+<file path=ppt/slides/slide13.xml><?xml version="1.0" encoding="utf-8"?>
 <p:sld xmlns:a="http://schemas.openxmlformats.org/drawingml/2006/main" xmlns:r="http://schemas.openxmlformats.org/officeDocument/2006/relationships" xmlns:p="http://schemas.openxmlformats.org/presentationml/2006/main">
   <p:cSld>
     <p:spTree>
@@ -10843,7 +11331,7 @@
             <a:fld id="{888928BD-9DD5-4B49-B597-3FD2BD4272DD}" type="slidenum">
               <a:rPr smtClean="0"/>
               <a:pPr/>
-              <a:t>12</a:t>
+              <a:t>13</a:t>
             </a:fld>
             <a:endParaRPr dirty="0"/>
           </a:p>
@@ -11161,7 +11649,7 @@
 </p:sld>
 </file>
 
-<file path=ppt/slides/slide13.xml><?xml version="1.0" encoding="utf-8"?>
+<file path=ppt/slides/slide14.xml><?xml version="1.0" encoding="utf-8"?>
 <p:sld xmlns:a="http://schemas.openxmlformats.org/drawingml/2006/main" xmlns:r="http://schemas.openxmlformats.org/officeDocument/2006/relationships" xmlns:p="http://schemas.openxmlformats.org/presentationml/2006/main">
   <p:cSld>
     <p:spTree>
@@ -11234,7 +11722,7 @@
             <a:fld id="{888928BD-9DD5-4B49-B597-3FD2BD4272DD}" type="slidenum">
               <a:rPr smtClean="0"/>
               <a:pPr/>
-              <a:t>13</a:t>
+              <a:t>14</a:t>
             </a:fld>
             <a:endParaRPr dirty="0"/>
           </a:p>
@@ -11573,7 +12061,7 @@
 </p:sld>
 </file>
 
-<file path=ppt/slides/slide14.xml><?xml version="1.0" encoding="utf-8"?>
+<file path=ppt/slides/slide15.xml><?xml version="1.0" encoding="utf-8"?>
 <p:sld xmlns:a="http://schemas.openxmlformats.org/drawingml/2006/main" xmlns:r="http://schemas.openxmlformats.org/officeDocument/2006/relationships" xmlns:p="http://schemas.openxmlformats.org/presentationml/2006/main">
   <p:cSld>
     <p:spTree>
@@ -11646,7 +12134,7 @@
             <a:fld id="{888928BD-9DD5-4B49-B597-3FD2BD4272DD}" type="slidenum">
               <a:rPr smtClean="0"/>
               <a:pPr/>
-              <a:t>14</a:t>
+              <a:t>15</a:t>
             </a:fld>
             <a:endParaRPr dirty="0"/>
           </a:p>
@@ -11885,7 +12373,7 @@
 </p:sld>
 </file>
 
-<file path=ppt/slides/slide15.xml><?xml version="1.0" encoding="utf-8"?>
+<file path=ppt/slides/slide16.xml><?xml version="1.0" encoding="utf-8"?>
 <p:sld xmlns:a="http://schemas.openxmlformats.org/drawingml/2006/main" xmlns:r="http://schemas.openxmlformats.org/officeDocument/2006/relationships" xmlns:p="http://schemas.openxmlformats.org/presentationml/2006/main">
   <p:cSld>
     <p:spTree>
@@ -11958,7 +12446,7 @@
             <a:fld id="{888928BD-9DD5-4B49-B597-3FD2BD4272DD}" type="slidenum">
               <a:rPr smtClean="0"/>
               <a:pPr/>
-              <a:t>15</a:t>
+              <a:t>16</a:t>
             </a:fld>
             <a:endParaRPr dirty="0"/>
           </a:p>
@@ -12081,7 +12569,7 @@
 </p:sld>
 </file>
 
-<file path=ppt/slides/slide16.xml><?xml version="1.0" encoding="utf-8"?>
+<file path=ppt/slides/slide17.xml><?xml version="1.0" encoding="utf-8"?>
 <p:sld xmlns:a="http://schemas.openxmlformats.org/drawingml/2006/main" xmlns:r="http://schemas.openxmlformats.org/officeDocument/2006/relationships" xmlns:p="http://schemas.openxmlformats.org/presentationml/2006/main">
   <p:cSld>
     <p:spTree>
@@ -12154,7 +12642,7 @@
             <a:fld id="{888928BD-9DD5-4B49-B597-3FD2BD4272DD}" type="slidenum">
               <a:rPr smtClean="0"/>
               <a:pPr/>
-              <a:t>16</a:t>
+              <a:t>17</a:t>
             </a:fld>
             <a:endParaRPr dirty="0"/>
           </a:p>
@@ -12381,7 +12869,7 @@
 </p:sld>
 </file>
 
-<file path=ppt/slides/slide17.xml><?xml version="1.0" encoding="utf-8"?>
+<file path=ppt/slides/slide18.xml><?xml version="1.0" encoding="utf-8"?>
 <p:sld xmlns:a="http://schemas.openxmlformats.org/drawingml/2006/main" xmlns:r="http://schemas.openxmlformats.org/officeDocument/2006/relationships" xmlns:p="http://schemas.openxmlformats.org/presentationml/2006/main">
   <p:cSld>
     <p:spTree>
@@ -12454,7 +12942,7 @@
             <a:fld id="{888928BD-9DD5-4B49-B597-3FD2BD4272DD}" type="slidenum">
               <a:rPr smtClean="0"/>
               <a:pPr/>
-              <a:t>17</a:t>
+              <a:t>18</a:t>
             </a:fld>
             <a:endParaRPr dirty="0"/>
           </a:p>
@@ -12588,7 +13076,7 @@
 </p:sld>
 </file>
 
-<file path=ppt/slides/slide18.xml><?xml version="1.0" encoding="utf-8"?>
+<file path=ppt/slides/slide19.xml><?xml version="1.0" encoding="utf-8"?>
 <p:sld xmlns:a="http://schemas.openxmlformats.org/drawingml/2006/main" xmlns:r="http://schemas.openxmlformats.org/officeDocument/2006/relationships" xmlns:p="http://schemas.openxmlformats.org/presentationml/2006/main">
   <p:cSld>
     <p:spTree>
@@ -12661,7 +13149,7 @@
             <a:fld id="{888928BD-9DD5-4B49-B597-3FD2BD4272DD}" type="slidenum">
               <a:rPr smtClean="0"/>
               <a:pPr/>
-              <a:t>18</a:t>
+              <a:t>19</a:t>
             </a:fld>
             <a:endParaRPr dirty="0"/>
           </a:p>
@@ -12814,7 +13302,7 @@
 </p:sld>
 </file>
 
-<file path=ppt/slides/slide19.xml><?xml version="1.0" encoding="utf-8"?>
+<file path=ppt/slides/slide2.xml><?xml version="1.0" encoding="utf-8"?>
 <p:sld xmlns:a="http://schemas.openxmlformats.org/drawingml/2006/main" xmlns:r="http://schemas.openxmlformats.org/officeDocument/2006/relationships" xmlns:p="http://schemas.openxmlformats.org/presentationml/2006/main">
   <p:cSld>
     <p:spTree>
@@ -12854,7 +13342,35 @@
           <a:p>
             <a:r>
               <a:rPr lang="en-US" dirty="0"/>
-              <a:t>Wizards</a:t>
+              <a:t>Web SDK</a:t>
+            </a:r>
+          </a:p>
+        </p:txBody>
+      </p:sp>
+      <p:sp>
+        <p:nvSpPr>
+          <p:cNvPr id="3" name="Text Placeholder 2">
+            <a:extLst>
+              <a:ext uri="{FF2B5EF4-FFF2-40B4-BE49-F238E27FC236}">
+                <a16:creationId xmlns:a16="http://schemas.microsoft.com/office/drawing/2014/main" id="{60729BCA-336A-514A-B43D-91598CEC28BB}"/>
+              </a:ext>
+            </a:extLst>
+          </p:cNvPr>
+          <p:cNvSpPr>
+            <a:spLocks noGrp="1"/>
+          </p:cNvSpPr>
+          <p:nvPr>
+            <p:ph type="body" sz="quarter" idx="12"/>
+          </p:nvPr>
+        </p:nvSpPr>
+        <p:spPr/>
+        <p:txBody>
+          <a:bodyPr/>
+          <a:lstStyle/>
+          <a:p>
+            <a:r>
+              <a:rPr lang="en-US" dirty="0"/>
+              <a:t>Goal</a:t>
             </a:r>
           </a:p>
         </p:txBody>
@@ -12887,7 +13403,164 @@
             <a:fld id="{888928BD-9DD5-4B49-B597-3FD2BD4272DD}" type="slidenum">
               <a:rPr smtClean="0"/>
               <a:pPr/>
-              <a:t>19</a:t>
+              <a:t>2</a:t>
+            </a:fld>
+            <a:endParaRPr dirty="0"/>
+          </a:p>
+        </p:txBody>
+      </p:sp>
+      <p:sp>
+        <p:nvSpPr>
+          <p:cNvPr id="8" name="TextBox 7">
+            <a:extLst>
+              <a:ext uri="{FF2B5EF4-FFF2-40B4-BE49-F238E27FC236}">
+                <a16:creationId xmlns:a16="http://schemas.microsoft.com/office/drawing/2014/main" id="{8447D49A-9DCE-6C5D-016A-E87EB87B10C1}"/>
+              </a:ext>
+            </a:extLst>
+          </p:cNvPr>
+          <p:cNvSpPr txBox="1"/>
+          <p:nvPr/>
+        </p:nvSpPr>
+        <p:spPr>
+          <a:xfrm>
+            <a:off x="629392" y="2365641"/>
+            <a:ext cx="4857008" cy="646331"/>
+          </a:xfrm>
+          <a:prstGeom prst="rect">
+            <a:avLst/>
+          </a:prstGeom>
+          <a:noFill/>
+        </p:spPr>
+        <p:txBody>
+          <a:bodyPr wrap="square" rtlCol="0">
+            <a:spAutoFit/>
+          </a:bodyPr>
+          <a:lstStyle/>
+          <a:p>
+            <a:r>
+              <a:rPr lang="en-GB" dirty="0">
+                <a:cs typeface="Arial"/>
+              </a:rPr>
+              <a:t>“The goal of the Web SDK is to get developers up and running quickly and easily.”</a:t>
+            </a:r>
+          </a:p>
+        </p:txBody>
+      </p:sp>
+      <p:graphicFrame>
+        <p:nvGraphicFramePr>
+          <p:cNvPr id="7" name="Diagram 6">
+            <a:extLst>
+              <a:ext uri="{FF2B5EF4-FFF2-40B4-BE49-F238E27FC236}">
+                <a16:creationId xmlns:a16="http://schemas.microsoft.com/office/drawing/2014/main" id="{7DDFEED2-E6BF-2933-AA6E-884B92886F36}"/>
+              </a:ext>
+            </a:extLst>
+          </p:cNvPr>
+          <p:cNvGraphicFramePr/>
+          <p:nvPr>
+            <p:extLst>
+              <p:ext uri="{D42A27DB-BD31-4B8C-83A1-F6EECF244321}">
+                <p14:modId xmlns:p14="http://schemas.microsoft.com/office/powerpoint/2010/main" val="2195369843"/>
+              </p:ext>
+            </p:extLst>
+          </p:nvPr>
+        </p:nvGraphicFramePr>
+        <p:xfrm>
+          <a:off x="5721303" y="1103136"/>
+          <a:ext cx="6362419" cy="4651728"/>
+        </p:xfrm>
+        <a:graphic>
+          <a:graphicData uri="http://schemas.openxmlformats.org/drawingml/2006/diagram">
+            <dgm:relIds xmlns:dgm="http://schemas.openxmlformats.org/drawingml/2006/diagram" xmlns:r="http://schemas.openxmlformats.org/officeDocument/2006/relationships" r:dm="rId3" r:lo="rId4" r:qs="rId5" r:cs="rId6"/>
+          </a:graphicData>
+        </a:graphic>
+      </p:graphicFrame>
+    </p:spTree>
+    <p:extLst>
+      <p:ext uri="{BB962C8B-B14F-4D97-AF65-F5344CB8AC3E}">
+        <p14:creationId xmlns:p14="http://schemas.microsoft.com/office/powerpoint/2010/main" val="1789611172"/>
+      </p:ext>
+    </p:extLst>
+  </p:cSld>
+  <p:clrMapOvr>
+    <a:masterClrMapping/>
+  </p:clrMapOvr>
+</p:sld>
+</file>
+
+<file path=ppt/slides/slide20.xml><?xml version="1.0" encoding="utf-8"?>
+<p:sld xmlns:a="http://schemas.openxmlformats.org/drawingml/2006/main" xmlns:r="http://schemas.openxmlformats.org/officeDocument/2006/relationships" xmlns:p="http://schemas.openxmlformats.org/presentationml/2006/main">
+  <p:cSld>
+    <p:spTree>
+      <p:nvGrpSpPr>
+        <p:cNvPr id="1" name=""/>
+        <p:cNvGrpSpPr/>
+        <p:nvPr/>
+      </p:nvGrpSpPr>
+      <p:grpSpPr>
+        <a:xfrm>
+          <a:off x="0" y="0"/>
+          <a:ext cx="0" cy="0"/>
+          <a:chOff x="0" y="0"/>
+          <a:chExt cx="0" cy="0"/>
+        </a:xfrm>
+      </p:grpSpPr>
+      <p:sp>
+        <p:nvSpPr>
+          <p:cNvPr id="2" name="Title 1">
+            <a:extLst>
+              <a:ext uri="{FF2B5EF4-FFF2-40B4-BE49-F238E27FC236}">
+                <a16:creationId xmlns:a16="http://schemas.microsoft.com/office/drawing/2014/main" id="{BA6C69B8-5719-314E-939A-ECE8F8D96F02}"/>
+              </a:ext>
+            </a:extLst>
+          </p:cNvPr>
+          <p:cNvSpPr>
+            <a:spLocks noGrp="1"/>
+          </p:cNvSpPr>
+          <p:nvPr>
+            <p:ph type="title"/>
+          </p:nvPr>
+        </p:nvSpPr>
+        <p:spPr/>
+        <p:txBody>
+          <a:bodyPr/>
+          <a:lstStyle/>
+          <a:p>
+            <a:r>
+              <a:rPr lang="en-US" dirty="0"/>
+              <a:t>Wizards</a:t>
+            </a:r>
+          </a:p>
+        </p:txBody>
+      </p:sp>
+      <p:sp>
+        <p:nvSpPr>
+          <p:cNvPr id="4" name="Slide Number Placeholder 3">
+            <a:extLst>
+              <a:ext uri="{FF2B5EF4-FFF2-40B4-BE49-F238E27FC236}">
+                <a16:creationId xmlns:a16="http://schemas.microsoft.com/office/drawing/2014/main" id="{7DB49043-0D36-3944-8C61-89B95273C808}"/>
+              </a:ext>
+            </a:extLst>
+          </p:cNvPr>
+          <p:cNvSpPr>
+            <a:spLocks noGrp="1"/>
+          </p:cNvSpPr>
+          <p:nvPr>
+            <p:ph type="sldNum" sz="quarter" idx="10"/>
+          </p:nvPr>
+        </p:nvSpPr>
+        <p:spPr/>
+        <p:txBody>
+          <a:bodyPr/>
+          <a:lstStyle/>
+          <a:p>
+            <a:r>
+              <a:rPr lang="en-US"/>
+              <a:t>Page </a:t>
+            </a:r>
+            <a:fld id="{888928BD-9DD5-4B49-B597-3FD2BD4272DD}" type="slidenum">
+              <a:rPr smtClean="0"/>
+              <a:pPr/>
+              <a:t>20</a:t>
             </a:fld>
             <a:endParaRPr dirty="0"/>
           </a:p>
@@ -13051,7 +13724,7 @@
 </p:sld>
 </file>
 
-<file path=ppt/slides/slide2.xml><?xml version="1.0" encoding="utf-8"?>
+<file path=ppt/slides/slide21.xml><?xml version="1.0" encoding="utf-8"?>
 <p:sld xmlns:a="http://schemas.openxmlformats.org/drawingml/2006/main" xmlns:r="http://schemas.openxmlformats.org/officeDocument/2006/relationships" xmlns:p="http://schemas.openxmlformats.org/presentationml/2006/main">
   <p:cSld>
     <p:spTree>
@@ -13091,35 +13764,7 @@
           <a:p>
             <a:r>
               <a:rPr lang="en-US" dirty="0"/>
-              <a:t>Web SDK</a:t>
-            </a:r>
-          </a:p>
-        </p:txBody>
-      </p:sp>
-      <p:sp>
-        <p:nvSpPr>
-          <p:cNvPr id="3" name="Text Placeholder 2">
-            <a:extLst>
-              <a:ext uri="{FF2B5EF4-FFF2-40B4-BE49-F238E27FC236}">
-                <a16:creationId xmlns:a16="http://schemas.microsoft.com/office/drawing/2014/main" id="{60729BCA-336A-514A-B43D-91598CEC28BB}"/>
-              </a:ext>
-            </a:extLst>
-          </p:cNvPr>
-          <p:cNvSpPr>
-            <a:spLocks noGrp="1"/>
-          </p:cNvSpPr>
-          <p:nvPr>
-            <p:ph type="body" sz="quarter" idx="12"/>
-          </p:nvPr>
-        </p:nvSpPr>
-        <p:spPr/>
-        <p:txBody>
-          <a:bodyPr/>
-          <a:lstStyle/>
-          <a:p>
-            <a:r>
-              <a:rPr lang="en-US" dirty="0"/>
-              <a:t>Goal</a:t>
+              <a:t>Wizards</a:t>
             </a:r>
           </a:p>
         </p:txBody>
@@ -13152,164 +13797,7 @@
             <a:fld id="{888928BD-9DD5-4B49-B597-3FD2BD4272DD}" type="slidenum">
               <a:rPr smtClean="0"/>
               <a:pPr/>
-              <a:t>2</a:t>
-            </a:fld>
-            <a:endParaRPr dirty="0"/>
-          </a:p>
-        </p:txBody>
-      </p:sp>
-      <p:sp>
-        <p:nvSpPr>
-          <p:cNvPr id="8" name="TextBox 7">
-            <a:extLst>
-              <a:ext uri="{FF2B5EF4-FFF2-40B4-BE49-F238E27FC236}">
-                <a16:creationId xmlns:a16="http://schemas.microsoft.com/office/drawing/2014/main" id="{8447D49A-9DCE-6C5D-016A-E87EB87B10C1}"/>
-              </a:ext>
-            </a:extLst>
-          </p:cNvPr>
-          <p:cNvSpPr txBox="1"/>
-          <p:nvPr/>
-        </p:nvSpPr>
-        <p:spPr>
-          <a:xfrm>
-            <a:off x="629392" y="2365641"/>
-            <a:ext cx="4857008" cy="646331"/>
-          </a:xfrm>
-          <a:prstGeom prst="rect">
-            <a:avLst/>
-          </a:prstGeom>
-          <a:noFill/>
-        </p:spPr>
-        <p:txBody>
-          <a:bodyPr wrap="square" rtlCol="0">
-            <a:spAutoFit/>
-          </a:bodyPr>
-          <a:lstStyle/>
-          <a:p>
-            <a:r>
-              <a:rPr lang="en-GB" dirty="0">
-                <a:cs typeface="Arial"/>
-              </a:rPr>
-              <a:t>“The goal of the Web SDK is to get developers up and running quickly and easily.”</a:t>
-            </a:r>
-          </a:p>
-        </p:txBody>
-      </p:sp>
-      <p:graphicFrame>
-        <p:nvGraphicFramePr>
-          <p:cNvPr id="7" name="Diagram 6">
-            <a:extLst>
-              <a:ext uri="{FF2B5EF4-FFF2-40B4-BE49-F238E27FC236}">
-                <a16:creationId xmlns:a16="http://schemas.microsoft.com/office/drawing/2014/main" id="{7DDFEED2-E6BF-2933-AA6E-884B92886F36}"/>
-              </a:ext>
-            </a:extLst>
-          </p:cNvPr>
-          <p:cNvGraphicFramePr/>
-          <p:nvPr>
-            <p:extLst>
-              <p:ext uri="{D42A27DB-BD31-4B8C-83A1-F6EECF244321}">
-                <p14:modId xmlns:p14="http://schemas.microsoft.com/office/powerpoint/2010/main" val="2195369843"/>
-              </p:ext>
-            </p:extLst>
-          </p:nvPr>
-        </p:nvGraphicFramePr>
-        <p:xfrm>
-          <a:off x="5721303" y="1103136"/>
-          <a:ext cx="6362419" cy="4651728"/>
-        </p:xfrm>
-        <a:graphic>
-          <a:graphicData uri="http://schemas.openxmlformats.org/drawingml/2006/diagram">
-            <dgm:relIds xmlns:dgm="http://schemas.openxmlformats.org/drawingml/2006/diagram" xmlns:r="http://schemas.openxmlformats.org/officeDocument/2006/relationships" r:dm="rId3" r:lo="rId4" r:qs="rId5" r:cs="rId6"/>
-          </a:graphicData>
-        </a:graphic>
-      </p:graphicFrame>
-    </p:spTree>
-    <p:extLst>
-      <p:ext uri="{BB962C8B-B14F-4D97-AF65-F5344CB8AC3E}">
-        <p14:creationId xmlns:p14="http://schemas.microsoft.com/office/powerpoint/2010/main" val="1789611172"/>
-      </p:ext>
-    </p:extLst>
-  </p:cSld>
-  <p:clrMapOvr>
-    <a:masterClrMapping/>
-  </p:clrMapOvr>
-</p:sld>
-</file>
-
-<file path=ppt/slides/slide20.xml><?xml version="1.0" encoding="utf-8"?>
-<p:sld xmlns:a="http://schemas.openxmlformats.org/drawingml/2006/main" xmlns:r="http://schemas.openxmlformats.org/officeDocument/2006/relationships" xmlns:p="http://schemas.openxmlformats.org/presentationml/2006/main">
-  <p:cSld>
-    <p:spTree>
-      <p:nvGrpSpPr>
-        <p:cNvPr id="1" name=""/>
-        <p:cNvGrpSpPr/>
-        <p:nvPr/>
-      </p:nvGrpSpPr>
-      <p:grpSpPr>
-        <a:xfrm>
-          <a:off x="0" y="0"/>
-          <a:ext cx="0" cy="0"/>
-          <a:chOff x="0" y="0"/>
-          <a:chExt cx="0" cy="0"/>
-        </a:xfrm>
-      </p:grpSpPr>
-      <p:sp>
-        <p:nvSpPr>
-          <p:cNvPr id="2" name="Title 1">
-            <a:extLst>
-              <a:ext uri="{FF2B5EF4-FFF2-40B4-BE49-F238E27FC236}">
-                <a16:creationId xmlns:a16="http://schemas.microsoft.com/office/drawing/2014/main" id="{BA6C69B8-5719-314E-939A-ECE8F8D96F02}"/>
-              </a:ext>
-            </a:extLst>
-          </p:cNvPr>
-          <p:cNvSpPr>
-            <a:spLocks noGrp="1"/>
-          </p:cNvSpPr>
-          <p:nvPr>
-            <p:ph type="title"/>
-          </p:nvPr>
-        </p:nvSpPr>
-        <p:spPr/>
-        <p:txBody>
-          <a:bodyPr/>
-          <a:lstStyle/>
-          <a:p>
-            <a:r>
-              <a:rPr lang="en-US" dirty="0"/>
-              <a:t>Wizards</a:t>
-            </a:r>
-          </a:p>
-        </p:txBody>
-      </p:sp>
-      <p:sp>
-        <p:nvSpPr>
-          <p:cNvPr id="4" name="Slide Number Placeholder 3">
-            <a:extLst>
-              <a:ext uri="{FF2B5EF4-FFF2-40B4-BE49-F238E27FC236}">
-                <a16:creationId xmlns:a16="http://schemas.microsoft.com/office/drawing/2014/main" id="{7DB49043-0D36-3944-8C61-89B95273C808}"/>
-              </a:ext>
-            </a:extLst>
-          </p:cNvPr>
-          <p:cNvSpPr>
-            <a:spLocks noGrp="1"/>
-          </p:cNvSpPr>
-          <p:nvPr>
-            <p:ph type="sldNum" sz="quarter" idx="10"/>
-          </p:nvPr>
-        </p:nvSpPr>
-        <p:spPr/>
-        <p:txBody>
-          <a:bodyPr/>
-          <a:lstStyle/>
-          <a:p>
-            <a:r>
-              <a:rPr lang="en-US"/>
-              <a:t>Page </a:t>
-            </a:r>
-            <a:fld id="{888928BD-9DD5-4B49-B597-3FD2BD4272DD}" type="slidenum">
-              <a:rPr smtClean="0"/>
-              <a:pPr/>
-              <a:t>20</a:t>
+              <a:t>21</a:t>
             </a:fld>
             <a:endParaRPr dirty="0"/>
           </a:p>
@@ -13473,7 +13961,7 @@
 </p:sld>
 </file>
 
-<file path=ppt/slides/slide21.xml><?xml version="1.0" encoding="utf-8"?>
+<file path=ppt/slides/slide22.xml><?xml version="1.0" encoding="utf-8"?>
 <p:sld xmlns:a="http://schemas.openxmlformats.org/drawingml/2006/main" xmlns:r="http://schemas.openxmlformats.org/officeDocument/2006/relationships" xmlns:p="http://schemas.openxmlformats.org/presentationml/2006/main">
   <p:cSld>
     <p:spTree>
@@ -13546,7 +14034,7 @@
             <a:fld id="{888928BD-9DD5-4B49-B597-3FD2BD4272DD}" type="slidenum">
               <a:rPr smtClean="0"/>
               <a:pPr/>
-              <a:t>21</a:t>
+              <a:t>22</a:t>
             </a:fld>
             <a:endParaRPr dirty="0"/>
           </a:p>
@@ -14561,7 +15049,7 @@
 </p:sld>
 </file>
 
-<file path=ppt/slides/slide22.xml><?xml version="1.0" encoding="utf-8"?>
+<file path=ppt/slides/slide23.xml><?xml version="1.0" encoding="utf-8"?>
 <p:sld xmlns:a="http://schemas.openxmlformats.org/drawingml/2006/main" xmlns:r="http://schemas.openxmlformats.org/officeDocument/2006/relationships" xmlns:p="http://schemas.openxmlformats.org/presentationml/2006/main">
   <p:cSld>
     <p:spTree>
@@ -14634,7 +15122,7 @@
             <a:fld id="{888928BD-9DD5-4B49-B597-3FD2BD4272DD}" type="slidenum">
               <a:rPr smtClean="0"/>
               <a:pPr/>
-              <a:t>22</a:t>
+              <a:t>23</a:t>
             </a:fld>
             <a:endParaRPr dirty="0"/>
           </a:p>
@@ -14781,7 +15269,7 @@
 </p:sld>
 </file>
 
-<file path=ppt/slides/slide23.xml><?xml version="1.0" encoding="utf-8"?>
+<file path=ppt/slides/slide24.xml><?xml version="1.0" encoding="utf-8"?>
 <p:sld xmlns:a="http://schemas.openxmlformats.org/drawingml/2006/main" xmlns:r="http://schemas.openxmlformats.org/officeDocument/2006/relationships" xmlns:p="http://schemas.openxmlformats.org/presentationml/2006/main">
   <p:cSld>
     <p:spTree>
@@ -14854,7 +15342,7 @@
             <a:fld id="{888928BD-9DD5-4B49-B597-3FD2BD4272DD}" type="slidenum">
               <a:rPr smtClean="0"/>
               <a:pPr/>
-              <a:t>23</a:t>
+              <a:t>24</a:t>
             </a:fld>
             <a:endParaRPr dirty="0"/>
           </a:p>
@@ -15869,7 +16357,7 @@
 </p:sld>
 </file>
 
-<file path=ppt/slides/slide24.xml><?xml version="1.0" encoding="utf-8"?>
+<file path=ppt/slides/slide25.xml><?xml version="1.0" encoding="utf-8"?>
 <p:sld xmlns:a="http://schemas.openxmlformats.org/drawingml/2006/main" xmlns:r="http://schemas.openxmlformats.org/officeDocument/2006/relationships" xmlns:p="http://schemas.openxmlformats.org/presentationml/2006/main">
   <p:cSld>
     <p:spTree>
@@ -15942,7 +16430,7 @@
             <a:fld id="{888928BD-9DD5-4B49-B597-3FD2BD4272DD}" type="slidenum">
               <a:rPr smtClean="0"/>
               <a:pPr/>
-              <a:t>24</a:t>
+              <a:t>25</a:t>
             </a:fld>
             <a:endParaRPr dirty="0"/>
           </a:p>
@@ -16059,7 +16547,7 @@
 </p:sld>
 </file>
 
-<file path=ppt/slides/slide25.xml><?xml version="1.0" encoding="utf-8"?>
+<file path=ppt/slides/slide26.xml><?xml version="1.0" encoding="utf-8"?>
 <p:sld xmlns:a="http://schemas.openxmlformats.org/drawingml/2006/main" xmlns:r="http://schemas.openxmlformats.org/officeDocument/2006/relationships" xmlns:p="http://schemas.openxmlformats.org/presentationml/2006/main">
   <p:cSld>
     <p:spTree>
@@ -16132,7 +16620,7 @@
             <a:fld id="{888928BD-9DD5-4B49-B597-3FD2BD4272DD}" type="slidenum">
               <a:rPr smtClean="0"/>
               <a:pPr/>
-              <a:t>25</a:t>
+              <a:t>26</a:t>
             </a:fld>
             <a:endParaRPr dirty="0"/>
           </a:p>
@@ -17147,7 +17635,7 @@
 </p:sld>
 </file>
 
-<file path=ppt/slides/slide26.xml><?xml version="1.0" encoding="utf-8"?>
+<file path=ppt/slides/slide27.xml><?xml version="1.0" encoding="utf-8"?>
 <p:sld xmlns:a="http://schemas.openxmlformats.org/drawingml/2006/main" xmlns:r="http://schemas.openxmlformats.org/officeDocument/2006/relationships" xmlns:p="http://schemas.openxmlformats.org/presentationml/2006/main">
   <p:cSld>
     <p:spTree>
@@ -17220,7 +17708,7 @@
             <a:fld id="{888928BD-9DD5-4B49-B597-3FD2BD4272DD}" type="slidenum">
               <a:rPr smtClean="0"/>
               <a:pPr/>
-              <a:t>26</a:t>
+              <a:t>27</a:t>
             </a:fld>
             <a:endParaRPr dirty="0"/>
           </a:p>
@@ -17465,7 +17953,7 @@
 </p:sld>
 </file>
 
-<file path=ppt/slides/slide27.xml><?xml version="1.0" encoding="utf-8"?>
+<file path=ppt/slides/slide28.xml><?xml version="1.0" encoding="utf-8"?>
 <p:sld xmlns:a="http://schemas.openxmlformats.org/drawingml/2006/main" xmlns:r="http://schemas.openxmlformats.org/officeDocument/2006/relationships" xmlns:p="http://schemas.openxmlformats.org/presentationml/2006/main">
   <p:cSld>
     <p:spTree>
@@ -17544,7 +18032,7 @@
             <a:fld id="{888928BD-9DD5-4B49-B597-3FD2BD4272DD}" type="slidenum">
               <a:rPr smtClean="0"/>
               <a:pPr/>
-              <a:t>27</a:t>
+              <a:t>28</a:t>
             </a:fld>
             <a:endParaRPr dirty="0"/>
           </a:p>
@@ -18559,7 +19047,7 @@
 </p:sld>
 </file>
 
-<file path=ppt/slides/slide28.xml><?xml version="1.0" encoding="utf-8"?>
+<file path=ppt/slides/slide29.xml><?xml version="1.0" encoding="utf-8"?>
 <p:sld xmlns:a="http://schemas.openxmlformats.org/drawingml/2006/main" xmlns:r="http://schemas.openxmlformats.org/officeDocument/2006/relationships" xmlns:p="http://schemas.openxmlformats.org/presentationml/2006/main">
   <p:cSld>
     <p:spTree>
@@ -18610,7 +19098,7 @@
             <a:fld id="{888928BD-9DD5-4B49-B597-3FD2BD4272DD}" type="slidenum">
               <a:rPr smtClean="0"/>
               <a:pPr/>
-              <a:t>28</a:t>
+              <a:t>29</a:t>
             </a:fld>
             <a:endParaRPr dirty="0"/>
           </a:p>
@@ -18846,1096 +19334,6 @@
     <p:extLst>
       <p:ext uri="{BB962C8B-B14F-4D97-AF65-F5344CB8AC3E}">
         <p14:creationId xmlns:p14="http://schemas.microsoft.com/office/powerpoint/2010/main" val="3676996385"/>
-      </p:ext>
-    </p:extLst>
-  </p:cSld>
-  <p:clrMapOvr>
-    <a:masterClrMapping/>
-  </p:clrMapOvr>
-</p:sld>
-</file>
-
-<file path=ppt/slides/slide29.xml><?xml version="1.0" encoding="utf-8"?>
-<p:sld xmlns:a="http://schemas.openxmlformats.org/drawingml/2006/main" xmlns:r="http://schemas.openxmlformats.org/officeDocument/2006/relationships" xmlns:p="http://schemas.openxmlformats.org/presentationml/2006/main">
-  <p:cSld>
-    <p:spTree>
-      <p:nvGrpSpPr>
-        <p:cNvPr id="1" name=""/>
-        <p:cNvGrpSpPr/>
-        <p:nvPr/>
-      </p:nvGrpSpPr>
-      <p:grpSpPr>
-        <a:xfrm>
-          <a:off x="0" y="0"/>
-          <a:ext cx="0" cy="0"/>
-          <a:chOff x="0" y="0"/>
-          <a:chExt cx="0" cy="0"/>
-        </a:xfrm>
-      </p:grpSpPr>
-      <p:sp>
-        <p:nvSpPr>
-          <p:cNvPr id="2" name="Title 1">
-            <a:extLst>
-              <a:ext uri="{FF2B5EF4-FFF2-40B4-BE49-F238E27FC236}">
-                <a16:creationId xmlns:a16="http://schemas.microsoft.com/office/drawing/2014/main" id="{A6C77857-B45A-4747-82AA-96BA705CFC2D}"/>
-              </a:ext>
-            </a:extLst>
-          </p:cNvPr>
-          <p:cNvSpPr>
-            <a:spLocks noGrp="1"/>
-          </p:cNvSpPr>
-          <p:nvPr>
-            <p:ph type="title"/>
-          </p:nvPr>
-        </p:nvSpPr>
-        <p:spPr/>
-        <p:txBody>
-          <a:bodyPr/>
-          <a:lstStyle/>
-          <a:p>
-            <a:r>
-              <a:rPr lang="en-US" dirty="0"/>
-              <a:t>Documentation and Tutorials</a:t>
-            </a:r>
-          </a:p>
-        </p:txBody>
-      </p:sp>
-      <p:sp>
-        <p:nvSpPr>
-          <p:cNvPr id="3" name="Slide Number Placeholder 2">
-            <a:extLst>
-              <a:ext uri="{FF2B5EF4-FFF2-40B4-BE49-F238E27FC236}">
-                <a16:creationId xmlns:a16="http://schemas.microsoft.com/office/drawing/2014/main" id="{AD78CFC0-2CFF-074F-B1A4-92AFF69ED2B7}"/>
-              </a:ext>
-            </a:extLst>
-          </p:cNvPr>
-          <p:cNvSpPr>
-            <a:spLocks noGrp="1"/>
-          </p:cNvSpPr>
-          <p:nvPr>
-            <p:ph type="sldNum" sz="quarter" idx="10"/>
-          </p:nvPr>
-        </p:nvSpPr>
-        <p:spPr/>
-        <p:txBody>
-          <a:bodyPr/>
-          <a:lstStyle/>
-          <a:p>
-            <a:r>
-              <a:rPr lang="en-US"/>
-              <a:t>Page </a:t>
-            </a:r>
-            <a:fld id="{888928BD-9DD5-4B49-B597-3FD2BD4272DD}" type="slidenum">
-              <a:rPr smtClean="0"/>
-              <a:pPr/>
-              <a:t>29</a:t>
-            </a:fld>
-            <a:endParaRPr dirty="0"/>
-          </a:p>
-        </p:txBody>
-      </p:sp>
-      <p:sp>
-        <p:nvSpPr>
-          <p:cNvPr id="5" name="Picture Placeholder 4">
-            <a:extLst>
-              <a:ext uri="{FF2B5EF4-FFF2-40B4-BE49-F238E27FC236}">
-                <a16:creationId xmlns:a16="http://schemas.microsoft.com/office/drawing/2014/main" id="{FCF1EE34-53A7-6DC0-98C5-29FF46495D87}"/>
-              </a:ext>
-            </a:extLst>
-          </p:cNvPr>
-          <p:cNvSpPr>
-            <a:spLocks noGrp="1"/>
-          </p:cNvSpPr>
-          <p:nvPr>
-            <p:ph type="pic" sz="quarter" idx="13"/>
-          </p:nvPr>
-        </p:nvSpPr>
-        <p:spPr/>
-        <p:txBody>
-          <a:bodyPr/>
-          <a:lstStyle/>
-          <a:p>
-            <a:endParaRPr lang="en-US"/>
-          </a:p>
-        </p:txBody>
-      </p:sp>
-      <p:pic>
-        <p:nvPicPr>
-          <p:cNvPr id="6" name="Picture Placeholder 7">
-            <a:extLst>
-              <a:ext uri="{FF2B5EF4-FFF2-40B4-BE49-F238E27FC236}">
-                <a16:creationId xmlns:a16="http://schemas.microsoft.com/office/drawing/2014/main" id="{CCEBB85F-4AB3-6B73-7AD2-AAB6F9437AD8}"/>
-              </a:ext>
-            </a:extLst>
-          </p:cNvPr>
-          <p:cNvPicPr>
-            <a:picLocks noChangeAspect="1"/>
-          </p:cNvPicPr>
-          <p:nvPr/>
-        </p:nvPicPr>
-        <p:blipFill>
-          <a:blip r:embed="rId2" cstate="print">
-            <a:extLst>
-              <a:ext uri="{28A0092B-C50C-407E-A947-70E740481C1C}">
-                <a14:useLocalDpi xmlns:a14="http://schemas.microsoft.com/office/drawing/2010/main"/>
-              </a:ext>
-            </a:extLst>
-          </a:blip>
-          <a:srcRect l="252" r="252"/>
-          <a:stretch>
-            <a:fillRect/>
-          </a:stretch>
-        </p:blipFill>
-        <p:spPr>
-          <a:xfrm>
-            <a:off x="6254749" y="0"/>
-            <a:ext cx="5963085" cy="6858008"/>
-          </a:xfrm>
-          <a:custGeom>
-            <a:avLst/>
-            <a:gdLst>
-              <a:gd name="connsiteX0" fmla="*/ 0 w 8097830"/>
-              <a:gd name="connsiteY0" fmla="*/ 1780875 h 8534400"/>
-              <a:gd name="connsiteX1" fmla="*/ 1780875 w 8097830"/>
-              <a:gd name="connsiteY1" fmla="*/ 0 h 8534400"/>
-              <a:gd name="connsiteX2" fmla="*/ 6316955 w 8097830"/>
-              <a:gd name="connsiteY2" fmla="*/ 0 h 8534400"/>
-              <a:gd name="connsiteX3" fmla="*/ 8097830 w 8097830"/>
-              <a:gd name="connsiteY3" fmla="*/ 1780875 h 8534400"/>
-              <a:gd name="connsiteX4" fmla="*/ 8097830 w 8097830"/>
-              <a:gd name="connsiteY4" fmla="*/ 6753525 h 8534400"/>
-              <a:gd name="connsiteX5" fmla="*/ 6316955 w 8097830"/>
-              <a:gd name="connsiteY5" fmla="*/ 8534400 h 8534400"/>
-              <a:gd name="connsiteX6" fmla="*/ 1780875 w 8097830"/>
-              <a:gd name="connsiteY6" fmla="*/ 8534400 h 8534400"/>
-              <a:gd name="connsiteX7" fmla="*/ 0 w 8097830"/>
-              <a:gd name="connsiteY7" fmla="*/ 6753525 h 8534400"/>
-              <a:gd name="connsiteX8" fmla="*/ 0 w 8097830"/>
-              <a:gd name="connsiteY8" fmla="*/ 1780875 h 8534400"/>
-              <a:gd name="connsiteX0" fmla="*/ 0 w 8150271"/>
-              <a:gd name="connsiteY0" fmla="*/ 1780875 h 8534400"/>
-              <a:gd name="connsiteX1" fmla="*/ 1780875 w 8150271"/>
-              <a:gd name="connsiteY1" fmla="*/ 0 h 8534400"/>
-              <a:gd name="connsiteX2" fmla="*/ 6316955 w 8150271"/>
-              <a:gd name="connsiteY2" fmla="*/ 0 h 8534400"/>
-              <a:gd name="connsiteX3" fmla="*/ 7988300 w 8150271"/>
-              <a:gd name="connsiteY3" fmla="*/ 1158339 h 8534400"/>
-              <a:gd name="connsiteX4" fmla="*/ 8097830 w 8150271"/>
-              <a:gd name="connsiteY4" fmla="*/ 1780875 h 8534400"/>
-              <a:gd name="connsiteX5" fmla="*/ 8097830 w 8150271"/>
-              <a:gd name="connsiteY5" fmla="*/ 6753525 h 8534400"/>
-              <a:gd name="connsiteX6" fmla="*/ 6316955 w 8150271"/>
-              <a:gd name="connsiteY6" fmla="*/ 8534400 h 8534400"/>
-              <a:gd name="connsiteX7" fmla="*/ 1780875 w 8150271"/>
-              <a:gd name="connsiteY7" fmla="*/ 8534400 h 8534400"/>
-              <a:gd name="connsiteX8" fmla="*/ 0 w 8150271"/>
-              <a:gd name="connsiteY8" fmla="*/ 6753525 h 8534400"/>
-              <a:gd name="connsiteX9" fmla="*/ 0 w 8150271"/>
-              <a:gd name="connsiteY9" fmla="*/ 1780875 h 8534400"/>
-              <a:gd name="connsiteX0" fmla="*/ 0 w 8097830"/>
-              <a:gd name="connsiteY0" fmla="*/ 1780875 h 8534400"/>
-              <a:gd name="connsiteX1" fmla="*/ 1780875 w 8097830"/>
-              <a:gd name="connsiteY1" fmla="*/ 0 h 8534400"/>
-              <a:gd name="connsiteX2" fmla="*/ 6316955 w 8097830"/>
-              <a:gd name="connsiteY2" fmla="*/ 0 h 8534400"/>
-              <a:gd name="connsiteX3" fmla="*/ 5981700 w 8097830"/>
-              <a:gd name="connsiteY3" fmla="*/ 1552039 h 8534400"/>
-              <a:gd name="connsiteX4" fmla="*/ 8097830 w 8097830"/>
-              <a:gd name="connsiteY4" fmla="*/ 1780875 h 8534400"/>
-              <a:gd name="connsiteX5" fmla="*/ 8097830 w 8097830"/>
-              <a:gd name="connsiteY5" fmla="*/ 6753525 h 8534400"/>
-              <a:gd name="connsiteX6" fmla="*/ 6316955 w 8097830"/>
-              <a:gd name="connsiteY6" fmla="*/ 8534400 h 8534400"/>
-              <a:gd name="connsiteX7" fmla="*/ 1780875 w 8097830"/>
-              <a:gd name="connsiteY7" fmla="*/ 8534400 h 8534400"/>
-              <a:gd name="connsiteX8" fmla="*/ 0 w 8097830"/>
-              <a:gd name="connsiteY8" fmla="*/ 6753525 h 8534400"/>
-              <a:gd name="connsiteX9" fmla="*/ 0 w 8097830"/>
-              <a:gd name="connsiteY9" fmla="*/ 1780875 h 8534400"/>
-              <a:gd name="connsiteX0" fmla="*/ 0 w 8097830"/>
-              <a:gd name="connsiteY0" fmla="*/ 1780875 h 8534400"/>
-              <a:gd name="connsiteX1" fmla="*/ 279400 w 8097830"/>
-              <a:gd name="connsiteY1" fmla="*/ 812264 h 8534400"/>
-              <a:gd name="connsiteX2" fmla="*/ 1780875 w 8097830"/>
-              <a:gd name="connsiteY2" fmla="*/ 0 h 8534400"/>
-              <a:gd name="connsiteX3" fmla="*/ 6316955 w 8097830"/>
-              <a:gd name="connsiteY3" fmla="*/ 0 h 8534400"/>
-              <a:gd name="connsiteX4" fmla="*/ 5981700 w 8097830"/>
-              <a:gd name="connsiteY4" fmla="*/ 1552039 h 8534400"/>
-              <a:gd name="connsiteX5" fmla="*/ 8097830 w 8097830"/>
-              <a:gd name="connsiteY5" fmla="*/ 1780875 h 8534400"/>
-              <a:gd name="connsiteX6" fmla="*/ 8097830 w 8097830"/>
-              <a:gd name="connsiteY6" fmla="*/ 6753525 h 8534400"/>
-              <a:gd name="connsiteX7" fmla="*/ 6316955 w 8097830"/>
-              <a:gd name="connsiteY7" fmla="*/ 8534400 h 8534400"/>
-              <a:gd name="connsiteX8" fmla="*/ 1780875 w 8097830"/>
-              <a:gd name="connsiteY8" fmla="*/ 8534400 h 8534400"/>
-              <a:gd name="connsiteX9" fmla="*/ 0 w 8097830"/>
-              <a:gd name="connsiteY9" fmla="*/ 6753525 h 8534400"/>
-              <a:gd name="connsiteX10" fmla="*/ 0 w 8097830"/>
-              <a:gd name="connsiteY10" fmla="*/ 1780875 h 8534400"/>
-              <a:gd name="connsiteX0" fmla="*/ 0 w 8097830"/>
-              <a:gd name="connsiteY0" fmla="*/ 1780875 h 8534400"/>
-              <a:gd name="connsiteX1" fmla="*/ 279400 w 8097830"/>
-              <a:gd name="connsiteY1" fmla="*/ 812264 h 8534400"/>
-              <a:gd name="connsiteX2" fmla="*/ 1780875 w 8097830"/>
-              <a:gd name="connsiteY2" fmla="*/ 0 h 8534400"/>
-              <a:gd name="connsiteX3" fmla="*/ 6316955 w 8097830"/>
-              <a:gd name="connsiteY3" fmla="*/ 0 h 8534400"/>
-              <a:gd name="connsiteX4" fmla="*/ 5981700 w 8097830"/>
-              <a:gd name="connsiteY4" fmla="*/ 1552039 h 8534400"/>
-              <a:gd name="connsiteX5" fmla="*/ 8097830 w 8097830"/>
-              <a:gd name="connsiteY5" fmla="*/ 1780875 h 8534400"/>
-              <a:gd name="connsiteX6" fmla="*/ 8097830 w 8097830"/>
-              <a:gd name="connsiteY6" fmla="*/ 6753525 h 8534400"/>
-              <a:gd name="connsiteX7" fmla="*/ 6316955 w 8097830"/>
-              <a:gd name="connsiteY7" fmla="*/ 8534400 h 8534400"/>
-              <a:gd name="connsiteX8" fmla="*/ 1780875 w 8097830"/>
-              <a:gd name="connsiteY8" fmla="*/ 8534400 h 8534400"/>
-              <a:gd name="connsiteX9" fmla="*/ 0 w 8097830"/>
-              <a:gd name="connsiteY9" fmla="*/ 6753525 h 8534400"/>
-              <a:gd name="connsiteX10" fmla="*/ 0 w 8097830"/>
-              <a:gd name="connsiteY10" fmla="*/ 1780875 h 8534400"/>
-              <a:gd name="connsiteX0" fmla="*/ 18252 w 8116082"/>
-              <a:gd name="connsiteY0" fmla="*/ 1780875 h 8534400"/>
-              <a:gd name="connsiteX1" fmla="*/ 21427 w 8116082"/>
-              <a:gd name="connsiteY1" fmla="*/ 1548864 h 8534400"/>
-              <a:gd name="connsiteX2" fmla="*/ 297652 w 8116082"/>
-              <a:gd name="connsiteY2" fmla="*/ 812264 h 8534400"/>
-              <a:gd name="connsiteX3" fmla="*/ 1799127 w 8116082"/>
-              <a:gd name="connsiteY3" fmla="*/ 0 h 8534400"/>
-              <a:gd name="connsiteX4" fmla="*/ 6335207 w 8116082"/>
-              <a:gd name="connsiteY4" fmla="*/ 0 h 8534400"/>
-              <a:gd name="connsiteX5" fmla="*/ 5999952 w 8116082"/>
-              <a:gd name="connsiteY5" fmla="*/ 1552039 h 8534400"/>
-              <a:gd name="connsiteX6" fmla="*/ 8116082 w 8116082"/>
-              <a:gd name="connsiteY6" fmla="*/ 1780875 h 8534400"/>
-              <a:gd name="connsiteX7" fmla="*/ 8116082 w 8116082"/>
-              <a:gd name="connsiteY7" fmla="*/ 6753525 h 8534400"/>
-              <a:gd name="connsiteX8" fmla="*/ 6335207 w 8116082"/>
-              <a:gd name="connsiteY8" fmla="*/ 8534400 h 8534400"/>
-              <a:gd name="connsiteX9" fmla="*/ 1799127 w 8116082"/>
-              <a:gd name="connsiteY9" fmla="*/ 8534400 h 8534400"/>
-              <a:gd name="connsiteX10" fmla="*/ 18252 w 8116082"/>
-              <a:gd name="connsiteY10" fmla="*/ 6753525 h 8534400"/>
-              <a:gd name="connsiteX11" fmla="*/ 18252 w 8116082"/>
-              <a:gd name="connsiteY11" fmla="*/ 1780875 h 8534400"/>
-              <a:gd name="connsiteX0" fmla="*/ 14027 w 8111857"/>
-              <a:gd name="connsiteY0" fmla="*/ 1780875 h 8534400"/>
-              <a:gd name="connsiteX1" fmla="*/ 17202 w 8111857"/>
-              <a:gd name="connsiteY1" fmla="*/ 1548864 h 8534400"/>
-              <a:gd name="connsiteX2" fmla="*/ 293427 w 8111857"/>
-              <a:gd name="connsiteY2" fmla="*/ 812264 h 8534400"/>
-              <a:gd name="connsiteX3" fmla="*/ 1794902 w 8111857"/>
-              <a:gd name="connsiteY3" fmla="*/ 0 h 8534400"/>
-              <a:gd name="connsiteX4" fmla="*/ 6330982 w 8111857"/>
-              <a:gd name="connsiteY4" fmla="*/ 0 h 8534400"/>
-              <a:gd name="connsiteX5" fmla="*/ 5995727 w 8111857"/>
-              <a:gd name="connsiteY5" fmla="*/ 1552039 h 8534400"/>
-              <a:gd name="connsiteX6" fmla="*/ 8111857 w 8111857"/>
-              <a:gd name="connsiteY6" fmla="*/ 1780875 h 8534400"/>
-              <a:gd name="connsiteX7" fmla="*/ 8111857 w 8111857"/>
-              <a:gd name="connsiteY7" fmla="*/ 6753525 h 8534400"/>
-              <a:gd name="connsiteX8" fmla="*/ 6330982 w 8111857"/>
-              <a:gd name="connsiteY8" fmla="*/ 8534400 h 8534400"/>
-              <a:gd name="connsiteX9" fmla="*/ 1794902 w 8111857"/>
-              <a:gd name="connsiteY9" fmla="*/ 8534400 h 8534400"/>
-              <a:gd name="connsiteX10" fmla="*/ 14027 w 8111857"/>
-              <a:gd name="connsiteY10" fmla="*/ 6753525 h 8534400"/>
-              <a:gd name="connsiteX11" fmla="*/ 14027 w 8111857"/>
-              <a:gd name="connsiteY11" fmla="*/ 1780875 h 8534400"/>
-              <a:gd name="connsiteX0" fmla="*/ 14027 w 8111857"/>
-              <a:gd name="connsiteY0" fmla="*/ 1795726 h 8549251"/>
-              <a:gd name="connsiteX1" fmla="*/ 17202 w 8111857"/>
-              <a:gd name="connsiteY1" fmla="*/ 1563715 h 8549251"/>
-              <a:gd name="connsiteX2" fmla="*/ 293427 w 8111857"/>
-              <a:gd name="connsiteY2" fmla="*/ 827115 h 8549251"/>
-              <a:gd name="connsiteX3" fmla="*/ 6330982 w 8111857"/>
-              <a:gd name="connsiteY3" fmla="*/ 14851 h 8549251"/>
-              <a:gd name="connsiteX4" fmla="*/ 5995727 w 8111857"/>
-              <a:gd name="connsiteY4" fmla="*/ 1566890 h 8549251"/>
-              <a:gd name="connsiteX5" fmla="*/ 8111857 w 8111857"/>
-              <a:gd name="connsiteY5" fmla="*/ 1795726 h 8549251"/>
-              <a:gd name="connsiteX6" fmla="*/ 8111857 w 8111857"/>
-              <a:gd name="connsiteY6" fmla="*/ 6768376 h 8549251"/>
-              <a:gd name="connsiteX7" fmla="*/ 6330982 w 8111857"/>
-              <a:gd name="connsiteY7" fmla="*/ 8549251 h 8549251"/>
-              <a:gd name="connsiteX8" fmla="*/ 1794902 w 8111857"/>
-              <a:gd name="connsiteY8" fmla="*/ 8549251 h 8549251"/>
-              <a:gd name="connsiteX9" fmla="*/ 14027 w 8111857"/>
-              <a:gd name="connsiteY9" fmla="*/ 6768376 h 8549251"/>
-              <a:gd name="connsiteX10" fmla="*/ 14027 w 8111857"/>
-              <a:gd name="connsiteY10" fmla="*/ 1795726 h 8549251"/>
-              <a:gd name="connsiteX0" fmla="*/ 14027 w 8111857"/>
-              <a:gd name="connsiteY0" fmla="*/ 1786760 h 8540285"/>
-              <a:gd name="connsiteX1" fmla="*/ 17202 w 8111857"/>
-              <a:gd name="connsiteY1" fmla="*/ 1554749 h 8540285"/>
-              <a:gd name="connsiteX2" fmla="*/ 293427 w 8111857"/>
-              <a:gd name="connsiteY2" fmla="*/ 818149 h 8540285"/>
-              <a:gd name="connsiteX3" fmla="*/ 6330982 w 8111857"/>
-              <a:gd name="connsiteY3" fmla="*/ 15029 h 8540285"/>
-              <a:gd name="connsiteX4" fmla="*/ 5995727 w 8111857"/>
-              <a:gd name="connsiteY4" fmla="*/ 1557924 h 8540285"/>
-              <a:gd name="connsiteX5" fmla="*/ 8111857 w 8111857"/>
-              <a:gd name="connsiteY5" fmla="*/ 1786760 h 8540285"/>
-              <a:gd name="connsiteX6" fmla="*/ 8111857 w 8111857"/>
-              <a:gd name="connsiteY6" fmla="*/ 6759410 h 8540285"/>
-              <a:gd name="connsiteX7" fmla="*/ 6330982 w 8111857"/>
-              <a:gd name="connsiteY7" fmla="*/ 8540285 h 8540285"/>
-              <a:gd name="connsiteX8" fmla="*/ 1794902 w 8111857"/>
-              <a:gd name="connsiteY8" fmla="*/ 8540285 h 8540285"/>
-              <a:gd name="connsiteX9" fmla="*/ 14027 w 8111857"/>
-              <a:gd name="connsiteY9" fmla="*/ 6759410 h 8540285"/>
-              <a:gd name="connsiteX10" fmla="*/ 14027 w 8111857"/>
-              <a:gd name="connsiteY10" fmla="*/ 1786760 h 8540285"/>
-              <a:gd name="connsiteX0" fmla="*/ 14027 w 8111857"/>
-              <a:gd name="connsiteY0" fmla="*/ 968611 h 7722136"/>
-              <a:gd name="connsiteX1" fmla="*/ 17202 w 8111857"/>
-              <a:gd name="connsiteY1" fmla="*/ 736600 h 7722136"/>
-              <a:gd name="connsiteX2" fmla="*/ 293427 w 8111857"/>
-              <a:gd name="connsiteY2" fmla="*/ 0 h 7722136"/>
-              <a:gd name="connsiteX3" fmla="*/ 5995727 w 8111857"/>
-              <a:gd name="connsiteY3" fmla="*/ 739775 h 7722136"/>
-              <a:gd name="connsiteX4" fmla="*/ 8111857 w 8111857"/>
-              <a:gd name="connsiteY4" fmla="*/ 968611 h 7722136"/>
-              <a:gd name="connsiteX5" fmla="*/ 8111857 w 8111857"/>
-              <a:gd name="connsiteY5" fmla="*/ 5941261 h 7722136"/>
-              <a:gd name="connsiteX6" fmla="*/ 6330982 w 8111857"/>
-              <a:gd name="connsiteY6" fmla="*/ 7722136 h 7722136"/>
-              <a:gd name="connsiteX7" fmla="*/ 1794902 w 8111857"/>
-              <a:gd name="connsiteY7" fmla="*/ 7722136 h 7722136"/>
-              <a:gd name="connsiteX8" fmla="*/ 14027 w 8111857"/>
-              <a:gd name="connsiteY8" fmla="*/ 5941261 h 7722136"/>
-              <a:gd name="connsiteX9" fmla="*/ 14027 w 8111857"/>
-              <a:gd name="connsiteY9" fmla="*/ 968611 h 7722136"/>
-              <a:gd name="connsiteX0" fmla="*/ 7684 w 8105514"/>
-              <a:gd name="connsiteY0" fmla="*/ 968611 h 7722136"/>
-              <a:gd name="connsiteX1" fmla="*/ 20384 w 8105514"/>
-              <a:gd name="connsiteY1" fmla="*/ 514350 h 7722136"/>
-              <a:gd name="connsiteX2" fmla="*/ 287084 w 8105514"/>
-              <a:gd name="connsiteY2" fmla="*/ 0 h 7722136"/>
-              <a:gd name="connsiteX3" fmla="*/ 5989384 w 8105514"/>
-              <a:gd name="connsiteY3" fmla="*/ 739775 h 7722136"/>
-              <a:gd name="connsiteX4" fmla="*/ 8105514 w 8105514"/>
-              <a:gd name="connsiteY4" fmla="*/ 968611 h 7722136"/>
-              <a:gd name="connsiteX5" fmla="*/ 8105514 w 8105514"/>
-              <a:gd name="connsiteY5" fmla="*/ 5941261 h 7722136"/>
-              <a:gd name="connsiteX6" fmla="*/ 6324639 w 8105514"/>
-              <a:gd name="connsiteY6" fmla="*/ 7722136 h 7722136"/>
-              <a:gd name="connsiteX7" fmla="*/ 1788559 w 8105514"/>
-              <a:gd name="connsiteY7" fmla="*/ 7722136 h 7722136"/>
-              <a:gd name="connsiteX8" fmla="*/ 7684 w 8105514"/>
-              <a:gd name="connsiteY8" fmla="*/ 5941261 h 7722136"/>
-              <a:gd name="connsiteX9" fmla="*/ 7684 w 8105514"/>
-              <a:gd name="connsiteY9" fmla="*/ 968611 h 7722136"/>
-              <a:gd name="connsiteX0" fmla="*/ 7684 w 8105514"/>
-              <a:gd name="connsiteY0" fmla="*/ 749536 h 7722136"/>
-              <a:gd name="connsiteX1" fmla="*/ 20384 w 8105514"/>
-              <a:gd name="connsiteY1" fmla="*/ 514350 h 7722136"/>
-              <a:gd name="connsiteX2" fmla="*/ 287084 w 8105514"/>
-              <a:gd name="connsiteY2" fmla="*/ 0 h 7722136"/>
-              <a:gd name="connsiteX3" fmla="*/ 5989384 w 8105514"/>
-              <a:gd name="connsiteY3" fmla="*/ 739775 h 7722136"/>
-              <a:gd name="connsiteX4" fmla="*/ 8105514 w 8105514"/>
-              <a:gd name="connsiteY4" fmla="*/ 968611 h 7722136"/>
-              <a:gd name="connsiteX5" fmla="*/ 8105514 w 8105514"/>
-              <a:gd name="connsiteY5" fmla="*/ 5941261 h 7722136"/>
-              <a:gd name="connsiteX6" fmla="*/ 6324639 w 8105514"/>
-              <a:gd name="connsiteY6" fmla="*/ 7722136 h 7722136"/>
-              <a:gd name="connsiteX7" fmla="*/ 1788559 w 8105514"/>
-              <a:gd name="connsiteY7" fmla="*/ 7722136 h 7722136"/>
-              <a:gd name="connsiteX8" fmla="*/ 7684 w 8105514"/>
-              <a:gd name="connsiteY8" fmla="*/ 5941261 h 7722136"/>
-              <a:gd name="connsiteX9" fmla="*/ 7684 w 8105514"/>
-              <a:gd name="connsiteY9" fmla="*/ 749536 h 7722136"/>
-              <a:gd name="connsiteX0" fmla="*/ 236220 w 8334050"/>
-              <a:gd name="connsiteY0" fmla="*/ 774564 h 7747164"/>
-              <a:gd name="connsiteX1" fmla="*/ 515620 w 8334050"/>
-              <a:gd name="connsiteY1" fmla="*/ 25028 h 7747164"/>
-              <a:gd name="connsiteX2" fmla="*/ 6217920 w 8334050"/>
-              <a:gd name="connsiteY2" fmla="*/ 764803 h 7747164"/>
-              <a:gd name="connsiteX3" fmla="*/ 8334050 w 8334050"/>
-              <a:gd name="connsiteY3" fmla="*/ 993639 h 7747164"/>
-              <a:gd name="connsiteX4" fmla="*/ 8334050 w 8334050"/>
-              <a:gd name="connsiteY4" fmla="*/ 5966289 h 7747164"/>
-              <a:gd name="connsiteX5" fmla="*/ 6553175 w 8334050"/>
-              <a:gd name="connsiteY5" fmla="*/ 7747164 h 7747164"/>
-              <a:gd name="connsiteX6" fmla="*/ 2017095 w 8334050"/>
-              <a:gd name="connsiteY6" fmla="*/ 7747164 h 7747164"/>
-              <a:gd name="connsiteX7" fmla="*/ 236220 w 8334050"/>
-              <a:gd name="connsiteY7" fmla="*/ 5966289 h 7747164"/>
-              <a:gd name="connsiteX8" fmla="*/ 236220 w 8334050"/>
-              <a:gd name="connsiteY8" fmla="*/ 774564 h 7747164"/>
-              <a:gd name="connsiteX0" fmla="*/ 0 w 8097830"/>
-              <a:gd name="connsiteY0" fmla="*/ 396179 h 7368779"/>
-              <a:gd name="connsiteX1" fmla="*/ 5981700 w 8097830"/>
-              <a:gd name="connsiteY1" fmla="*/ 386418 h 7368779"/>
-              <a:gd name="connsiteX2" fmla="*/ 8097830 w 8097830"/>
-              <a:gd name="connsiteY2" fmla="*/ 615254 h 7368779"/>
-              <a:gd name="connsiteX3" fmla="*/ 8097830 w 8097830"/>
-              <a:gd name="connsiteY3" fmla="*/ 5587904 h 7368779"/>
-              <a:gd name="connsiteX4" fmla="*/ 6316955 w 8097830"/>
-              <a:gd name="connsiteY4" fmla="*/ 7368779 h 7368779"/>
-              <a:gd name="connsiteX5" fmla="*/ 1780875 w 8097830"/>
-              <a:gd name="connsiteY5" fmla="*/ 7368779 h 7368779"/>
-              <a:gd name="connsiteX6" fmla="*/ 0 w 8097830"/>
-              <a:gd name="connsiteY6" fmla="*/ 5587904 h 7368779"/>
-              <a:gd name="connsiteX7" fmla="*/ 0 w 8097830"/>
-              <a:gd name="connsiteY7" fmla="*/ 396179 h 7368779"/>
-              <a:gd name="connsiteX0" fmla="*/ 0 w 8097830"/>
-              <a:gd name="connsiteY0" fmla="*/ 397045 h 7366470"/>
-              <a:gd name="connsiteX1" fmla="*/ 5981700 w 8097830"/>
-              <a:gd name="connsiteY1" fmla="*/ 384109 h 7366470"/>
-              <a:gd name="connsiteX2" fmla="*/ 8097830 w 8097830"/>
-              <a:gd name="connsiteY2" fmla="*/ 612945 h 7366470"/>
-              <a:gd name="connsiteX3" fmla="*/ 8097830 w 8097830"/>
-              <a:gd name="connsiteY3" fmla="*/ 5585595 h 7366470"/>
-              <a:gd name="connsiteX4" fmla="*/ 6316955 w 8097830"/>
-              <a:gd name="connsiteY4" fmla="*/ 7366470 h 7366470"/>
-              <a:gd name="connsiteX5" fmla="*/ 1780875 w 8097830"/>
-              <a:gd name="connsiteY5" fmla="*/ 7366470 h 7366470"/>
-              <a:gd name="connsiteX6" fmla="*/ 0 w 8097830"/>
-              <a:gd name="connsiteY6" fmla="*/ 5585595 h 7366470"/>
-              <a:gd name="connsiteX7" fmla="*/ 0 w 8097830"/>
-              <a:gd name="connsiteY7" fmla="*/ 397045 h 7366470"/>
-              <a:gd name="connsiteX0" fmla="*/ 0 w 8097830"/>
-              <a:gd name="connsiteY0" fmla="*/ 191935 h 7161360"/>
-              <a:gd name="connsiteX1" fmla="*/ 5981700 w 8097830"/>
-              <a:gd name="connsiteY1" fmla="*/ 178999 h 7161360"/>
-              <a:gd name="connsiteX2" fmla="*/ 8097830 w 8097830"/>
-              <a:gd name="connsiteY2" fmla="*/ 407835 h 7161360"/>
-              <a:gd name="connsiteX3" fmla="*/ 8097830 w 8097830"/>
-              <a:gd name="connsiteY3" fmla="*/ 5380485 h 7161360"/>
-              <a:gd name="connsiteX4" fmla="*/ 6316955 w 8097830"/>
-              <a:gd name="connsiteY4" fmla="*/ 7161360 h 7161360"/>
-              <a:gd name="connsiteX5" fmla="*/ 1780875 w 8097830"/>
-              <a:gd name="connsiteY5" fmla="*/ 7161360 h 7161360"/>
-              <a:gd name="connsiteX6" fmla="*/ 0 w 8097830"/>
-              <a:gd name="connsiteY6" fmla="*/ 5380485 h 7161360"/>
-              <a:gd name="connsiteX7" fmla="*/ 0 w 8097830"/>
-              <a:gd name="connsiteY7" fmla="*/ 191935 h 7161360"/>
-              <a:gd name="connsiteX0" fmla="*/ 6350 w 8097830"/>
-              <a:gd name="connsiteY0" fmla="*/ 182410 h 7161360"/>
-              <a:gd name="connsiteX1" fmla="*/ 5981700 w 8097830"/>
-              <a:gd name="connsiteY1" fmla="*/ 178999 h 7161360"/>
-              <a:gd name="connsiteX2" fmla="*/ 8097830 w 8097830"/>
-              <a:gd name="connsiteY2" fmla="*/ 407835 h 7161360"/>
-              <a:gd name="connsiteX3" fmla="*/ 8097830 w 8097830"/>
-              <a:gd name="connsiteY3" fmla="*/ 5380485 h 7161360"/>
-              <a:gd name="connsiteX4" fmla="*/ 6316955 w 8097830"/>
-              <a:gd name="connsiteY4" fmla="*/ 7161360 h 7161360"/>
-              <a:gd name="connsiteX5" fmla="*/ 1780875 w 8097830"/>
-              <a:gd name="connsiteY5" fmla="*/ 7161360 h 7161360"/>
-              <a:gd name="connsiteX6" fmla="*/ 0 w 8097830"/>
-              <a:gd name="connsiteY6" fmla="*/ 5380485 h 7161360"/>
-              <a:gd name="connsiteX7" fmla="*/ 6350 w 8097830"/>
-              <a:gd name="connsiteY7" fmla="*/ 182410 h 7161360"/>
-              <a:gd name="connsiteX0" fmla="*/ 611 w 8098441"/>
-              <a:gd name="connsiteY0" fmla="*/ 176060 h 7161360"/>
-              <a:gd name="connsiteX1" fmla="*/ 5982311 w 8098441"/>
-              <a:gd name="connsiteY1" fmla="*/ 178999 h 7161360"/>
-              <a:gd name="connsiteX2" fmla="*/ 8098441 w 8098441"/>
-              <a:gd name="connsiteY2" fmla="*/ 407835 h 7161360"/>
-              <a:gd name="connsiteX3" fmla="*/ 8098441 w 8098441"/>
-              <a:gd name="connsiteY3" fmla="*/ 5380485 h 7161360"/>
-              <a:gd name="connsiteX4" fmla="*/ 6317566 w 8098441"/>
-              <a:gd name="connsiteY4" fmla="*/ 7161360 h 7161360"/>
-              <a:gd name="connsiteX5" fmla="*/ 1781486 w 8098441"/>
-              <a:gd name="connsiteY5" fmla="*/ 7161360 h 7161360"/>
-              <a:gd name="connsiteX6" fmla="*/ 611 w 8098441"/>
-              <a:gd name="connsiteY6" fmla="*/ 5380485 h 7161360"/>
-              <a:gd name="connsiteX7" fmla="*/ 611 w 8098441"/>
-              <a:gd name="connsiteY7" fmla="*/ 176060 h 7161360"/>
-              <a:gd name="connsiteX0" fmla="*/ 611 w 8098441"/>
-              <a:gd name="connsiteY0" fmla="*/ 176060 h 7161360"/>
-              <a:gd name="connsiteX1" fmla="*/ 5982311 w 8098441"/>
-              <a:gd name="connsiteY1" fmla="*/ 178999 h 7161360"/>
-              <a:gd name="connsiteX2" fmla="*/ 8098441 w 8098441"/>
-              <a:gd name="connsiteY2" fmla="*/ 407835 h 7161360"/>
-              <a:gd name="connsiteX3" fmla="*/ 8098441 w 8098441"/>
-              <a:gd name="connsiteY3" fmla="*/ 5380485 h 7161360"/>
-              <a:gd name="connsiteX4" fmla="*/ 5981016 w 8098441"/>
-              <a:gd name="connsiteY4" fmla="*/ 7047060 h 7161360"/>
-              <a:gd name="connsiteX5" fmla="*/ 1781486 w 8098441"/>
-              <a:gd name="connsiteY5" fmla="*/ 7161360 h 7161360"/>
-              <a:gd name="connsiteX6" fmla="*/ 611 w 8098441"/>
-              <a:gd name="connsiteY6" fmla="*/ 5380485 h 7161360"/>
-              <a:gd name="connsiteX7" fmla="*/ 611 w 8098441"/>
-              <a:gd name="connsiteY7" fmla="*/ 176060 h 7161360"/>
-              <a:gd name="connsiteX0" fmla="*/ 611 w 8098441"/>
-              <a:gd name="connsiteY0" fmla="*/ 176060 h 7047060"/>
-              <a:gd name="connsiteX1" fmla="*/ 5982311 w 8098441"/>
-              <a:gd name="connsiteY1" fmla="*/ 178999 h 7047060"/>
-              <a:gd name="connsiteX2" fmla="*/ 8098441 w 8098441"/>
-              <a:gd name="connsiteY2" fmla="*/ 407835 h 7047060"/>
-              <a:gd name="connsiteX3" fmla="*/ 8098441 w 8098441"/>
-              <a:gd name="connsiteY3" fmla="*/ 5380485 h 7047060"/>
-              <a:gd name="connsiteX4" fmla="*/ 5981016 w 8098441"/>
-              <a:gd name="connsiteY4" fmla="*/ 7047060 h 7047060"/>
-              <a:gd name="connsiteX5" fmla="*/ 1133786 w 8098441"/>
-              <a:gd name="connsiteY5" fmla="*/ 7015310 h 7047060"/>
-              <a:gd name="connsiteX6" fmla="*/ 611 w 8098441"/>
-              <a:gd name="connsiteY6" fmla="*/ 5380485 h 7047060"/>
-              <a:gd name="connsiteX7" fmla="*/ 611 w 8098441"/>
-              <a:gd name="connsiteY7" fmla="*/ 176060 h 7047060"/>
-              <a:gd name="connsiteX0" fmla="*/ 611 w 8098441"/>
-              <a:gd name="connsiteY0" fmla="*/ 176060 h 7047060"/>
-              <a:gd name="connsiteX1" fmla="*/ 5982311 w 8098441"/>
-              <a:gd name="connsiteY1" fmla="*/ 178999 h 7047060"/>
-              <a:gd name="connsiteX2" fmla="*/ 8098441 w 8098441"/>
-              <a:gd name="connsiteY2" fmla="*/ 407835 h 7047060"/>
-              <a:gd name="connsiteX3" fmla="*/ 8098441 w 8098441"/>
-              <a:gd name="connsiteY3" fmla="*/ 5380485 h 7047060"/>
-              <a:gd name="connsiteX4" fmla="*/ 5981016 w 8098441"/>
-              <a:gd name="connsiteY4" fmla="*/ 7047060 h 7047060"/>
-              <a:gd name="connsiteX5" fmla="*/ 1133786 w 8098441"/>
-              <a:gd name="connsiteY5" fmla="*/ 7015310 h 7047060"/>
-              <a:gd name="connsiteX6" fmla="*/ 611 w 8098441"/>
-              <a:gd name="connsiteY6" fmla="*/ 5380485 h 7047060"/>
-              <a:gd name="connsiteX7" fmla="*/ 611 w 8098441"/>
-              <a:gd name="connsiteY7" fmla="*/ 176060 h 7047060"/>
-              <a:gd name="connsiteX0" fmla="*/ 593 w 8098423"/>
-              <a:gd name="connsiteY0" fmla="*/ 176060 h 7047060"/>
-              <a:gd name="connsiteX1" fmla="*/ 5982293 w 8098423"/>
-              <a:gd name="connsiteY1" fmla="*/ 178999 h 7047060"/>
-              <a:gd name="connsiteX2" fmla="*/ 8098423 w 8098423"/>
-              <a:gd name="connsiteY2" fmla="*/ 407835 h 7047060"/>
-              <a:gd name="connsiteX3" fmla="*/ 8098423 w 8098423"/>
-              <a:gd name="connsiteY3" fmla="*/ 5380485 h 7047060"/>
-              <a:gd name="connsiteX4" fmla="*/ 5980998 w 8098423"/>
-              <a:gd name="connsiteY4" fmla="*/ 7047060 h 7047060"/>
-              <a:gd name="connsiteX5" fmla="*/ 1133768 w 8098423"/>
-              <a:gd name="connsiteY5" fmla="*/ 7015310 h 7047060"/>
-              <a:gd name="connsiteX6" fmla="*/ 593 w 8098423"/>
-              <a:gd name="connsiteY6" fmla="*/ 5380485 h 7047060"/>
-              <a:gd name="connsiteX7" fmla="*/ 593 w 8098423"/>
-              <a:gd name="connsiteY7" fmla="*/ 176060 h 7047060"/>
-              <a:gd name="connsiteX0" fmla="*/ 989 w 8098819"/>
-              <a:gd name="connsiteY0" fmla="*/ 176060 h 7047060"/>
-              <a:gd name="connsiteX1" fmla="*/ 5982689 w 8098819"/>
-              <a:gd name="connsiteY1" fmla="*/ 178999 h 7047060"/>
-              <a:gd name="connsiteX2" fmla="*/ 8098819 w 8098819"/>
-              <a:gd name="connsiteY2" fmla="*/ 407835 h 7047060"/>
-              <a:gd name="connsiteX3" fmla="*/ 8098819 w 8098819"/>
-              <a:gd name="connsiteY3" fmla="*/ 5380485 h 7047060"/>
-              <a:gd name="connsiteX4" fmla="*/ 5981394 w 8098819"/>
-              <a:gd name="connsiteY4" fmla="*/ 7047060 h 7047060"/>
-              <a:gd name="connsiteX5" fmla="*/ 1134164 w 8098819"/>
-              <a:gd name="connsiteY5" fmla="*/ 7015310 h 7047060"/>
-              <a:gd name="connsiteX6" fmla="*/ 989 w 8098819"/>
-              <a:gd name="connsiteY6" fmla="*/ 5380485 h 7047060"/>
-              <a:gd name="connsiteX7" fmla="*/ 989 w 8098819"/>
-              <a:gd name="connsiteY7" fmla="*/ 176060 h 7047060"/>
-              <a:gd name="connsiteX0" fmla="*/ 980 w 8098810"/>
-              <a:gd name="connsiteY0" fmla="*/ 176060 h 7047060"/>
-              <a:gd name="connsiteX1" fmla="*/ 5982680 w 8098810"/>
-              <a:gd name="connsiteY1" fmla="*/ 178999 h 7047060"/>
-              <a:gd name="connsiteX2" fmla="*/ 8098810 w 8098810"/>
-              <a:gd name="connsiteY2" fmla="*/ 407835 h 7047060"/>
-              <a:gd name="connsiteX3" fmla="*/ 8098810 w 8098810"/>
-              <a:gd name="connsiteY3" fmla="*/ 5380485 h 7047060"/>
-              <a:gd name="connsiteX4" fmla="*/ 5981385 w 8098810"/>
-              <a:gd name="connsiteY4" fmla="*/ 7047060 h 7047060"/>
-              <a:gd name="connsiteX5" fmla="*/ 1134155 w 8098810"/>
-              <a:gd name="connsiteY5" fmla="*/ 7015310 h 7047060"/>
-              <a:gd name="connsiteX6" fmla="*/ 980 w 8098810"/>
-              <a:gd name="connsiteY6" fmla="*/ 5380485 h 7047060"/>
-              <a:gd name="connsiteX7" fmla="*/ 980 w 8098810"/>
-              <a:gd name="connsiteY7" fmla="*/ 176060 h 7047060"/>
-              <a:gd name="connsiteX0" fmla="*/ 1113 w 8098943"/>
-              <a:gd name="connsiteY0" fmla="*/ 176060 h 7047060"/>
-              <a:gd name="connsiteX1" fmla="*/ 5982813 w 8098943"/>
-              <a:gd name="connsiteY1" fmla="*/ 178999 h 7047060"/>
-              <a:gd name="connsiteX2" fmla="*/ 8098943 w 8098943"/>
-              <a:gd name="connsiteY2" fmla="*/ 407835 h 7047060"/>
-              <a:gd name="connsiteX3" fmla="*/ 8098943 w 8098943"/>
-              <a:gd name="connsiteY3" fmla="*/ 5380485 h 7047060"/>
-              <a:gd name="connsiteX4" fmla="*/ 5981518 w 8098943"/>
-              <a:gd name="connsiteY4" fmla="*/ 7047060 h 7047060"/>
-              <a:gd name="connsiteX5" fmla="*/ 1134288 w 8098943"/>
-              <a:gd name="connsiteY5" fmla="*/ 7015310 h 7047060"/>
-              <a:gd name="connsiteX6" fmla="*/ 1113 w 8098943"/>
-              <a:gd name="connsiteY6" fmla="*/ 5380485 h 7047060"/>
-              <a:gd name="connsiteX7" fmla="*/ 1113 w 8098943"/>
-              <a:gd name="connsiteY7" fmla="*/ 176060 h 7047060"/>
-              <a:gd name="connsiteX0" fmla="*/ 6145 w 8103975"/>
-              <a:gd name="connsiteY0" fmla="*/ 176060 h 7047060"/>
-              <a:gd name="connsiteX1" fmla="*/ 5987845 w 8103975"/>
-              <a:gd name="connsiteY1" fmla="*/ 178999 h 7047060"/>
-              <a:gd name="connsiteX2" fmla="*/ 8103975 w 8103975"/>
-              <a:gd name="connsiteY2" fmla="*/ 407835 h 7047060"/>
-              <a:gd name="connsiteX3" fmla="*/ 8103975 w 8103975"/>
-              <a:gd name="connsiteY3" fmla="*/ 5380485 h 7047060"/>
-              <a:gd name="connsiteX4" fmla="*/ 5986550 w 8103975"/>
-              <a:gd name="connsiteY4" fmla="*/ 7047060 h 7047060"/>
-              <a:gd name="connsiteX5" fmla="*/ 1139320 w 8103975"/>
-              <a:gd name="connsiteY5" fmla="*/ 7015310 h 7047060"/>
-              <a:gd name="connsiteX6" fmla="*/ 6145 w 8103975"/>
-              <a:gd name="connsiteY6" fmla="*/ 5380485 h 7047060"/>
-              <a:gd name="connsiteX7" fmla="*/ 6145 w 8103975"/>
-              <a:gd name="connsiteY7" fmla="*/ 176060 h 7047060"/>
-              <a:gd name="connsiteX0" fmla="*/ 6145 w 8103975"/>
-              <a:gd name="connsiteY0" fmla="*/ 176060 h 7047060"/>
-              <a:gd name="connsiteX1" fmla="*/ 5987845 w 8103975"/>
-              <a:gd name="connsiteY1" fmla="*/ 178999 h 7047060"/>
-              <a:gd name="connsiteX2" fmla="*/ 8103975 w 8103975"/>
-              <a:gd name="connsiteY2" fmla="*/ 407835 h 7047060"/>
-              <a:gd name="connsiteX3" fmla="*/ 8103975 w 8103975"/>
-              <a:gd name="connsiteY3" fmla="*/ 5380485 h 7047060"/>
-              <a:gd name="connsiteX4" fmla="*/ 5986550 w 8103975"/>
-              <a:gd name="connsiteY4" fmla="*/ 7047060 h 7047060"/>
-              <a:gd name="connsiteX5" fmla="*/ 1139320 w 8103975"/>
-              <a:gd name="connsiteY5" fmla="*/ 7015310 h 7047060"/>
-              <a:gd name="connsiteX6" fmla="*/ 6145 w 8103975"/>
-              <a:gd name="connsiteY6" fmla="*/ 5380485 h 7047060"/>
-              <a:gd name="connsiteX7" fmla="*/ 6145 w 8103975"/>
-              <a:gd name="connsiteY7" fmla="*/ 176060 h 7047060"/>
-              <a:gd name="connsiteX0" fmla="*/ 6145 w 8103975"/>
-              <a:gd name="connsiteY0" fmla="*/ 176060 h 7015310"/>
-              <a:gd name="connsiteX1" fmla="*/ 5987845 w 8103975"/>
-              <a:gd name="connsiteY1" fmla="*/ 178999 h 7015310"/>
-              <a:gd name="connsiteX2" fmla="*/ 8103975 w 8103975"/>
-              <a:gd name="connsiteY2" fmla="*/ 407835 h 7015310"/>
-              <a:gd name="connsiteX3" fmla="*/ 8103975 w 8103975"/>
-              <a:gd name="connsiteY3" fmla="*/ 5380485 h 7015310"/>
-              <a:gd name="connsiteX4" fmla="*/ 5983375 w 8103975"/>
-              <a:gd name="connsiteY4" fmla="*/ 7015310 h 7015310"/>
-              <a:gd name="connsiteX5" fmla="*/ 1139320 w 8103975"/>
-              <a:gd name="connsiteY5" fmla="*/ 7015310 h 7015310"/>
-              <a:gd name="connsiteX6" fmla="*/ 6145 w 8103975"/>
-              <a:gd name="connsiteY6" fmla="*/ 5380485 h 7015310"/>
-              <a:gd name="connsiteX7" fmla="*/ 6145 w 8103975"/>
-              <a:gd name="connsiteY7" fmla="*/ 176060 h 7015310"/>
-              <a:gd name="connsiteX0" fmla="*/ 6145 w 8103975"/>
-              <a:gd name="connsiteY0" fmla="*/ 176060 h 7015310"/>
-              <a:gd name="connsiteX1" fmla="*/ 5987845 w 8103975"/>
-              <a:gd name="connsiteY1" fmla="*/ 178999 h 7015310"/>
-              <a:gd name="connsiteX2" fmla="*/ 8103975 w 8103975"/>
-              <a:gd name="connsiteY2" fmla="*/ 407835 h 7015310"/>
-              <a:gd name="connsiteX3" fmla="*/ 8103975 w 8103975"/>
-              <a:gd name="connsiteY3" fmla="*/ 5380485 h 7015310"/>
-              <a:gd name="connsiteX4" fmla="*/ 5983375 w 8103975"/>
-              <a:gd name="connsiteY4" fmla="*/ 7015310 h 7015310"/>
-              <a:gd name="connsiteX5" fmla="*/ 1139320 w 8103975"/>
-              <a:gd name="connsiteY5" fmla="*/ 7015310 h 7015310"/>
-              <a:gd name="connsiteX6" fmla="*/ 6145 w 8103975"/>
-              <a:gd name="connsiteY6" fmla="*/ 5380485 h 7015310"/>
-              <a:gd name="connsiteX7" fmla="*/ 6145 w 8103975"/>
-              <a:gd name="connsiteY7" fmla="*/ 176060 h 7015310"/>
-              <a:gd name="connsiteX0" fmla="*/ 6145 w 8103975"/>
-              <a:gd name="connsiteY0" fmla="*/ 176060 h 7015310"/>
-              <a:gd name="connsiteX1" fmla="*/ 5987845 w 8103975"/>
-              <a:gd name="connsiteY1" fmla="*/ 178999 h 7015310"/>
-              <a:gd name="connsiteX2" fmla="*/ 8103975 w 8103975"/>
-              <a:gd name="connsiteY2" fmla="*/ 407835 h 7015310"/>
-              <a:gd name="connsiteX3" fmla="*/ 8103975 w 8103975"/>
-              <a:gd name="connsiteY3" fmla="*/ 5380485 h 7015310"/>
-              <a:gd name="connsiteX4" fmla="*/ 5983375 w 8103975"/>
-              <a:gd name="connsiteY4" fmla="*/ 7015310 h 7015310"/>
-              <a:gd name="connsiteX5" fmla="*/ 1139320 w 8103975"/>
-              <a:gd name="connsiteY5" fmla="*/ 7015310 h 7015310"/>
-              <a:gd name="connsiteX6" fmla="*/ 6145 w 8103975"/>
-              <a:gd name="connsiteY6" fmla="*/ 5380485 h 7015310"/>
-              <a:gd name="connsiteX7" fmla="*/ 6145 w 8103975"/>
-              <a:gd name="connsiteY7" fmla="*/ 176060 h 7015310"/>
-              <a:gd name="connsiteX0" fmla="*/ 6145 w 8103975"/>
-              <a:gd name="connsiteY0" fmla="*/ 186280 h 7025530"/>
-              <a:gd name="connsiteX1" fmla="*/ 5984670 w 8103975"/>
-              <a:gd name="connsiteY1" fmla="*/ 151119 h 7025530"/>
-              <a:gd name="connsiteX2" fmla="*/ 8103975 w 8103975"/>
-              <a:gd name="connsiteY2" fmla="*/ 418055 h 7025530"/>
-              <a:gd name="connsiteX3" fmla="*/ 8103975 w 8103975"/>
-              <a:gd name="connsiteY3" fmla="*/ 5390705 h 7025530"/>
-              <a:gd name="connsiteX4" fmla="*/ 5983375 w 8103975"/>
-              <a:gd name="connsiteY4" fmla="*/ 7025530 h 7025530"/>
-              <a:gd name="connsiteX5" fmla="*/ 1139320 w 8103975"/>
-              <a:gd name="connsiteY5" fmla="*/ 7025530 h 7025530"/>
-              <a:gd name="connsiteX6" fmla="*/ 6145 w 8103975"/>
-              <a:gd name="connsiteY6" fmla="*/ 5390705 h 7025530"/>
-              <a:gd name="connsiteX7" fmla="*/ 6145 w 8103975"/>
-              <a:gd name="connsiteY7" fmla="*/ 186280 h 7025530"/>
-              <a:gd name="connsiteX0" fmla="*/ 6145 w 8103975"/>
-              <a:gd name="connsiteY0" fmla="*/ 134828 h 6974078"/>
-              <a:gd name="connsiteX1" fmla="*/ 5984670 w 8103975"/>
-              <a:gd name="connsiteY1" fmla="*/ 99667 h 6974078"/>
-              <a:gd name="connsiteX2" fmla="*/ 8103975 w 8103975"/>
-              <a:gd name="connsiteY2" fmla="*/ 366603 h 6974078"/>
-              <a:gd name="connsiteX3" fmla="*/ 8103975 w 8103975"/>
-              <a:gd name="connsiteY3" fmla="*/ 5339253 h 6974078"/>
-              <a:gd name="connsiteX4" fmla="*/ 5983375 w 8103975"/>
-              <a:gd name="connsiteY4" fmla="*/ 6974078 h 6974078"/>
-              <a:gd name="connsiteX5" fmla="*/ 1139320 w 8103975"/>
-              <a:gd name="connsiteY5" fmla="*/ 6974078 h 6974078"/>
-              <a:gd name="connsiteX6" fmla="*/ 6145 w 8103975"/>
-              <a:gd name="connsiteY6" fmla="*/ 5339253 h 6974078"/>
-              <a:gd name="connsiteX7" fmla="*/ 6145 w 8103975"/>
-              <a:gd name="connsiteY7" fmla="*/ 134828 h 6974078"/>
-              <a:gd name="connsiteX0" fmla="*/ 6145 w 8103975"/>
-              <a:gd name="connsiteY0" fmla="*/ 35161 h 6874411"/>
-              <a:gd name="connsiteX1" fmla="*/ 5984670 w 8103975"/>
-              <a:gd name="connsiteY1" fmla="*/ 0 h 6874411"/>
-              <a:gd name="connsiteX2" fmla="*/ 8103975 w 8103975"/>
-              <a:gd name="connsiteY2" fmla="*/ 5239586 h 6874411"/>
-              <a:gd name="connsiteX3" fmla="*/ 5983375 w 8103975"/>
-              <a:gd name="connsiteY3" fmla="*/ 6874411 h 6874411"/>
-              <a:gd name="connsiteX4" fmla="*/ 1139320 w 8103975"/>
-              <a:gd name="connsiteY4" fmla="*/ 6874411 h 6874411"/>
-              <a:gd name="connsiteX5" fmla="*/ 6145 w 8103975"/>
-              <a:gd name="connsiteY5" fmla="*/ 5239586 h 6874411"/>
-              <a:gd name="connsiteX6" fmla="*/ 6145 w 8103975"/>
-              <a:gd name="connsiteY6" fmla="*/ 35161 h 6874411"/>
-              <a:gd name="connsiteX0" fmla="*/ 6145 w 6662323"/>
-              <a:gd name="connsiteY0" fmla="*/ 35161 h 6874411"/>
-              <a:gd name="connsiteX1" fmla="*/ 5984670 w 6662323"/>
-              <a:gd name="connsiteY1" fmla="*/ 0 h 6874411"/>
-              <a:gd name="connsiteX2" fmla="*/ 5983375 w 6662323"/>
-              <a:gd name="connsiteY2" fmla="*/ 6874411 h 6874411"/>
-              <a:gd name="connsiteX3" fmla="*/ 1139320 w 6662323"/>
-              <a:gd name="connsiteY3" fmla="*/ 6874411 h 6874411"/>
-              <a:gd name="connsiteX4" fmla="*/ 6145 w 6662323"/>
-              <a:gd name="connsiteY4" fmla="*/ 5239586 h 6874411"/>
-              <a:gd name="connsiteX5" fmla="*/ 6145 w 6662323"/>
-              <a:gd name="connsiteY5" fmla="*/ 35161 h 6874411"/>
-              <a:gd name="connsiteX0" fmla="*/ 6145 w 6429576"/>
-              <a:gd name="connsiteY0" fmla="*/ 35161 h 6874411"/>
-              <a:gd name="connsiteX1" fmla="*/ 5984670 w 6429576"/>
-              <a:gd name="connsiteY1" fmla="*/ 0 h 6874411"/>
-              <a:gd name="connsiteX2" fmla="*/ 5983375 w 6429576"/>
-              <a:gd name="connsiteY2" fmla="*/ 6874411 h 6874411"/>
-              <a:gd name="connsiteX3" fmla="*/ 1139320 w 6429576"/>
-              <a:gd name="connsiteY3" fmla="*/ 6874411 h 6874411"/>
-              <a:gd name="connsiteX4" fmla="*/ 6145 w 6429576"/>
-              <a:gd name="connsiteY4" fmla="*/ 5239586 h 6874411"/>
-              <a:gd name="connsiteX5" fmla="*/ 6145 w 6429576"/>
-              <a:gd name="connsiteY5" fmla="*/ 35161 h 6874411"/>
-              <a:gd name="connsiteX0" fmla="*/ 6145 w 5991227"/>
-              <a:gd name="connsiteY0" fmla="*/ 35161 h 6874411"/>
-              <a:gd name="connsiteX1" fmla="*/ 5984670 w 5991227"/>
-              <a:gd name="connsiteY1" fmla="*/ 0 h 6874411"/>
-              <a:gd name="connsiteX2" fmla="*/ 5983375 w 5991227"/>
-              <a:gd name="connsiteY2" fmla="*/ 6874411 h 6874411"/>
-              <a:gd name="connsiteX3" fmla="*/ 1139320 w 5991227"/>
-              <a:gd name="connsiteY3" fmla="*/ 6874411 h 6874411"/>
-              <a:gd name="connsiteX4" fmla="*/ 6145 w 5991227"/>
-              <a:gd name="connsiteY4" fmla="*/ 5239586 h 6874411"/>
-              <a:gd name="connsiteX5" fmla="*/ 6145 w 5991227"/>
-              <a:gd name="connsiteY5" fmla="*/ 35161 h 6874411"/>
-              <a:gd name="connsiteX0" fmla="*/ 82310 w 6070567"/>
-              <a:gd name="connsiteY0" fmla="*/ 6586 h 6874411"/>
-              <a:gd name="connsiteX1" fmla="*/ 6064010 w 6070567"/>
-              <a:gd name="connsiteY1" fmla="*/ 0 h 6874411"/>
-              <a:gd name="connsiteX2" fmla="*/ 6062715 w 6070567"/>
-              <a:gd name="connsiteY2" fmla="*/ 6874411 h 6874411"/>
-              <a:gd name="connsiteX3" fmla="*/ 1218660 w 6070567"/>
-              <a:gd name="connsiteY3" fmla="*/ 6874411 h 6874411"/>
-              <a:gd name="connsiteX4" fmla="*/ 85485 w 6070567"/>
-              <a:gd name="connsiteY4" fmla="*/ 5239586 h 6874411"/>
-              <a:gd name="connsiteX5" fmla="*/ 82310 w 6070567"/>
-              <a:gd name="connsiteY5" fmla="*/ 6586 h 6874411"/>
-              <a:gd name="connsiteX0" fmla="*/ 39225 w 6100507"/>
-              <a:gd name="connsiteY0" fmla="*/ 181211 h 6874411"/>
-              <a:gd name="connsiteX1" fmla="*/ 6093950 w 6100507"/>
-              <a:gd name="connsiteY1" fmla="*/ 0 h 6874411"/>
-              <a:gd name="connsiteX2" fmla="*/ 6092655 w 6100507"/>
-              <a:gd name="connsiteY2" fmla="*/ 6874411 h 6874411"/>
-              <a:gd name="connsiteX3" fmla="*/ 1248600 w 6100507"/>
-              <a:gd name="connsiteY3" fmla="*/ 6874411 h 6874411"/>
-              <a:gd name="connsiteX4" fmla="*/ 115425 w 6100507"/>
-              <a:gd name="connsiteY4" fmla="*/ 5239586 h 6874411"/>
-              <a:gd name="connsiteX5" fmla="*/ 39225 w 6100507"/>
-              <a:gd name="connsiteY5" fmla="*/ 181211 h 6874411"/>
-              <a:gd name="connsiteX0" fmla="*/ 82311 w 6070568"/>
-              <a:gd name="connsiteY0" fmla="*/ 6586 h 6874411"/>
-              <a:gd name="connsiteX1" fmla="*/ 6064011 w 6070568"/>
-              <a:gd name="connsiteY1" fmla="*/ 0 h 6874411"/>
-              <a:gd name="connsiteX2" fmla="*/ 6062716 w 6070568"/>
-              <a:gd name="connsiteY2" fmla="*/ 6874411 h 6874411"/>
-              <a:gd name="connsiteX3" fmla="*/ 1218661 w 6070568"/>
-              <a:gd name="connsiteY3" fmla="*/ 6874411 h 6874411"/>
-              <a:gd name="connsiteX4" fmla="*/ 85486 w 6070568"/>
-              <a:gd name="connsiteY4" fmla="*/ 5239586 h 6874411"/>
-              <a:gd name="connsiteX5" fmla="*/ 82311 w 6070568"/>
-              <a:gd name="connsiteY5" fmla="*/ 6586 h 6874411"/>
-              <a:gd name="connsiteX0" fmla="*/ 82311 w 6070568"/>
-              <a:gd name="connsiteY0" fmla="*/ 6586 h 6874411"/>
-              <a:gd name="connsiteX1" fmla="*/ 6064011 w 6070568"/>
-              <a:gd name="connsiteY1" fmla="*/ 0 h 6874411"/>
-              <a:gd name="connsiteX2" fmla="*/ 6062716 w 6070568"/>
-              <a:gd name="connsiteY2" fmla="*/ 6874411 h 6874411"/>
-              <a:gd name="connsiteX3" fmla="*/ 1218661 w 6070568"/>
-              <a:gd name="connsiteY3" fmla="*/ 6874411 h 6874411"/>
-              <a:gd name="connsiteX4" fmla="*/ 85486 w 6070568"/>
-              <a:gd name="connsiteY4" fmla="*/ 5239586 h 6874411"/>
-              <a:gd name="connsiteX5" fmla="*/ 82311 w 6070568"/>
-              <a:gd name="connsiteY5" fmla="*/ 6586 h 6874411"/>
-              <a:gd name="connsiteX0" fmla="*/ 82311 w 6070568"/>
-              <a:gd name="connsiteY0" fmla="*/ 6586 h 6874411"/>
-              <a:gd name="connsiteX1" fmla="*/ 6064011 w 6070568"/>
-              <a:gd name="connsiteY1" fmla="*/ 0 h 6874411"/>
-              <a:gd name="connsiteX2" fmla="*/ 6062716 w 6070568"/>
-              <a:gd name="connsiteY2" fmla="*/ 6874411 h 6874411"/>
-              <a:gd name="connsiteX3" fmla="*/ 1218661 w 6070568"/>
-              <a:gd name="connsiteY3" fmla="*/ 6874411 h 6874411"/>
-              <a:gd name="connsiteX4" fmla="*/ 85486 w 6070568"/>
-              <a:gd name="connsiteY4" fmla="*/ 5239586 h 6874411"/>
-              <a:gd name="connsiteX5" fmla="*/ 82311 w 6070568"/>
-              <a:gd name="connsiteY5" fmla="*/ 6586 h 6874411"/>
-              <a:gd name="connsiteX0" fmla="*/ 82311 w 6070568"/>
-              <a:gd name="connsiteY0" fmla="*/ 6586 h 6874411"/>
-              <a:gd name="connsiteX1" fmla="*/ 6064011 w 6070568"/>
-              <a:gd name="connsiteY1" fmla="*/ 0 h 6874411"/>
-              <a:gd name="connsiteX2" fmla="*/ 6062716 w 6070568"/>
-              <a:gd name="connsiteY2" fmla="*/ 6874411 h 6874411"/>
-              <a:gd name="connsiteX3" fmla="*/ 1218661 w 6070568"/>
-              <a:gd name="connsiteY3" fmla="*/ 6874411 h 6874411"/>
-              <a:gd name="connsiteX4" fmla="*/ 85486 w 6070568"/>
-              <a:gd name="connsiteY4" fmla="*/ 5239586 h 6874411"/>
-              <a:gd name="connsiteX5" fmla="*/ 82311 w 6070568"/>
-              <a:gd name="connsiteY5" fmla="*/ 6586 h 6874411"/>
-              <a:gd name="connsiteX0" fmla="*/ 5628 w 5993885"/>
-              <a:gd name="connsiteY0" fmla="*/ 6586 h 6874411"/>
-              <a:gd name="connsiteX1" fmla="*/ 5987328 w 5993885"/>
-              <a:gd name="connsiteY1" fmla="*/ 0 h 6874411"/>
-              <a:gd name="connsiteX2" fmla="*/ 5986033 w 5993885"/>
-              <a:gd name="connsiteY2" fmla="*/ 6874411 h 6874411"/>
-              <a:gd name="connsiteX3" fmla="*/ 1141978 w 5993885"/>
-              <a:gd name="connsiteY3" fmla="*/ 6874411 h 6874411"/>
-              <a:gd name="connsiteX4" fmla="*/ 8803 w 5993885"/>
-              <a:gd name="connsiteY4" fmla="*/ 5239586 h 6874411"/>
-              <a:gd name="connsiteX5" fmla="*/ 5628 w 5993885"/>
-              <a:gd name="connsiteY5" fmla="*/ 6586 h 6874411"/>
-              <a:gd name="connsiteX0" fmla="*/ 1309 w 5989566"/>
-              <a:gd name="connsiteY0" fmla="*/ 6586 h 6874411"/>
-              <a:gd name="connsiteX1" fmla="*/ 5983009 w 5989566"/>
-              <a:gd name="connsiteY1" fmla="*/ 0 h 6874411"/>
-              <a:gd name="connsiteX2" fmla="*/ 5981714 w 5989566"/>
-              <a:gd name="connsiteY2" fmla="*/ 6874411 h 6874411"/>
-              <a:gd name="connsiteX3" fmla="*/ 1137659 w 5989566"/>
-              <a:gd name="connsiteY3" fmla="*/ 6874411 h 6874411"/>
-              <a:gd name="connsiteX4" fmla="*/ 4484 w 5989566"/>
-              <a:gd name="connsiteY4" fmla="*/ 5239586 h 6874411"/>
-              <a:gd name="connsiteX5" fmla="*/ 1309 w 5989566"/>
-              <a:gd name="connsiteY5" fmla="*/ 6586 h 6874411"/>
-              <a:gd name="connsiteX0" fmla="*/ 1309 w 5989566"/>
-              <a:gd name="connsiteY0" fmla="*/ 6586 h 6874411"/>
-              <a:gd name="connsiteX1" fmla="*/ 5983009 w 5989566"/>
-              <a:gd name="connsiteY1" fmla="*/ 0 h 6874411"/>
-              <a:gd name="connsiteX2" fmla="*/ 5981714 w 5989566"/>
-              <a:gd name="connsiteY2" fmla="*/ 6874411 h 6874411"/>
-              <a:gd name="connsiteX3" fmla="*/ 1137659 w 5989566"/>
-              <a:gd name="connsiteY3" fmla="*/ 6874411 h 6874411"/>
-              <a:gd name="connsiteX4" fmla="*/ 4484 w 5989566"/>
-              <a:gd name="connsiteY4" fmla="*/ 5239586 h 6874411"/>
-              <a:gd name="connsiteX5" fmla="*/ 1309 w 5989566"/>
-              <a:gd name="connsiteY5" fmla="*/ 6586 h 6874411"/>
-              <a:gd name="connsiteX0" fmla="*/ 1309 w 5989566"/>
-              <a:gd name="connsiteY0" fmla="*/ 6586 h 6874411"/>
-              <a:gd name="connsiteX1" fmla="*/ 5983009 w 5989566"/>
-              <a:gd name="connsiteY1" fmla="*/ 0 h 6874411"/>
-              <a:gd name="connsiteX2" fmla="*/ 5981714 w 5989566"/>
-              <a:gd name="connsiteY2" fmla="*/ 6874411 h 6874411"/>
-              <a:gd name="connsiteX3" fmla="*/ 1369434 w 5989566"/>
-              <a:gd name="connsiteY3" fmla="*/ 6874411 h 6874411"/>
-              <a:gd name="connsiteX4" fmla="*/ 4484 w 5989566"/>
-              <a:gd name="connsiteY4" fmla="*/ 5239586 h 6874411"/>
-              <a:gd name="connsiteX5" fmla="*/ 1309 w 5989566"/>
-              <a:gd name="connsiteY5" fmla="*/ 6586 h 6874411"/>
-              <a:gd name="connsiteX0" fmla="*/ 1309 w 5989566"/>
-              <a:gd name="connsiteY0" fmla="*/ 6586 h 6874411"/>
-              <a:gd name="connsiteX1" fmla="*/ 5983009 w 5989566"/>
-              <a:gd name="connsiteY1" fmla="*/ 0 h 6874411"/>
-              <a:gd name="connsiteX2" fmla="*/ 5981714 w 5989566"/>
-              <a:gd name="connsiteY2" fmla="*/ 6874411 h 6874411"/>
-              <a:gd name="connsiteX3" fmla="*/ 1369434 w 5989566"/>
-              <a:gd name="connsiteY3" fmla="*/ 6874411 h 6874411"/>
-              <a:gd name="connsiteX4" fmla="*/ 4484 w 5989566"/>
-              <a:gd name="connsiteY4" fmla="*/ 5239586 h 6874411"/>
-              <a:gd name="connsiteX5" fmla="*/ 1309 w 5989566"/>
-              <a:gd name="connsiteY5" fmla="*/ 6586 h 6874411"/>
-              <a:gd name="connsiteX0" fmla="*/ 19849 w 6008106"/>
-              <a:gd name="connsiteY0" fmla="*/ 6586 h 6995509"/>
-              <a:gd name="connsiteX1" fmla="*/ 6001549 w 6008106"/>
-              <a:gd name="connsiteY1" fmla="*/ 0 h 6995509"/>
-              <a:gd name="connsiteX2" fmla="*/ 6000254 w 6008106"/>
-              <a:gd name="connsiteY2" fmla="*/ 6874411 h 6995509"/>
-              <a:gd name="connsiteX3" fmla="*/ 1387974 w 6008106"/>
-              <a:gd name="connsiteY3" fmla="*/ 6874411 h 6995509"/>
-              <a:gd name="connsiteX4" fmla="*/ 799 w 6008106"/>
-              <a:gd name="connsiteY4" fmla="*/ 5239586 h 6995509"/>
-              <a:gd name="connsiteX5" fmla="*/ 19849 w 6008106"/>
-              <a:gd name="connsiteY5" fmla="*/ 6586 h 6995509"/>
-              <a:gd name="connsiteX0" fmla="*/ 19849 w 6008106"/>
-              <a:gd name="connsiteY0" fmla="*/ 6586 h 6874411"/>
-              <a:gd name="connsiteX1" fmla="*/ 6001549 w 6008106"/>
-              <a:gd name="connsiteY1" fmla="*/ 0 h 6874411"/>
-              <a:gd name="connsiteX2" fmla="*/ 6000254 w 6008106"/>
-              <a:gd name="connsiteY2" fmla="*/ 6874411 h 6874411"/>
-              <a:gd name="connsiteX3" fmla="*/ 1387974 w 6008106"/>
-              <a:gd name="connsiteY3" fmla="*/ 6874411 h 6874411"/>
-              <a:gd name="connsiteX4" fmla="*/ 799 w 6008106"/>
-              <a:gd name="connsiteY4" fmla="*/ 5239586 h 6874411"/>
-              <a:gd name="connsiteX5" fmla="*/ 19849 w 6008106"/>
-              <a:gd name="connsiteY5" fmla="*/ 6586 h 6874411"/>
-              <a:gd name="connsiteX0" fmla="*/ 19849 w 6008106"/>
-              <a:gd name="connsiteY0" fmla="*/ 6586 h 6874411"/>
-              <a:gd name="connsiteX1" fmla="*/ 6001549 w 6008106"/>
-              <a:gd name="connsiteY1" fmla="*/ 0 h 6874411"/>
-              <a:gd name="connsiteX2" fmla="*/ 6000254 w 6008106"/>
-              <a:gd name="connsiteY2" fmla="*/ 6874411 h 6874411"/>
-              <a:gd name="connsiteX3" fmla="*/ 1387974 w 6008106"/>
-              <a:gd name="connsiteY3" fmla="*/ 6874411 h 6874411"/>
-              <a:gd name="connsiteX4" fmla="*/ 799 w 6008106"/>
-              <a:gd name="connsiteY4" fmla="*/ 5239586 h 6874411"/>
-              <a:gd name="connsiteX5" fmla="*/ 19849 w 6008106"/>
-              <a:gd name="connsiteY5" fmla="*/ 6586 h 6874411"/>
-              <a:gd name="connsiteX0" fmla="*/ 19849 w 6008106"/>
-              <a:gd name="connsiteY0" fmla="*/ 6586 h 6874447"/>
-              <a:gd name="connsiteX1" fmla="*/ 6001549 w 6008106"/>
-              <a:gd name="connsiteY1" fmla="*/ 0 h 6874447"/>
-              <a:gd name="connsiteX2" fmla="*/ 6000254 w 6008106"/>
-              <a:gd name="connsiteY2" fmla="*/ 6874411 h 6874447"/>
-              <a:gd name="connsiteX3" fmla="*/ 1387974 w 6008106"/>
-              <a:gd name="connsiteY3" fmla="*/ 6874411 h 6874447"/>
-              <a:gd name="connsiteX4" fmla="*/ 799 w 6008106"/>
-              <a:gd name="connsiteY4" fmla="*/ 5239586 h 6874447"/>
-              <a:gd name="connsiteX5" fmla="*/ 19849 w 6008106"/>
-              <a:gd name="connsiteY5" fmla="*/ 6586 h 6874447"/>
-              <a:gd name="connsiteX0" fmla="*/ 21445 w 6009702"/>
-              <a:gd name="connsiteY0" fmla="*/ 6586 h 6874477"/>
-              <a:gd name="connsiteX1" fmla="*/ 6003145 w 6009702"/>
-              <a:gd name="connsiteY1" fmla="*/ 0 h 6874477"/>
-              <a:gd name="connsiteX2" fmla="*/ 6001850 w 6009702"/>
-              <a:gd name="connsiteY2" fmla="*/ 6874411 h 6874477"/>
-              <a:gd name="connsiteX3" fmla="*/ 1389570 w 6009702"/>
-              <a:gd name="connsiteY3" fmla="*/ 6874411 h 6874477"/>
-              <a:gd name="connsiteX4" fmla="*/ 2395 w 6009702"/>
-              <a:gd name="connsiteY4" fmla="*/ 5239586 h 6874477"/>
-              <a:gd name="connsiteX5" fmla="*/ 21445 w 6009702"/>
-              <a:gd name="connsiteY5" fmla="*/ 6586 h 6874477"/>
-              <a:gd name="connsiteX0" fmla="*/ 21685 w 6009942"/>
-              <a:gd name="connsiteY0" fmla="*/ 6586 h 6874411"/>
-              <a:gd name="connsiteX1" fmla="*/ 6003385 w 6009942"/>
-              <a:gd name="connsiteY1" fmla="*/ 0 h 6874411"/>
-              <a:gd name="connsiteX2" fmla="*/ 6002090 w 6009942"/>
-              <a:gd name="connsiteY2" fmla="*/ 6874411 h 6874411"/>
-              <a:gd name="connsiteX3" fmla="*/ 1389810 w 6009942"/>
-              <a:gd name="connsiteY3" fmla="*/ 6874411 h 6874411"/>
-              <a:gd name="connsiteX4" fmla="*/ 2635 w 6009942"/>
-              <a:gd name="connsiteY4" fmla="*/ 5239586 h 6874411"/>
-              <a:gd name="connsiteX5" fmla="*/ 21685 w 6009942"/>
-              <a:gd name="connsiteY5" fmla="*/ 6586 h 6874411"/>
-              <a:gd name="connsiteX0" fmla="*/ 1308 w 6011790"/>
-              <a:gd name="connsiteY0" fmla="*/ 660636 h 6874411"/>
-              <a:gd name="connsiteX1" fmla="*/ 6005233 w 6011790"/>
-              <a:gd name="connsiteY1" fmla="*/ 0 h 6874411"/>
-              <a:gd name="connsiteX2" fmla="*/ 6003938 w 6011790"/>
-              <a:gd name="connsiteY2" fmla="*/ 6874411 h 6874411"/>
-              <a:gd name="connsiteX3" fmla="*/ 1391658 w 6011790"/>
-              <a:gd name="connsiteY3" fmla="*/ 6874411 h 6874411"/>
-              <a:gd name="connsiteX4" fmla="*/ 4483 w 6011790"/>
-              <a:gd name="connsiteY4" fmla="*/ 5239586 h 6874411"/>
-              <a:gd name="connsiteX5" fmla="*/ 1308 w 6011790"/>
-              <a:gd name="connsiteY5" fmla="*/ 660636 h 6874411"/>
-              <a:gd name="connsiteX0" fmla="*/ 1308 w 6010421"/>
-              <a:gd name="connsiteY0" fmla="*/ 9761 h 6223536"/>
-              <a:gd name="connsiteX1" fmla="*/ 6002058 w 6010421"/>
-              <a:gd name="connsiteY1" fmla="*/ 0 h 6223536"/>
-              <a:gd name="connsiteX2" fmla="*/ 6003938 w 6010421"/>
-              <a:gd name="connsiteY2" fmla="*/ 6223536 h 6223536"/>
-              <a:gd name="connsiteX3" fmla="*/ 1391658 w 6010421"/>
-              <a:gd name="connsiteY3" fmla="*/ 6223536 h 6223536"/>
-              <a:gd name="connsiteX4" fmla="*/ 4483 w 6010421"/>
-              <a:gd name="connsiteY4" fmla="*/ 4588711 h 6223536"/>
-              <a:gd name="connsiteX5" fmla="*/ 1308 w 6010421"/>
-              <a:gd name="connsiteY5" fmla="*/ 9761 h 6223536"/>
-              <a:gd name="connsiteX0" fmla="*/ 1308 w 6005272"/>
-              <a:gd name="connsiteY0" fmla="*/ 6586 h 6220361"/>
-              <a:gd name="connsiteX1" fmla="*/ 5944908 w 6005272"/>
-              <a:gd name="connsiteY1" fmla="*/ 0 h 6220361"/>
-              <a:gd name="connsiteX2" fmla="*/ 6003938 w 6005272"/>
-              <a:gd name="connsiteY2" fmla="*/ 6220361 h 6220361"/>
-              <a:gd name="connsiteX3" fmla="*/ 1391658 w 6005272"/>
-              <a:gd name="connsiteY3" fmla="*/ 6220361 h 6220361"/>
-              <a:gd name="connsiteX4" fmla="*/ 4483 w 6005272"/>
-              <a:gd name="connsiteY4" fmla="*/ 4585536 h 6220361"/>
-              <a:gd name="connsiteX5" fmla="*/ 1308 w 6005272"/>
-              <a:gd name="connsiteY5" fmla="*/ 6586 h 6220361"/>
-              <a:gd name="connsiteX0" fmla="*/ 1308 w 5953271"/>
-              <a:gd name="connsiteY0" fmla="*/ 6586 h 6220361"/>
-              <a:gd name="connsiteX1" fmla="*/ 5944908 w 5953271"/>
-              <a:gd name="connsiteY1" fmla="*/ 0 h 6220361"/>
-              <a:gd name="connsiteX2" fmla="*/ 5946788 w 5953271"/>
-              <a:gd name="connsiteY2" fmla="*/ 6217186 h 6220361"/>
-              <a:gd name="connsiteX3" fmla="*/ 1391658 w 5953271"/>
-              <a:gd name="connsiteY3" fmla="*/ 6220361 h 6220361"/>
-              <a:gd name="connsiteX4" fmla="*/ 4483 w 5953271"/>
-              <a:gd name="connsiteY4" fmla="*/ 4585536 h 6220361"/>
-              <a:gd name="connsiteX5" fmla="*/ 1308 w 5953271"/>
-              <a:gd name="connsiteY5" fmla="*/ 6586 h 6220361"/>
-            </a:gdLst>
-            <a:ahLst/>
-            <a:cxnLst>
-              <a:cxn ang="0">
-                <a:pos x="connsiteX0" y="connsiteY0"/>
-              </a:cxn>
-              <a:cxn ang="0">
-                <a:pos x="connsiteX1" y="connsiteY1"/>
-              </a:cxn>
-              <a:cxn ang="0">
-                <a:pos x="connsiteX2" y="connsiteY2"/>
-              </a:cxn>
-              <a:cxn ang="0">
-                <a:pos x="connsiteX3" y="connsiteY3"/>
-              </a:cxn>
-              <a:cxn ang="0">
-                <a:pos x="connsiteX4" y="connsiteY4"/>
-              </a:cxn>
-              <a:cxn ang="0">
-                <a:pos x="connsiteX5" y="connsiteY5"/>
-              </a:cxn>
-            </a:cxnLst>
-            <a:rect l="l" t="t" r="r" b="b"/>
-            <a:pathLst>
-              <a:path w="5953271" h="6220361">
-                <a:moveTo>
-                  <a:pt x="1308" y="6586"/>
-                </a:moveTo>
-                <a:lnTo>
-                  <a:pt x="5944908" y="0"/>
-                </a:lnTo>
-                <a:cubicBezTo>
-                  <a:pt x="5952972" y="2835940"/>
-                  <a:pt x="5957933" y="3109916"/>
-                  <a:pt x="5946788" y="6217186"/>
-                </a:cubicBezTo>
-                <a:lnTo>
-                  <a:pt x="1391658" y="6220361"/>
-                </a:lnTo>
-                <a:cubicBezTo>
-                  <a:pt x="1177495" y="6218923"/>
-                  <a:pt x="-62771" y="5961948"/>
-                  <a:pt x="4483" y="4585536"/>
-                </a:cubicBezTo>
-                <a:cubicBezTo>
-                  <a:pt x="-759" y="3390099"/>
-                  <a:pt x="-809" y="1739278"/>
-                  <a:pt x="1308" y="6586"/>
-                </a:cubicBezTo>
-                <a:close/>
-              </a:path>
-            </a:pathLst>
-          </a:custGeom>
-          <a:solidFill>
-            <a:srgbClr val="CCCCCC">
-              <a:alpha val="72170"/>
-            </a:srgbClr>
-          </a:solidFill>
-        </p:spPr>
-      </p:pic>
-    </p:spTree>
-    <p:extLst>
-      <p:ext uri="{BB962C8B-B14F-4D97-AF65-F5344CB8AC3E}">
-        <p14:creationId xmlns:p14="http://schemas.microsoft.com/office/powerpoint/2010/main" val="3456812961"/>
       </p:ext>
     </p:extLst>
   </p:cSld>
@@ -21055,6 +20453,1096 @@
           <p:cNvPr id="2" name="Title 1">
             <a:extLst>
               <a:ext uri="{FF2B5EF4-FFF2-40B4-BE49-F238E27FC236}">
+                <a16:creationId xmlns:a16="http://schemas.microsoft.com/office/drawing/2014/main" id="{A6C77857-B45A-4747-82AA-96BA705CFC2D}"/>
+              </a:ext>
+            </a:extLst>
+          </p:cNvPr>
+          <p:cNvSpPr>
+            <a:spLocks noGrp="1"/>
+          </p:cNvSpPr>
+          <p:nvPr>
+            <p:ph type="title"/>
+          </p:nvPr>
+        </p:nvSpPr>
+        <p:spPr/>
+        <p:txBody>
+          <a:bodyPr/>
+          <a:lstStyle/>
+          <a:p>
+            <a:r>
+              <a:rPr lang="en-US" dirty="0"/>
+              <a:t>Documentation and Tutorials</a:t>
+            </a:r>
+          </a:p>
+        </p:txBody>
+      </p:sp>
+      <p:sp>
+        <p:nvSpPr>
+          <p:cNvPr id="3" name="Slide Number Placeholder 2">
+            <a:extLst>
+              <a:ext uri="{FF2B5EF4-FFF2-40B4-BE49-F238E27FC236}">
+                <a16:creationId xmlns:a16="http://schemas.microsoft.com/office/drawing/2014/main" id="{AD78CFC0-2CFF-074F-B1A4-92AFF69ED2B7}"/>
+              </a:ext>
+            </a:extLst>
+          </p:cNvPr>
+          <p:cNvSpPr>
+            <a:spLocks noGrp="1"/>
+          </p:cNvSpPr>
+          <p:nvPr>
+            <p:ph type="sldNum" sz="quarter" idx="10"/>
+          </p:nvPr>
+        </p:nvSpPr>
+        <p:spPr/>
+        <p:txBody>
+          <a:bodyPr/>
+          <a:lstStyle/>
+          <a:p>
+            <a:r>
+              <a:rPr lang="en-US"/>
+              <a:t>Page </a:t>
+            </a:r>
+            <a:fld id="{888928BD-9DD5-4B49-B597-3FD2BD4272DD}" type="slidenum">
+              <a:rPr smtClean="0"/>
+              <a:pPr/>
+              <a:t>30</a:t>
+            </a:fld>
+            <a:endParaRPr dirty="0"/>
+          </a:p>
+        </p:txBody>
+      </p:sp>
+      <p:sp>
+        <p:nvSpPr>
+          <p:cNvPr id="5" name="Picture Placeholder 4">
+            <a:extLst>
+              <a:ext uri="{FF2B5EF4-FFF2-40B4-BE49-F238E27FC236}">
+                <a16:creationId xmlns:a16="http://schemas.microsoft.com/office/drawing/2014/main" id="{FCF1EE34-53A7-6DC0-98C5-29FF46495D87}"/>
+              </a:ext>
+            </a:extLst>
+          </p:cNvPr>
+          <p:cNvSpPr>
+            <a:spLocks noGrp="1"/>
+          </p:cNvSpPr>
+          <p:nvPr>
+            <p:ph type="pic" sz="quarter" idx="13"/>
+          </p:nvPr>
+        </p:nvSpPr>
+        <p:spPr/>
+        <p:txBody>
+          <a:bodyPr/>
+          <a:lstStyle/>
+          <a:p>
+            <a:endParaRPr lang="en-US"/>
+          </a:p>
+        </p:txBody>
+      </p:sp>
+      <p:pic>
+        <p:nvPicPr>
+          <p:cNvPr id="6" name="Picture Placeholder 7">
+            <a:extLst>
+              <a:ext uri="{FF2B5EF4-FFF2-40B4-BE49-F238E27FC236}">
+                <a16:creationId xmlns:a16="http://schemas.microsoft.com/office/drawing/2014/main" id="{CCEBB85F-4AB3-6B73-7AD2-AAB6F9437AD8}"/>
+              </a:ext>
+            </a:extLst>
+          </p:cNvPr>
+          <p:cNvPicPr>
+            <a:picLocks noChangeAspect="1"/>
+          </p:cNvPicPr>
+          <p:nvPr/>
+        </p:nvPicPr>
+        <p:blipFill>
+          <a:blip r:embed="rId2" cstate="print">
+            <a:extLst>
+              <a:ext uri="{28A0092B-C50C-407E-A947-70E740481C1C}">
+                <a14:useLocalDpi xmlns:a14="http://schemas.microsoft.com/office/drawing/2010/main"/>
+              </a:ext>
+            </a:extLst>
+          </a:blip>
+          <a:srcRect l="252" r="252"/>
+          <a:stretch>
+            <a:fillRect/>
+          </a:stretch>
+        </p:blipFill>
+        <p:spPr>
+          <a:xfrm>
+            <a:off x="6254749" y="0"/>
+            <a:ext cx="5963085" cy="6858008"/>
+          </a:xfrm>
+          <a:custGeom>
+            <a:avLst/>
+            <a:gdLst>
+              <a:gd name="connsiteX0" fmla="*/ 0 w 8097830"/>
+              <a:gd name="connsiteY0" fmla="*/ 1780875 h 8534400"/>
+              <a:gd name="connsiteX1" fmla="*/ 1780875 w 8097830"/>
+              <a:gd name="connsiteY1" fmla="*/ 0 h 8534400"/>
+              <a:gd name="connsiteX2" fmla="*/ 6316955 w 8097830"/>
+              <a:gd name="connsiteY2" fmla="*/ 0 h 8534400"/>
+              <a:gd name="connsiteX3" fmla="*/ 8097830 w 8097830"/>
+              <a:gd name="connsiteY3" fmla="*/ 1780875 h 8534400"/>
+              <a:gd name="connsiteX4" fmla="*/ 8097830 w 8097830"/>
+              <a:gd name="connsiteY4" fmla="*/ 6753525 h 8534400"/>
+              <a:gd name="connsiteX5" fmla="*/ 6316955 w 8097830"/>
+              <a:gd name="connsiteY5" fmla="*/ 8534400 h 8534400"/>
+              <a:gd name="connsiteX6" fmla="*/ 1780875 w 8097830"/>
+              <a:gd name="connsiteY6" fmla="*/ 8534400 h 8534400"/>
+              <a:gd name="connsiteX7" fmla="*/ 0 w 8097830"/>
+              <a:gd name="connsiteY7" fmla="*/ 6753525 h 8534400"/>
+              <a:gd name="connsiteX8" fmla="*/ 0 w 8097830"/>
+              <a:gd name="connsiteY8" fmla="*/ 1780875 h 8534400"/>
+              <a:gd name="connsiteX0" fmla="*/ 0 w 8150271"/>
+              <a:gd name="connsiteY0" fmla="*/ 1780875 h 8534400"/>
+              <a:gd name="connsiteX1" fmla="*/ 1780875 w 8150271"/>
+              <a:gd name="connsiteY1" fmla="*/ 0 h 8534400"/>
+              <a:gd name="connsiteX2" fmla="*/ 6316955 w 8150271"/>
+              <a:gd name="connsiteY2" fmla="*/ 0 h 8534400"/>
+              <a:gd name="connsiteX3" fmla="*/ 7988300 w 8150271"/>
+              <a:gd name="connsiteY3" fmla="*/ 1158339 h 8534400"/>
+              <a:gd name="connsiteX4" fmla="*/ 8097830 w 8150271"/>
+              <a:gd name="connsiteY4" fmla="*/ 1780875 h 8534400"/>
+              <a:gd name="connsiteX5" fmla="*/ 8097830 w 8150271"/>
+              <a:gd name="connsiteY5" fmla="*/ 6753525 h 8534400"/>
+              <a:gd name="connsiteX6" fmla="*/ 6316955 w 8150271"/>
+              <a:gd name="connsiteY6" fmla="*/ 8534400 h 8534400"/>
+              <a:gd name="connsiteX7" fmla="*/ 1780875 w 8150271"/>
+              <a:gd name="connsiteY7" fmla="*/ 8534400 h 8534400"/>
+              <a:gd name="connsiteX8" fmla="*/ 0 w 8150271"/>
+              <a:gd name="connsiteY8" fmla="*/ 6753525 h 8534400"/>
+              <a:gd name="connsiteX9" fmla="*/ 0 w 8150271"/>
+              <a:gd name="connsiteY9" fmla="*/ 1780875 h 8534400"/>
+              <a:gd name="connsiteX0" fmla="*/ 0 w 8097830"/>
+              <a:gd name="connsiteY0" fmla="*/ 1780875 h 8534400"/>
+              <a:gd name="connsiteX1" fmla="*/ 1780875 w 8097830"/>
+              <a:gd name="connsiteY1" fmla="*/ 0 h 8534400"/>
+              <a:gd name="connsiteX2" fmla="*/ 6316955 w 8097830"/>
+              <a:gd name="connsiteY2" fmla="*/ 0 h 8534400"/>
+              <a:gd name="connsiteX3" fmla="*/ 5981700 w 8097830"/>
+              <a:gd name="connsiteY3" fmla="*/ 1552039 h 8534400"/>
+              <a:gd name="connsiteX4" fmla="*/ 8097830 w 8097830"/>
+              <a:gd name="connsiteY4" fmla="*/ 1780875 h 8534400"/>
+              <a:gd name="connsiteX5" fmla="*/ 8097830 w 8097830"/>
+              <a:gd name="connsiteY5" fmla="*/ 6753525 h 8534400"/>
+              <a:gd name="connsiteX6" fmla="*/ 6316955 w 8097830"/>
+              <a:gd name="connsiteY6" fmla="*/ 8534400 h 8534400"/>
+              <a:gd name="connsiteX7" fmla="*/ 1780875 w 8097830"/>
+              <a:gd name="connsiteY7" fmla="*/ 8534400 h 8534400"/>
+              <a:gd name="connsiteX8" fmla="*/ 0 w 8097830"/>
+              <a:gd name="connsiteY8" fmla="*/ 6753525 h 8534400"/>
+              <a:gd name="connsiteX9" fmla="*/ 0 w 8097830"/>
+              <a:gd name="connsiteY9" fmla="*/ 1780875 h 8534400"/>
+              <a:gd name="connsiteX0" fmla="*/ 0 w 8097830"/>
+              <a:gd name="connsiteY0" fmla="*/ 1780875 h 8534400"/>
+              <a:gd name="connsiteX1" fmla="*/ 279400 w 8097830"/>
+              <a:gd name="connsiteY1" fmla="*/ 812264 h 8534400"/>
+              <a:gd name="connsiteX2" fmla="*/ 1780875 w 8097830"/>
+              <a:gd name="connsiteY2" fmla="*/ 0 h 8534400"/>
+              <a:gd name="connsiteX3" fmla="*/ 6316955 w 8097830"/>
+              <a:gd name="connsiteY3" fmla="*/ 0 h 8534400"/>
+              <a:gd name="connsiteX4" fmla="*/ 5981700 w 8097830"/>
+              <a:gd name="connsiteY4" fmla="*/ 1552039 h 8534400"/>
+              <a:gd name="connsiteX5" fmla="*/ 8097830 w 8097830"/>
+              <a:gd name="connsiteY5" fmla="*/ 1780875 h 8534400"/>
+              <a:gd name="connsiteX6" fmla="*/ 8097830 w 8097830"/>
+              <a:gd name="connsiteY6" fmla="*/ 6753525 h 8534400"/>
+              <a:gd name="connsiteX7" fmla="*/ 6316955 w 8097830"/>
+              <a:gd name="connsiteY7" fmla="*/ 8534400 h 8534400"/>
+              <a:gd name="connsiteX8" fmla="*/ 1780875 w 8097830"/>
+              <a:gd name="connsiteY8" fmla="*/ 8534400 h 8534400"/>
+              <a:gd name="connsiteX9" fmla="*/ 0 w 8097830"/>
+              <a:gd name="connsiteY9" fmla="*/ 6753525 h 8534400"/>
+              <a:gd name="connsiteX10" fmla="*/ 0 w 8097830"/>
+              <a:gd name="connsiteY10" fmla="*/ 1780875 h 8534400"/>
+              <a:gd name="connsiteX0" fmla="*/ 0 w 8097830"/>
+              <a:gd name="connsiteY0" fmla="*/ 1780875 h 8534400"/>
+              <a:gd name="connsiteX1" fmla="*/ 279400 w 8097830"/>
+              <a:gd name="connsiteY1" fmla="*/ 812264 h 8534400"/>
+              <a:gd name="connsiteX2" fmla="*/ 1780875 w 8097830"/>
+              <a:gd name="connsiteY2" fmla="*/ 0 h 8534400"/>
+              <a:gd name="connsiteX3" fmla="*/ 6316955 w 8097830"/>
+              <a:gd name="connsiteY3" fmla="*/ 0 h 8534400"/>
+              <a:gd name="connsiteX4" fmla="*/ 5981700 w 8097830"/>
+              <a:gd name="connsiteY4" fmla="*/ 1552039 h 8534400"/>
+              <a:gd name="connsiteX5" fmla="*/ 8097830 w 8097830"/>
+              <a:gd name="connsiteY5" fmla="*/ 1780875 h 8534400"/>
+              <a:gd name="connsiteX6" fmla="*/ 8097830 w 8097830"/>
+              <a:gd name="connsiteY6" fmla="*/ 6753525 h 8534400"/>
+              <a:gd name="connsiteX7" fmla="*/ 6316955 w 8097830"/>
+              <a:gd name="connsiteY7" fmla="*/ 8534400 h 8534400"/>
+              <a:gd name="connsiteX8" fmla="*/ 1780875 w 8097830"/>
+              <a:gd name="connsiteY8" fmla="*/ 8534400 h 8534400"/>
+              <a:gd name="connsiteX9" fmla="*/ 0 w 8097830"/>
+              <a:gd name="connsiteY9" fmla="*/ 6753525 h 8534400"/>
+              <a:gd name="connsiteX10" fmla="*/ 0 w 8097830"/>
+              <a:gd name="connsiteY10" fmla="*/ 1780875 h 8534400"/>
+              <a:gd name="connsiteX0" fmla="*/ 18252 w 8116082"/>
+              <a:gd name="connsiteY0" fmla="*/ 1780875 h 8534400"/>
+              <a:gd name="connsiteX1" fmla="*/ 21427 w 8116082"/>
+              <a:gd name="connsiteY1" fmla="*/ 1548864 h 8534400"/>
+              <a:gd name="connsiteX2" fmla="*/ 297652 w 8116082"/>
+              <a:gd name="connsiteY2" fmla="*/ 812264 h 8534400"/>
+              <a:gd name="connsiteX3" fmla="*/ 1799127 w 8116082"/>
+              <a:gd name="connsiteY3" fmla="*/ 0 h 8534400"/>
+              <a:gd name="connsiteX4" fmla="*/ 6335207 w 8116082"/>
+              <a:gd name="connsiteY4" fmla="*/ 0 h 8534400"/>
+              <a:gd name="connsiteX5" fmla="*/ 5999952 w 8116082"/>
+              <a:gd name="connsiteY5" fmla="*/ 1552039 h 8534400"/>
+              <a:gd name="connsiteX6" fmla="*/ 8116082 w 8116082"/>
+              <a:gd name="connsiteY6" fmla="*/ 1780875 h 8534400"/>
+              <a:gd name="connsiteX7" fmla="*/ 8116082 w 8116082"/>
+              <a:gd name="connsiteY7" fmla="*/ 6753525 h 8534400"/>
+              <a:gd name="connsiteX8" fmla="*/ 6335207 w 8116082"/>
+              <a:gd name="connsiteY8" fmla="*/ 8534400 h 8534400"/>
+              <a:gd name="connsiteX9" fmla="*/ 1799127 w 8116082"/>
+              <a:gd name="connsiteY9" fmla="*/ 8534400 h 8534400"/>
+              <a:gd name="connsiteX10" fmla="*/ 18252 w 8116082"/>
+              <a:gd name="connsiteY10" fmla="*/ 6753525 h 8534400"/>
+              <a:gd name="connsiteX11" fmla="*/ 18252 w 8116082"/>
+              <a:gd name="connsiteY11" fmla="*/ 1780875 h 8534400"/>
+              <a:gd name="connsiteX0" fmla="*/ 14027 w 8111857"/>
+              <a:gd name="connsiteY0" fmla="*/ 1780875 h 8534400"/>
+              <a:gd name="connsiteX1" fmla="*/ 17202 w 8111857"/>
+              <a:gd name="connsiteY1" fmla="*/ 1548864 h 8534400"/>
+              <a:gd name="connsiteX2" fmla="*/ 293427 w 8111857"/>
+              <a:gd name="connsiteY2" fmla="*/ 812264 h 8534400"/>
+              <a:gd name="connsiteX3" fmla="*/ 1794902 w 8111857"/>
+              <a:gd name="connsiteY3" fmla="*/ 0 h 8534400"/>
+              <a:gd name="connsiteX4" fmla="*/ 6330982 w 8111857"/>
+              <a:gd name="connsiteY4" fmla="*/ 0 h 8534400"/>
+              <a:gd name="connsiteX5" fmla="*/ 5995727 w 8111857"/>
+              <a:gd name="connsiteY5" fmla="*/ 1552039 h 8534400"/>
+              <a:gd name="connsiteX6" fmla="*/ 8111857 w 8111857"/>
+              <a:gd name="connsiteY6" fmla="*/ 1780875 h 8534400"/>
+              <a:gd name="connsiteX7" fmla="*/ 8111857 w 8111857"/>
+              <a:gd name="connsiteY7" fmla="*/ 6753525 h 8534400"/>
+              <a:gd name="connsiteX8" fmla="*/ 6330982 w 8111857"/>
+              <a:gd name="connsiteY8" fmla="*/ 8534400 h 8534400"/>
+              <a:gd name="connsiteX9" fmla="*/ 1794902 w 8111857"/>
+              <a:gd name="connsiteY9" fmla="*/ 8534400 h 8534400"/>
+              <a:gd name="connsiteX10" fmla="*/ 14027 w 8111857"/>
+              <a:gd name="connsiteY10" fmla="*/ 6753525 h 8534400"/>
+              <a:gd name="connsiteX11" fmla="*/ 14027 w 8111857"/>
+              <a:gd name="connsiteY11" fmla="*/ 1780875 h 8534400"/>
+              <a:gd name="connsiteX0" fmla="*/ 14027 w 8111857"/>
+              <a:gd name="connsiteY0" fmla="*/ 1795726 h 8549251"/>
+              <a:gd name="connsiteX1" fmla="*/ 17202 w 8111857"/>
+              <a:gd name="connsiteY1" fmla="*/ 1563715 h 8549251"/>
+              <a:gd name="connsiteX2" fmla="*/ 293427 w 8111857"/>
+              <a:gd name="connsiteY2" fmla="*/ 827115 h 8549251"/>
+              <a:gd name="connsiteX3" fmla="*/ 6330982 w 8111857"/>
+              <a:gd name="connsiteY3" fmla="*/ 14851 h 8549251"/>
+              <a:gd name="connsiteX4" fmla="*/ 5995727 w 8111857"/>
+              <a:gd name="connsiteY4" fmla="*/ 1566890 h 8549251"/>
+              <a:gd name="connsiteX5" fmla="*/ 8111857 w 8111857"/>
+              <a:gd name="connsiteY5" fmla="*/ 1795726 h 8549251"/>
+              <a:gd name="connsiteX6" fmla="*/ 8111857 w 8111857"/>
+              <a:gd name="connsiteY6" fmla="*/ 6768376 h 8549251"/>
+              <a:gd name="connsiteX7" fmla="*/ 6330982 w 8111857"/>
+              <a:gd name="connsiteY7" fmla="*/ 8549251 h 8549251"/>
+              <a:gd name="connsiteX8" fmla="*/ 1794902 w 8111857"/>
+              <a:gd name="connsiteY8" fmla="*/ 8549251 h 8549251"/>
+              <a:gd name="connsiteX9" fmla="*/ 14027 w 8111857"/>
+              <a:gd name="connsiteY9" fmla="*/ 6768376 h 8549251"/>
+              <a:gd name="connsiteX10" fmla="*/ 14027 w 8111857"/>
+              <a:gd name="connsiteY10" fmla="*/ 1795726 h 8549251"/>
+              <a:gd name="connsiteX0" fmla="*/ 14027 w 8111857"/>
+              <a:gd name="connsiteY0" fmla="*/ 1786760 h 8540285"/>
+              <a:gd name="connsiteX1" fmla="*/ 17202 w 8111857"/>
+              <a:gd name="connsiteY1" fmla="*/ 1554749 h 8540285"/>
+              <a:gd name="connsiteX2" fmla="*/ 293427 w 8111857"/>
+              <a:gd name="connsiteY2" fmla="*/ 818149 h 8540285"/>
+              <a:gd name="connsiteX3" fmla="*/ 6330982 w 8111857"/>
+              <a:gd name="connsiteY3" fmla="*/ 15029 h 8540285"/>
+              <a:gd name="connsiteX4" fmla="*/ 5995727 w 8111857"/>
+              <a:gd name="connsiteY4" fmla="*/ 1557924 h 8540285"/>
+              <a:gd name="connsiteX5" fmla="*/ 8111857 w 8111857"/>
+              <a:gd name="connsiteY5" fmla="*/ 1786760 h 8540285"/>
+              <a:gd name="connsiteX6" fmla="*/ 8111857 w 8111857"/>
+              <a:gd name="connsiteY6" fmla="*/ 6759410 h 8540285"/>
+              <a:gd name="connsiteX7" fmla="*/ 6330982 w 8111857"/>
+              <a:gd name="connsiteY7" fmla="*/ 8540285 h 8540285"/>
+              <a:gd name="connsiteX8" fmla="*/ 1794902 w 8111857"/>
+              <a:gd name="connsiteY8" fmla="*/ 8540285 h 8540285"/>
+              <a:gd name="connsiteX9" fmla="*/ 14027 w 8111857"/>
+              <a:gd name="connsiteY9" fmla="*/ 6759410 h 8540285"/>
+              <a:gd name="connsiteX10" fmla="*/ 14027 w 8111857"/>
+              <a:gd name="connsiteY10" fmla="*/ 1786760 h 8540285"/>
+              <a:gd name="connsiteX0" fmla="*/ 14027 w 8111857"/>
+              <a:gd name="connsiteY0" fmla="*/ 968611 h 7722136"/>
+              <a:gd name="connsiteX1" fmla="*/ 17202 w 8111857"/>
+              <a:gd name="connsiteY1" fmla="*/ 736600 h 7722136"/>
+              <a:gd name="connsiteX2" fmla="*/ 293427 w 8111857"/>
+              <a:gd name="connsiteY2" fmla="*/ 0 h 7722136"/>
+              <a:gd name="connsiteX3" fmla="*/ 5995727 w 8111857"/>
+              <a:gd name="connsiteY3" fmla="*/ 739775 h 7722136"/>
+              <a:gd name="connsiteX4" fmla="*/ 8111857 w 8111857"/>
+              <a:gd name="connsiteY4" fmla="*/ 968611 h 7722136"/>
+              <a:gd name="connsiteX5" fmla="*/ 8111857 w 8111857"/>
+              <a:gd name="connsiteY5" fmla="*/ 5941261 h 7722136"/>
+              <a:gd name="connsiteX6" fmla="*/ 6330982 w 8111857"/>
+              <a:gd name="connsiteY6" fmla="*/ 7722136 h 7722136"/>
+              <a:gd name="connsiteX7" fmla="*/ 1794902 w 8111857"/>
+              <a:gd name="connsiteY7" fmla="*/ 7722136 h 7722136"/>
+              <a:gd name="connsiteX8" fmla="*/ 14027 w 8111857"/>
+              <a:gd name="connsiteY8" fmla="*/ 5941261 h 7722136"/>
+              <a:gd name="connsiteX9" fmla="*/ 14027 w 8111857"/>
+              <a:gd name="connsiteY9" fmla="*/ 968611 h 7722136"/>
+              <a:gd name="connsiteX0" fmla="*/ 7684 w 8105514"/>
+              <a:gd name="connsiteY0" fmla="*/ 968611 h 7722136"/>
+              <a:gd name="connsiteX1" fmla="*/ 20384 w 8105514"/>
+              <a:gd name="connsiteY1" fmla="*/ 514350 h 7722136"/>
+              <a:gd name="connsiteX2" fmla="*/ 287084 w 8105514"/>
+              <a:gd name="connsiteY2" fmla="*/ 0 h 7722136"/>
+              <a:gd name="connsiteX3" fmla="*/ 5989384 w 8105514"/>
+              <a:gd name="connsiteY3" fmla="*/ 739775 h 7722136"/>
+              <a:gd name="connsiteX4" fmla="*/ 8105514 w 8105514"/>
+              <a:gd name="connsiteY4" fmla="*/ 968611 h 7722136"/>
+              <a:gd name="connsiteX5" fmla="*/ 8105514 w 8105514"/>
+              <a:gd name="connsiteY5" fmla="*/ 5941261 h 7722136"/>
+              <a:gd name="connsiteX6" fmla="*/ 6324639 w 8105514"/>
+              <a:gd name="connsiteY6" fmla="*/ 7722136 h 7722136"/>
+              <a:gd name="connsiteX7" fmla="*/ 1788559 w 8105514"/>
+              <a:gd name="connsiteY7" fmla="*/ 7722136 h 7722136"/>
+              <a:gd name="connsiteX8" fmla="*/ 7684 w 8105514"/>
+              <a:gd name="connsiteY8" fmla="*/ 5941261 h 7722136"/>
+              <a:gd name="connsiteX9" fmla="*/ 7684 w 8105514"/>
+              <a:gd name="connsiteY9" fmla="*/ 968611 h 7722136"/>
+              <a:gd name="connsiteX0" fmla="*/ 7684 w 8105514"/>
+              <a:gd name="connsiteY0" fmla="*/ 749536 h 7722136"/>
+              <a:gd name="connsiteX1" fmla="*/ 20384 w 8105514"/>
+              <a:gd name="connsiteY1" fmla="*/ 514350 h 7722136"/>
+              <a:gd name="connsiteX2" fmla="*/ 287084 w 8105514"/>
+              <a:gd name="connsiteY2" fmla="*/ 0 h 7722136"/>
+              <a:gd name="connsiteX3" fmla="*/ 5989384 w 8105514"/>
+              <a:gd name="connsiteY3" fmla="*/ 739775 h 7722136"/>
+              <a:gd name="connsiteX4" fmla="*/ 8105514 w 8105514"/>
+              <a:gd name="connsiteY4" fmla="*/ 968611 h 7722136"/>
+              <a:gd name="connsiteX5" fmla="*/ 8105514 w 8105514"/>
+              <a:gd name="connsiteY5" fmla="*/ 5941261 h 7722136"/>
+              <a:gd name="connsiteX6" fmla="*/ 6324639 w 8105514"/>
+              <a:gd name="connsiteY6" fmla="*/ 7722136 h 7722136"/>
+              <a:gd name="connsiteX7" fmla="*/ 1788559 w 8105514"/>
+              <a:gd name="connsiteY7" fmla="*/ 7722136 h 7722136"/>
+              <a:gd name="connsiteX8" fmla="*/ 7684 w 8105514"/>
+              <a:gd name="connsiteY8" fmla="*/ 5941261 h 7722136"/>
+              <a:gd name="connsiteX9" fmla="*/ 7684 w 8105514"/>
+              <a:gd name="connsiteY9" fmla="*/ 749536 h 7722136"/>
+              <a:gd name="connsiteX0" fmla="*/ 236220 w 8334050"/>
+              <a:gd name="connsiteY0" fmla="*/ 774564 h 7747164"/>
+              <a:gd name="connsiteX1" fmla="*/ 515620 w 8334050"/>
+              <a:gd name="connsiteY1" fmla="*/ 25028 h 7747164"/>
+              <a:gd name="connsiteX2" fmla="*/ 6217920 w 8334050"/>
+              <a:gd name="connsiteY2" fmla="*/ 764803 h 7747164"/>
+              <a:gd name="connsiteX3" fmla="*/ 8334050 w 8334050"/>
+              <a:gd name="connsiteY3" fmla="*/ 993639 h 7747164"/>
+              <a:gd name="connsiteX4" fmla="*/ 8334050 w 8334050"/>
+              <a:gd name="connsiteY4" fmla="*/ 5966289 h 7747164"/>
+              <a:gd name="connsiteX5" fmla="*/ 6553175 w 8334050"/>
+              <a:gd name="connsiteY5" fmla="*/ 7747164 h 7747164"/>
+              <a:gd name="connsiteX6" fmla="*/ 2017095 w 8334050"/>
+              <a:gd name="connsiteY6" fmla="*/ 7747164 h 7747164"/>
+              <a:gd name="connsiteX7" fmla="*/ 236220 w 8334050"/>
+              <a:gd name="connsiteY7" fmla="*/ 5966289 h 7747164"/>
+              <a:gd name="connsiteX8" fmla="*/ 236220 w 8334050"/>
+              <a:gd name="connsiteY8" fmla="*/ 774564 h 7747164"/>
+              <a:gd name="connsiteX0" fmla="*/ 0 w 8097830"/>
+              <a:gd name="connsiteY0" fmla="*/ 396179 h 7368779"/>
+              <a:gd name="connsiteX1" fmla="*/ 5981700 w 8097830"/>
+              <a:gd name="connsiteY1" fmla="*/ 386418 h 7368779"/>
+              <a:gd name="connsiteX2" fmla="*/ 8097830 w 8097830"/>
+              <a:gd name="connsiteY2" fmla="*/ 615254 h 7368779"/>
+              <a:gd name="connsiteX3" fmla="*/ 8097830 w 8097830"/>
+              <a:gd name="connsiteY3" fmla="*/ 5587904 h 7368779"/>
+              <a:gd name="connsiteX4" fmla="*/ 6316955 w 8097830"/>
+              <a:gd name="connsiteY4" fmla="*/ 7368779 h 7368779"/>
+              <a:gd name="connsiteX5" fmla="*/ 1780875 w 8097830"/>
+              <a:gd name="connsiteY5" fmla="*/ 7368779 h 7368779"/>
+              <a:gd name="connsiteX6" fmla="*/ 0 w 8097830"/>
+              <a:gd name="connsiteY6" fmla="*/ 5587904 h 7368779"/>
+              <a:gd name="connsiteX7" fmla="*/ 0 w 8097830"/>
+              <a:gd name="connsiteY7" fmla="*/ 396179 h 7368779"/>
+              <a:gd name="connsiteX0" fmla="*/ 0 w 8097830"/>
+              <a:gd name="connsiteY0" fmla="*/ 397045 h 7366470"/>
+              <a:gd name="connsiteX1" fmla="*/ 5981700 w 8097830"/>
+              <a:gd name="connsiteY1" fmla="*/ 384109 h 7366470"/>
+              <a:gd name="connsiteX2" fmla="*/ 8097830 w 8097830"/>
+              <a:gd name="connsiteY2" fmla="*/ 612945 h 7366470"/>
+              <a:gd name="connsiteX3" fmla="*/ 8097830 w 8097830"/>
+              <a:gd name="connsiteY3" fmla="*/ 5585595 h 7366470"/>
+              <a:gd name="connsiteX4" fmla="*/ 6316955 w 8097830"/>
+              <a:gd name="connsiteY4" fmla="*/ 7366470 h 7366470"/>
+              <a:gd name="connsiteX5" fmla="*/ 1780875 w 8097830"/>
+              <a:gd name="connsiteY5" fmla="*/ 7366470 h 7366470"/>
+              <a:gd name="connsiteX6" fmla="*/ 0 w 8097830"/>
+              <a:gd name="connsiteY6" fmla="*/ 5585595 h 7366470"/>
+              <a:gd name="connsiteX7" fmla="*/ 0 w 8097830"/>
+              <a:gd name="connsiteY7" fmla="*/ 397045 h 7366470"/>
+              <a:gd name="connsiteX0" fmla="*/ 0 w 8097830"/>
+              <a:gd name="connsiteY0" fmla="*/ 191935 h 7161360"/>
+              <a:gd name="connsiteX1" fmla="*/ 5981700 w 8097830"/>
+              <a:gd name="connsiteY1" fmla="*/ 178999 h 7161360"/>
+              <a:gd name="connsiteX2" fmla="*/ 8097830 w 8097830"/>
+              <a:gd name="connsiteY2" fmla="*/ 407835 h 7161360"/>
+              <a:gd name="connsiteX3" fmla="*/ 8097830 w 8097830"/>
+              <a:gd name="connsiteY3" fmla="*/ 5380485 h 7161360"/>
+              <a:gd name="connsiteX4" fmla="*/ 6316955 w 8097830"/>
+              <a:gd name="connsiteY4" fmla="*/ 7161360 h 7161360"/>
+              <a:gd name="connsiteX5" fmla="*/ 1780875 w 8097830"/>
+              <a:gd name="connsiteY5" fmla="*/ 7161360 h 7161360"/>
+              <a:gd name="connsiteX6" fmla="*/ 0 w 8097830"/>
+              <a:gd name="connsiteY6" fmla="*/ 5380485 h 7161360"/>
+              <a:gd name="connsiteX7" fmla="*/ 0 w 8097830"/>
+              <a:gd name="connsiteY7" fmla="*/ 191935 h 7161360"/>
+              <a:gd name="connsiteX0" fmla="*/ 6350 w 8097830"/>
+              <a:gd name="connsiteY0" fmla="*/ 182410 h 7161360"/>
+              <a:gd name="connsiteX1" fmla="*/ 5981700 w 8097830"/>
+              <a:gd name="connsiteY1" fmla="*/ 178999 h 7161360"/>
+              <a:gd name="connsiteX2" fmla="*/ 8097830 w 8097830"/>
+              <a:gd name="connsiteY2" fmla="*/ 407835 h 7161360"/>
+              <a:gd name="connsiteX3" fmla="*/ 8097830 w 8097830"/>
+              <a:gd name="connsiteY3" fmla="*/ 5380485 h 7161360"/>
+              <a:gd name="connsiteX4" fmla="*/ 6316955 w 8097830"/>
+              <a:gd name="connsiteY4" fmla="*/ 7161360 h 7161360"/>
+              <a:gd name="connsiteX5" fmla="*/ 1780875 w 8097830"/>
+              <a:gd name="connsiteY5" fmla="*/ 7161360 h 7161360"/>
+              <a:gd name="connsiteX6" fmla="*/ 0 w 8097830"/>
+              <a:gd name="connsiteY6" fmla="*/ 5380485 h 7161360"/>
+              <a:gd name="connsiteX7" fmla="*/ 6350 w 8097830"/>
+              <a:gd name="connsiteY7" fmla="*/ 182410 h 7161360"/>
+              <a:gd name="connsiteX0" fmla="*/ 611 w 8098441"/>
+              <a:gd name="connsiteY0" fmla="*/ 176060 h 7161360"/>
+              <a:gd name="connsiteX1" fmla="*/ 5982311 w 8098441"/>
+              <a:gd name="connsiteY1" fmla="*/ 178999 h 7161360"/>
+              <a:gd name="connsiteX2" fmla="*/ 8098441 w 8098441"/>
+              <a:gd name="connsiteY2" fmla="*/ 407835 h 7161360"/>
+              <a:gd name="connsiteX3" fmla="*/ 8098441 w 8098441"/>
+              <a:gd name="connsiteY3" fmla="*/ 5380485 h 7161360"/>
+              <a:gd name="connsiteX4" fmla="*/ 6317566 w 8098441"/>
+              <a:gd name="connsiteY4" fmla="*/ 7161360 h 7161360"/>
+              <a:gd name="connsiteX5" fmla="*/ 1781486 w 8098441"/>
+              <a:gd name="connsiteY5" fmla="*/ 7161360 h 7161360"/>
+              <a:gd name="connsiteX6" fmla="*/ 611 w 8098441"/>
+              <a:gd name="connsiteY6" fmla="*/ 5380485 h 7161360"/>
+              <a:gd name="connsiteX7" fmla="*/ 611 w 8098441"/>
+              <a:gd name="connsiteY7" fmla="*/ 176060 h 7161360"/>
+              <a:gd name="connsiteX0" fmla="*/ 611 w 8098441"/>
+              <a:gd name="connsiteY0" fmla="*/ 176060 h 7161360"/>
+              <a:gd name="connsiteX1" fmla="*/ 5982311 w 8098441"/>
+              <a:gd name="connsiteY1" fmla="*/ 178999 h 7161360"/>
+              <a:gd name="connsiteX2" fmla="*/ 8098441 w 8098441"/>
+              <a:gd name="connsiteY2" fmla="*/ 407835 h 7161360"/>
+              <a:gd name="connsiteX3" fmla="*/ 8098441 w 8098441"/>
+              <a:gd name="connsiteY3" fmla="*/ 5380485 h 7161360"/>
+              <a:gd name="connsiteX4" fmla="*/ 5981016 w 8098441"/>
+              <a:gd name="connsiteY4" fmla="*/ 7047060 h 7161360"/>
+              <a:gd name="connsiteX5" fmla="*/ 1781486 w 8098441"/>
+              <a:gd name="connsiteY5" fmla="*/ 7161360 h 7161360"/>
+              <a:gd name="connsiteX6" fmla="*/ 611 w 8098441"/>
+              <a:gd name="connsiteY6" fmla="*/ 5380485 h 7161360"/>
+              <a:gd name="connsiteX7" fmla="*/ 611 w 8098441"/>
+              <a:gd name="connsiteY7" fmla="*/ 176060 h 7161360"/>
+              <a:gd name="connsiteX0" fmla="*/ 611 w 8098441"/>
+              <a:gd name="connsiteY0" fmla="*/ 176060 h 7047060"/>
+              <a:gd name="connsiteX1" fmla="*/ 5982311 w 8098441"/>
+              <a:gd name="connsiteY1" fmla="*/ 178999 h 7047060"/>
+              <a:gd name="connsiteX2" fmla="*/ 8098441 w 8098441"/>
+              <a:gd name="connsiteY2" fmla="*/ 407835 h 7047060"/>
+              <a:gd name="connsiteX3" fmla="*/ 8098441 w 8098441"/>
+              <a:gd name="connsiteY3" fmla="*/ 5380485 h 7047060"/>
+              <a:gd name="connsiteX4" fmla="*/ 5981016 w 8098441"/>
+              <a:gd name="connsiteY4" fmla="*/ 7047060 h 7047060"/>
+              <a:gd name="connsiteX5" fmla="*/ 1133786 w 8098441"/>
+              <a:gd name="connsiteY5" fmla="*/ 7015310 h 7047060"/>
+              <a:gd name="connsiteX6" fmla="*/ 611 w 8098441"/>
+              <a:gd name="connsiteY6" fmla="*/ 5380485 h 7047060"/>
+              <a:gd name="connsiteX7" fmla="*/ 611 w 8098441"/>
+              <a:gd name="connsiteY7" fmla="*/ 176060 h 7047060"/>
+              <a:gd name="connsiteX0" fmla="*/ 611 w 8098441"/>
+              <a:gd name="connsiteY0" fmla="*/ 176060 h 7047060"/>
+              <a:gd name="connsiteX1" fmla="*/ 5982311 w 8098441"/>
+              <a:gd name="connsiteY1" fmla="*/ 178999 h 7047060"/>
+              <a:gd name="connsiteX2" fmla="*/ 8098441 w 8098441"/>
+              <a:gd name="connsiteY2" fmla="*/ 407835 h 7047060"/>
+              <a:gd name="connsiteX3" fmla="*/ 8098441 w 8098441"/>
+              <a:gd name="connsiteY3" fmla="*/ 5380485 h 7047060"/>
+              <a:gd name="connsiteX4" fmla="*/ 5981016 w 8098441"/>
+              <a:gd name="connsiteY4" fmla="*/ 7047060 h 7047060"/>
+              <a:gd name="connsiteX5" fmla="*/ 1133786 w 8098441"/>
+              <a:gd name="connsiteY5" fmla="*/ 7015310 h 7047060"/>
+              <a:gd name="connsiteX6" fmla="*/ 611 w 8098441"/>
+              <a:gd name="connsiteY6" fmla="*/ 5380485 h 7047060"/>
+              <a:gd name="connsiteX7" fmla="*/ 611 w 8098441"/>
+              <a:gd name="connsiteY7" fmla="*/ 176060 h 7047060"/>
+              <a:gd name="connsiteX0" fmla="*/ 593 w 8098423"/>
+              <a:gd name="connsiteY0" fmla="*/ 176060 h 7047060"/>
+              <a:gd name="connsiteX1" fmla="*/ 5982293 w 8098423"/>
+              <a:gd name="connsiteY1" fmla="*/ 178999 h 7047060"/>
+              <a:gd name="connsiteX2" fmla="*/ 8098423 w 8098423"/>
+              <a:gd name="connsiteY2" fmla="*/ 407835 h 7047060"/>
+              <a:gd name="connsiteX3" fmla="*/ 8098423 w 8098423"/>
+              <a:gd name="connsiteY3" fmla="*/ 5380485 h 7047060"/>
+              <a:gd name="connsiteX4" fmla="*/ 5980998 w 8098423"/>
+              <a:gd name="connsiteY4" fmla="*/ 7047060 h 7047060"/>
+              <a:gd name="connsiteX5" fmla="*/ 1133768 w 8098423"/>
+              <a:gd name="connsiteY5" fmla="*/ 7015310 h 7047060"/>
+              <a:gd name="connsiteX6" fmla="*/ 593 w 8098423"/>
+              <a:gd name="connsiteY6" fmla="*/ 5380485 h 7047060"/>
+              <a:gd name="connsiteX7" fmla="*/ 593 w 8098423"/>
+              <a:gd name="connsiteY7" fmla="*/ 176060 h 7047060"/>
+              <a:gd name="connsiteX0" fmla="*/ 989 w 8098819"/>
+              <a:gd name="connsiteY0" fmla="*/ 176060 h 7047060"/>
+              <a:gd name="connsiteX1" fmla="*/ 5982689 w 8098819"/>
+              <a:gd name="connsiteY1" fmla="*/ 178999 h 7047060"/>
+              <a:gd name="connsiteX2" fmla="*/ 8098819 w 8098819"/>
+              <a:gd name="connsiteY2" fmla="*/ 407835 h 7047060"/>
+              <a:gd name="connsiteX3" fmla="*/ 8098819 w 8098819"/>
+              <a:gd name="connsiteY3" fmla="*/ 5380485 h 7047060"/>
+              <a:gd name="connsiteX4" fmla="*/ 5981394 w 8098819"/>
+              <a:gd name="connsiteY4" fmla="*/ 7047060 h 7047060"/>
+              <a:gd name="connsiteX5" fmla="*/ 1134164 w 8098819"/>
+              <a:gd name="connsiteY5" fmla="*/ 7015310 h 7047060"/>
+              <a:gd name="connsiteX6" fmla="*/ 989 w 8098819"/>
+              <a:gd name="connsiteY6" fmla="*/ 5380485 h 7047060"/>
+              <a:gd name="connsiteX7" fmla="*/ 989 w 8098819"/>
+              <a:gd name="connsiteY7" fmla="*/ 176060 h 7047060"/>
+              <a:gd name="connsiteX0" fmla="*/ 980 w 8098810"/>
+              <a:gd name="connsiteY0" fmla="*/ 176060 h 7047060"/>
+              <a:gd name="connsiteX1" fmla="*/ 5982680 w 8098810"/>
+              <a:gd name="connsiteY1" fmla="*/ 178999 h 7047060"/>
+              <a:gd name="connsiteX2" fmla="*/ 8098810 w 8098810"/>
+              <a:gd name="connsiteY2" fmla="*/ 407835 h 7047060"/>
+              <a:gd name="connsiteX3" fmla="*/ 8098810 w 8098810"/>
+              <a:gd name="connsiteY3" fmla="*/ 5380485 h 7047060"/>
+              <a:gd name="connsiteX4" fmla="*/ 5981385 w 8098810"/>
+              <a:gd name="connsiteY4" fmla="*/ 7047060 h 7047060"/>
+              <a:gd name="connsiteX5" fmla="*/ 1134155 w 8098810"/>
+              <a:gd name="connsiteY5" fmla="*/ 7015310 h 7047060"/>
+              <a:gd name="connsiteX6" fmla="*/ 980 w 8098810"/>
+              <a:gd name="connsiteY6" fmla="*/ 5380485 h 7047060"/>
+              <a:gd name="connsiteX7" fmla="*/ 980 w 8098810"/>
+              <a:gd name="connsiteY7" fmla="*/ 176060 h 7047060"/>
+              <a:gd name="connsiteX0" fmla="*/ 1113 w 8098943"/>
+              <a:gd name="connsiteY0" fmla="*/ 176060 h 7047060"/>
+              <a:gd name="connsiteX1" fmla="*/ 5982813 w 8098943"/>
+              <a:gd name="connsiteY1" fmla="*/ 178999 h 7047060"/>
+              <a:gd name="connsiteX2" fmla="*/ 8098943 w 8098943"/>
+              <a:gd name="connsiteY2" fmla="*/ 407835 h 7047060"/>
+              <a:gd name="connsiteX3" fmla="*/ 8098943 w 8098943"/>
+              <a:gd name="connsiteY3" fmla="*/ 5380485 h 7047060"/>
+              <a:gd name="connsiteX4" fmla="*/ 5981518 w 8098943"/>
+              <a:gd name="connsiteY4" fmla="*/ 7047060 h 7047060"/>
+              <a:gd name="connsiteX5" fmla="*/ 1134288 w 8098943"/>
+              <a:gd name="connsiteY5" fmla="*/ 7015310 h 7047060"/>
+              <a:gd name="connsiteX6" fmla="*/ 1113 w 8098943"/>
+              <a:gd name="connsiteY6" fmla="*/ 5380485 h 7047060"/>
+              <a:gd name="connsiteX7" fmla="*/ 1113 w 8098943"/>
+              <a:gd name="connsiteY7" fmla="*/ 176060 h 7047060"/>
+              <a:gd name="connsiteX0" fmla="*/ 6145 w 8103975"/>
+              <a:gd name="connsiteY0" fmla="*/ 176060 h 7047060"/>
+              <a:gd name="connsiteX1" fmla="*/ 5987845 w 8103975"/>
+              <a:gd name="connsiteY1" fmla="*/ 178999 h 7047060"/>
+              <a:gd name="connsiteX2" fmla="*/ 8103975 w 8103975"/>
+              <a:gd name="connsiteY2" fmla="*/ 407835 h 7047060"/>
+              <a:gd name="connsiteX3" fmla="*/ 8103975 w 8103975"/>
+              <a:gd name="connsiteY3" fmla="*/ 5380485 h 7047060"/>
+              <a:gd name="connsiteX4" fmla="*/ 5986550 w 8103975"/>
+              <a:gd name="connsiteY4" fmla="*/ 7047060 h 7047060"/>
+              <a:gd name="connsiteX5" fmla="*/ 1139320 w 8103975"/>
+              <a:gd name="connsiteY5" fmla="*/ 7015310 h 7047060"/>
+              <a:gd name="connsiteX6" fmla="*/ 6145 w 8103975"/>
+              <a:gd name="connsiteY6" fmla="*/ 5380485 h 7047060"/>
+              <a:gd name="connsiteX7" fmla="*/ 6145 w 8103975"/>
+              <a:gd name="connsiteY7" fmla="*/ 176060 h 7047060"/>
+              <a:gd name="connsiteX0" fmla="*/ 6145 w 8103975"/>
+              <a:gd name="connsiteY0" fmla="*/ 176060 h 7047060"/>
+              <a:gd name="connsiteX1" fmla="*/ 5987845 w 8103975"/>
+              <a:gd name="connsiteY1" fmla="*/ 178999 h 7047060"/>
+              <a:gd name="connsiteX2" fmla="*/ 8103975 w 8103975"/>
+              <a:gd name="connsiteY2" fmla="*/ 407835 h 7047060"/>
+              <a:gd name="connsiteX3" fmla="*/ 8103975 w 8103975"/>
+              <a:gd name="connsiteY3" fmla="*/ 5380485 h 7047060"/>
+              <a:gd name="connsiteX4" fmla="*/ 5986550 w 8103975"/>
+              <a:gd name="connsiteY4" fmla="*/ 7047060 h 7047060"/>
+              <a:gd name="connsiteX5" fmla="*/ 1139320 w 8103975"/>
+              <a:gd name="connsiteY5" fmla="*/ 7015310 h 7047060"/>
+              <a:gd name="connsiteX6" fmla="*/ 6145 w 8103975"/>
+              <a:gd name="connsiteY6" fmla="*/ 5380485 h 7047060"/>
+              <a:gd name="connsiteX7" fmla="*/ 6145 w 8103975"/>
+              <a:gd name="connsiteY7" fmla="*/ 176060 h 7047060"/>
+              <a:gd name="connsiteX0" fmla="*/ 6145 w 8103975"/>
+              <a:gd name="connsiteY0" fmla="*/ 176060 h 7015310"/>
+              <a:gd name="connsiteX1" fmla="*/ 5987845 w 8103975"/>
+              <a:gd name="connsiteY1" fmla="*/ 178999 h 7015310"/>
+              <a:gd name="connsiteX2" fmla="*/ 8103975 w 8103975"/>
+              <a:gd name="connsiteY2" fmla="*/ 407835 h 7015310"/>
+              <a:gd name="connsiteX3" fmla="*/ 8103975 w 8103975"/>
+              <a:gd name="connsiteY3" fmla="*/ 5380485 h 7015310"/>
+              <a:gd name="connsiteX4" fmla="*/ 5983375 w 8103975"/>
+              <a:gd name="connsiteY4" fmla="*/ 7015310 h 7015310"/>
+              <a:gd name="connsiteX5" fmla="*/ 1139320 w 8103975"/>
+              <a:gd name="connsiteY5" fmla="*/ 7015310 h 7015310"/>
+              <a:gd name="connsiteX6" fmla="*/ 6145 w 8103975"/>
+              <a:gd name="connsiteY6" fmla="*/ 5380485 h 7015310"/>
+              <a:gd name="connsiteX7" fmla="*/ 6145 w 8103975"/>
+              <a:gd name="connsiteY7" fmla="*/ 176060 h 7015310"/>
+              <a:gd name="connsiteX0" fmla="*/ 6145 w 8103975"/>
+              <a:gd name="connsiteY0" fmla="*/ 176060 h 7015310"/>
+              <a:gd name="connsiteX1" fmla="*/ 5987845 w 8103975"/>
+              <a:gd name="connsiteY1" fmla="*/ 178999 h 7015310"/>
+              <a:gd name="connsiteX2" fmla="*/ 8103975 w 8103975"/>
+              <a:gd name="connsiteY2" fmla="*/ 407835 h 7015310"/>
+              <a:gd name="connsiteX3" fmla="*/ 8103975 w 8103975"/>
+              <a:gd name="connsiteY3" fmla="*/ 5380485 h 7015310"/>
+              <a:gd name="connsiteX4" fmla="*/ 5983375 w 8103975"/>
+              <a:gd name="connsiteY4" fmla="*/ 7015310 h 7015310"/>
+              <a:gd name="connsiteX5" fmla="*/ 1139320 w 8103975"/>
+              <a:gd name="connsiteY5" fmla="*/ 7015310 h 7015310"/>
+              <a:gd name="connsiteX6" fmla="*/ 6145 w 8103975"/>
+              <a:gd name="connsiteY6" fmla="*/ 5380485 h 7015310"/>
+              <a:gd name="connsiteX7" fmla="*/ 6145 w 8103975"/>
+              <a:gd name="connsiteY7" fmla="*/ 176060 h 7015310"/>
+              <a:gd name="connsiteX0" fmla="*/ 6145 w 8103975"/>
+              <a:gd name="connsiteY0" fmla="*/ 176060 h 7015310"/>
+              <a:gd name="connsiteX1" fmla="*/ 5987845 w 8103975"/>
+              <a:gd name="connsiteY1" fmla="*/ 178999 h 7015310"/>
+              <a:gd name="connsiteX2" fmla="*/ 8103975 w 8103975"/>
+              <a:gd name="connsiteY2" fmla="*/ 407835 h 7015310"/>
+              <a:gd name="connsiteX3" fmla="*/ 8103975 w 8103975"/>
+              <a:gd name="connsiteY3" fmla="*/ 5380485 h 7015310"/>
+              <a:gd name="connsiteX4" fmla="*/ 5983375 w 8103975"/>
+              <a:gd name="connsiteY4" fmla="*/ 7015310 h 7015310"/>
+              <a:gd name="connsiteX5" fmla="*/ 1139320 w 8103975"/>
+              <a:gd name="connsiteY5" fmla="*/ 7015310 h 7015310"/>
+              <a:gd name="connsiteX6" fmla="*/ 6145 w 8103975"/>
+              <a:gd name="connsiteY6" fmla="*/ 5380485 h 7015310"/>
+              <a:gd name="connsiteX7" fmla="*/ 6145 w 8103975"/>
+              <a:gd name="connsiteY7" fmla="*/ 176060 h 7015310"/>
+              <a:gd name="connsiteX0" fmla="*/ 6145 w 8103975"/>
+              <a:gd name="connsiteY0" fmla="*/ 186280 h 7025530"/>
+              <a:gd name="connsiteX1" fmla="*/ 5984670 w 8103975"/>
+              <a:gd name="connsiteY1" fmla="*/ 151119 h 7025530"/>
+              <a:gd name="connsiteX2" fmla="*/ 8103975 w 8103975"/>
+              <a:gd name="connsiteY2" fmla="*/ 418055 h 7025530"/>
+              <a:gd name="connsiteX3" fmla="*/ 8103975 w 8103975"/>
+              <a:gd name="connsiteY3" fmla="*/ 5390705 h 7025530"/>
+              <a:gd name="connsiteX4" fmla="*/ 5983375 w 8103975"/>
+              <a:gd name="connsiteY4" fmla="*/ 7025530 h 7025530"/>
+              <a:gd name="connsiteX5" fmla="*/ 1139320 w 8103975"/>
+              <a:gd name="connsiteY5" fmla="*/ 7025530 h 7025530"/>
+              <a:gd name="connsiteX6" fmla="*/ 6145 w 8103975"/>
+              <a:gd name="connsiteY6" fmla="*/ 5390705 h 7025530"/>
+              <a:gd name="connsiteX7" fmla="*/ 6145 w 8103975"/>
+              <a:gd name="connsiteY7" fmla="*/ 186280 h 7025530"/>
+              <a:gd name="connsiteX0" fmla="*/ 6145 w 8103975"/>
+              <a:gd name="connsiteY0" fmla="*/ 134828 h 6974078"/>
+              <a:gd name="connsiteX1" fmla="*/ 5984670 w 8103975"/>
+              <a:gd name="connsiteY1" fmla="*/ 99667 h 6974078"/>
+              <a:gd name="connsiteX2" fmla="*/ 8103975 w 8103975"/>
+              <a:gd name="connsiteY2" fmla="*/ 366603 h 6974078"/>
+              <a:gd name="connsiteX3" fmla="*/ 8103975 w 8103975"/>
+              <a:gd name="connsiteY3" fmla="*/ 5339253 h 6974078"/>
+              <a:gd name="connsiteX4" fmla="*/ 5983375 w 8103975"/>
+              <a:gd name="connsiteY4" fmla="*/ 6974078 h 6974078"/>
+              <a:gd name="connsiteX5" fmla="*/ 1139320 w 8103975"/>
+              <a:gd name="connsiteY5" fmla="*/ 6974078 h 6974078"/>
+              <a:gd name="connsiteX6" fmla="*/ 6145 w 8103975"/>
+              <a:gd name="connsiteY6" fmla="*/ 5339253 h 6974078"/>
+              <a:gd name="connsiteX7" fmla="*/ 6145 w 8103975"/>
+              <a:gd name="connsiteY7" fmla="*/ 134828 h 6974078"/>
+              <a:gd name="connsiteX0" fmla="*/ 6145 w 8103975"/>
+              <a:gd name="connsiteY0" fmla="*/ 35161 h 6874411"/>
+              <a:gd name="connsiteX1" fmla="*/ 5984670 w 8103975"/>
+              <a:gd name="connsiteY1" fmla="*/ 0 h 6874411"/>
+              <a:gd name="connsiteX2" fmla="*/ 8103975 w 8103975"/>
+              <a:gd name="connsiteY2" fmla="*/ 5239586 h 6874411"/>
+              <a:gd name="connsiteX3" fmla="*/ 5983375 w 8103975"/>
+              <a:gd name="connsiteY3" fmla="*/ 6874411 h 6874411"/>
+              <a:gd name="connsiteX4" fmla="*/ 1139320 w 8103975"/>
+              <a:gd name="connsiteY4" fmla="*/ 6874411 h 6874411"/>
+              <a:gd name="connsiteX5" fmla="*/ 6145 w 8103975"/>
+              <a:gd name="connsiteY5" fmla="*/ 5239586 h 6874411"/>
+              <a:gd name="connsiteX6" fmla="*/ 6145 w 8103975"/>
+              <a:gd name="connsiteY6" fmla="*/ 35161 h 6874411"/>
+              <a:gd name="connsiteX0" fmla="*/ 6145 w 6662323"/>
+              <a:gd name="connsiteY0" fmla="*/ 35161 h 6874411"/>
+              <a:gd name="connsiteX1" fmla="*/ 5984670 w 6662323"/>
+              <a:gd name="connsiteY1" fmla="*/ 0 h 6874411"/>
+              <a:gd name="connsiteX2" fmla="*/ 5983375 w 6662323"/>
+              <a:gd name="connsiteY2" fmla="*/ 6874411 h 6874411"/>
+              <a:gd name="connsiteX3" fmla="*/ 1139320 w 6662323"/>
+              <a:gd name="connsiteY3" fmla="*/ 6874411 h 6874411"/>
+              <a:gd name="connsiteX4" fmla="*/ 6145 w 6662323"/>
+              <a:gd name="connsiteY4" fmla="*/ 5239586 h 6874411"/>
+              <a:gd name="connsiteX5" fmla="*/ 6145 w 6662323"/>
+              <a:gd name="connsiteY5" fmla="*/ 35161 h 6874411"/>
+              <a:gd name="connsiteX0" fmla="*/ 6145 w 6429576"/>
+              <a:gd name="connsiteY0" fmla="*/ 35161 h 6874411"/>
+              <a:gd name="connsiteX1" fmla="*/ 5984670 w 6429576"/>
+              <a:gd name="connsiteY1" fmla="*/ 0 h 6874411"/>
+              <a:gd name="connsiteX2" fmla="*/ 5983375 w 6429576"/>
+              <a:gd name="connsiteY2" fmla="*/ 6874411 h 6874411"/>
+              <a:gd name="connsiteX3" fmla="*/ 1139320 w 6429576"/>
+              <a:gd name="connsiteY3" fmla="*/ 6874411 h 6874411"/>
+              <a:gd name="connsiteX4" fmla="*/ 6145 w 6429576"/>
+              <a:gd name="connsiteY4" fmla="*/ 5239586 h 6874411"/>
+              <a:gd name="connsiteX5" fmla="*/ 6145 w 6429576"/>
+              <a:gd name="connsiteY5" fmla="*/ 35161 h 6874411"/>
+              <a:gd name="connsiteX0" fmla="*/ 6145 w 5991227"/>
+              <a:gd name="connsiteY0" fmla="*/ 35161 h 6874411"/>
+              <a:gd name="connsiteX1" fmla="*/ 5984670 w 5991227"/>
+              <a:gd name="connsiteY1" fmla="*/ 0 h 6874411"/>
+              <a:gd name="connsiteX2" fmla="*/ 5983375 w 5991227"/>
+              <a:gd name="connsiteY2" fmla="*/ 6874411 h 6874411"/>
+              <a:gd name="connsiteX3" fmla="*/ 1139320 w 5991227"/>
+              <a:gd name="connsiteY3" fmla="*/ 6874411 h 6874411"/>
+              <a:gd name="connsiteX4" fmla="*/ 6145 w 5991227"/>
+              <a:gd name="connsiteY4" fmla="*/ 5239586 h 6874411"/>
+              <a:gd name="connsiteX5" fmla="*/ 6145 w 5991227"/>
+              <a:gd name="connsiteY5" fmla="*/ 35161 h 6874411"/>
+              <a:gd name="connsiteX0" fmla="*/ 82310 w 6070567"/>
+              <a:gd name="connsiteY0" fmla="*/ 6586 h 6874411"/>
+              <a:gd name="connsiteX1" fmla="*/ 6064010 w 6070567"/>
+              <a:gd name="connsiteY1" fmla="*/ 0 h 6874411"/>
+              <a:gd name="connsiteX2" fmla="*/ 6062715 w 6070567"/>
+              <a:gd name="connsiteY2" fmla="*/ 6874411 h 6874411"/>
+              <a:gd name="connsiteX3" fmla="*/ 1218660 w 6070567"/>
+              <a:gd name="connsiteY3" fmla="*/ 6874411 h 6874411"/>
+              <a:gd name="connsiteX4" fmla="*/ 85485 w 6070567"/>
+              <a:gd name="connsiteY4" fmla="*/ 5239586 h 6874411"/>
+              <a:gd name="connsiteX5" fmla="*/ 82310 w 6070567"/>
+              <a:gd name="connsiteY5" fmla="*/ 6586 h 6874411"/>
+              <a:gd name="connsiteX0" fmla="*/ 39225 w 6100507"/>
+              <a:gd name="connsiteY0" fmla="*/ 181211 h 6874411"/>
+              <a:gd name="connsiteX1" fmla="*/ 6093950 w 6100507"/>
+              <a:gd name="connsiteY1" fmla="*/ 0 h 6874411"/>
+              <a:gd name="connsiteX2" fmla="*/ 6092655 w 6100507"/>
+              <a:gd name="connsiteY2" fmla="*/ 6874411 h 6874411"/>
+              <a:gd name="connsiteX3" fmla="*/ 1248600 w 6100507"/>
+              <a:gd name="connsiteY3" fmla="*/ 6874411 h 6874411"/>
+              <a:gd name="connsiteX4" fmla="*/ 115425 w 6100507"/>
+              <a:gd name="connsiteY4" fmla="*/ 5239586 h 6874411"/>
+              <a:gd name="connsiteX5" fmla="*/ 39225 w 6100507"/>
+              <a:gd name="connsiteY5" fmla="*/ 181211 h 6874411"/>
+              <a:gd name="connsiteX0" fmla="*/ 82311 w 6070568"/>
+              <a:gd name="connsiteY0" fmla="*/ 6586 h 6874411"/>
+              <a:gd name="connsiteX1" fmla="*/ 6064011 w 6070568"/>
+              <a:gd name="connsiteY1" fmla="*/ 0 h 6874411"/>
+              <a:gd name="connsiteX2" fmla="*/ 6062716 w 6070568"/>
+              <a:gd name="connsiteY2" fmla="*/ 6874411 h 6874411"/>
+              <a:gd name="connsiteX3" fmla="*/ 1218661 w 6070568"/>
+              <a:gd name="connsiteY3" fmla="*/ 6874411 h 6874411"/>
+              <a:gd name="connsiteX4" fmla="*/ 85486 w 6070568"/>
+              <a:gd name="connsiteY4" fmla="*/ 5239586 h 6874411"/>
+              <a:gd name="connsiteX5" fmla="*/ 82311 w 6070568"/>
+              <a:gd name="connsiteY5" fmla="*/ 6586 h 6874411"/>
+              <a:gd name="connsiteX0" fmla="*/ 82311 w 6070568"/>
+              <a:gd name="connsiteY0" fmla="*/ 6586 h 6874411"/>
+              <a:gd name="connsiteX1" fmla="*/ 6064011 w 6070568"/>
+              <a:gd name="connsiteY1" fmla="*/ 0 h 6874411"/>
+              <a:gd name="connsiteX2" fmla="*/ 6062716 w 6070568"/>
+              <a:gd name="connsiteY2" fmla="*/ 6874411 h 6874411"/>
+              <a:gd name="connsiteX3" fmla="*/ 1218661 w 6070568"/>
+              <a:gd name="connsiteY3" fmla="*/ 6874411 h 6874411"/>
+              <a:gd name="connsiteX4" fmla="*/ 85486 w 6070568"/>
+              <a:gd name="connsiteY4" fmla="*/ 5239586 h 6874411"/>
+              <a:gd name="connsiteX5" fmla="*/ 82311 w 6070568"/>
+              <a:gd name="connsiteY5" fmla="*/ 6586 h 6874411"/>
+              <a:gd name="connsiteX0" fmla="*/ 82311 w 6070568"/>
+              <a:gd name="connsiteY0" fmla="*/ 6586 h 6874411"/>
+              <a:gd name="connsiteX1" fmla="*/ 6064011 w 6070568"/>
+              <a:gd name="connsiteY1" fmla="*/ 0 h 6874411"/>
+              <a:gd name="connsiteX2" fmla="*/ 6062716 w 6070568"/>
+              <a:gd name="connsiteY2" fmla="*/ 6874411 h 6874411"/>
+              <a:gd name="connsiteX3" fmla="*/ 1218661 w 6070568"/>
+              <a:gd name="connsiteY3" fmla="*/ 6874411 h 6874411"/>
+              <a:gd name="connsiteX4" fmla="*/ 85486 w 6070568"/>
+              <a:gd name="connsiteY4" fmla="*/ 5239586 h 6874411"/>
+              <a:gd name="connsiteX5" fmla="*/ 82311 w 6070568"/>
+              <a:gd name="connsiteY5" fmla="*/ 6586 h 6874411"/>
+              <a:gd name="connsiteX0" fmla="*/ 82311 w 6070568"/>
+              <a:gd name="connsiteY0" fmla="*/ 6586 h 6874411"/>
+              <a:gd name="connsiteX1" fmla="*/ 6064011 w 6070568"/>
+              <a:gd name="connsiteY1" fmla="*/ 0 h 6874411"/>
+              <a:gd name="connsiteX2" fmla="*/ 6062716 w 6070568"/>
+              <a:gd name="connsiteY2" fmla="*/ 6874411 h 6874411"/>
+              <a:gd name="connsiteX3" fmla="*/ 1218661 w 6070568"/>
+              <a:gd name="connsiteY3" fmla="*/ 6874411 h 6874411"/>
+              <a:gd name="connsiteX4" fmla="*/ 85486 w 6070568"/>
+              <a:gd name="connsiteY4" fmla="*/ 5239586 h 6874411"/>
+              <a:gd name="connsiteX5" fmla="*/ 82311 w 6070568"/>
+              <a:gd name="connsiteY5" fmla="*/ 6586 h 6874411"/>
+              <a:gd name="connsiteX0" fmla="*/ 5628 w 5993885"/>
+              <a:gd name="connsiteY0" fmla="*/ 6586 h 6874411"/>
+              <a:gd name="connsiteX1" fmla="*/ 5987328 w 5993885"/>
+              <a:gd name="connsiteY1" fmla="*/ 0 h 6874411"/>
+              <a:gd name="connsiteX2" fmla="*/ 5986033 w 5993885"/>
+              <a:gd name="connsiteY2" fmla="*/ 6874411 h 6874411"/>
+              <a:gd name="connsiteX3" fmla="*/ 1141978 w 5993885"/>
+              <a:gd name="connsiteY3" fmla="*/ 6874411 h 6874411"/>
+              <a:gd name="connsiteX4" fmla="*/ 8803 w 5993885"/>
+              <a:gd name="connsiteY4" fmla="*/ 5239586 h 6874411"/>
+              <a:gd name="connsiteX5" fmla="*/ 5628 w 5993885"/>
+              <a:gd name="connsiteY5" fmla="*/ 6586 h 6874411"/>
+              <a:gd name="connsiteX0" fmla="*/ 1309 w 5989566"/>
+              <a:gd name="connsiteY0" fmla="*/ 6586 h 6874411"/>
+              <a:gd name="connsiteX1" fmla="*/ 5983009 w 5989566"/>
+              <a:gd name="connsiteY1" fmla="*/ 0 h 6874411"/>
+              <a:gd name="connsiteX2" fmla="*/ 5981714 w 5989566"/>
+              <a:gd name="connsiteY2" fmla="*/ 6874411 h 6874411"/>
+              <a:gd name="connsiteX3" fmla="*/ 1137659 w 5989566"/>
+              <a:gd name="connsiteY3" fmla="*/ 6874411 h 6874411"/>
+              <a:gd name="connsiteX4" fmla="*/ 4484 w 5989566"/>
+              <a:gd name="connsiteY4" fmla="*/ 5239586 h 6874411"/>
+              <a:gd name="connsiteX5" fmla="*/ 1309 w 5989566"/>
+              <a:gd name="connsiteY5" fmla="*/ 6586 h 6874411"/>
+              <a:gd name="connsiteX0" fmla="*/ 1309 w 5989566"/>
+              <a:gd name="connsiteY0" fmla="*/ 6586 h 6874411"/>
+              <a:gd name="connsiteX1" fmla="*/ 5983009 w 5989566"/>
+              <a:gd name="connsiteY1" fmla="*/ 0 h 6874411"/>
+              <a:gd name="connsiteX2" fmla="*/ 5981714 w 5989566"/>
+              <a:gd name="connsiteY2" fmla="*/ 6874411 h 6874411"/>
+              <a:gd name="connsiteX3" fmla="*/ 1137659 w 5989566"/>
+              <a:gd name="connsiteY3" fmla="*/ 6874411 h 6874411"/>
+              <a:gd name="connsiteX4" fmla="*/ 4484 w 5989566"/>
+              <a:gd name="connsiteY4" fmla="*/ 5239586 h 6874411"/>
+              <a:gd name="connsiteX5" fmla="*/ 1309 w 5989566"/>
+              <a:gd name="connsiteY5" fmla="*/ 6586 h 6874411"/>
+              <a:gd name="connsiteX0" fmla="*/ 1309 w 5989566"/>
+              <a:gd name="connsiteY0" fmla="*/ 6586 h 6874411"/>
+              <a:gd name="connsiteX1" fmla="*/ 5983009 w 5989566"/>
+              <a:gd name="connsiteY1" fmla="*/ 0 h 6874411"/>
+              <a:gd name="connsiteX2" fmla="*/ 5981714 w 5989566"/>
+              <a:gd name="connsiteY2" fmla="*/ 6874411 h 6874411"/>
+              <a:gd name="connsiteX3" fmla="*/ 1369434 w 5989566"/>
+              <a:gd name="connsiteY3" fmla="*/ 6874411 h 6874411"/>
+              <a:gd name="connsiteX4" fmla="*/ 4484 w 5989566"/>
+              <a:gd name="connsiteY4" fmla="*/ 5239586 h 6874411"/>
+              <a:gd name="connsiteX5" fmla="*/ 1309 w 5989566"/>
+              <a:gd name="connsiteY5" fmla="*/ 6586 h 6874411"/>
+              <a:gd name="connsiteX0" fmla="*/ 1309 w 5989566"/>
+              <a:gd name="connsiteY0" fmla="*/ 6586 h 6874411"/>
+              <a:gd name="connsiteX1" fmla="*/ 5983009 w 5989566"/>
+              <a:gd name="connsiteY1" fmla="*/ 0 h 6874411"/>
+              <a:gd name="connsiteX2" fmla="*/ 5981714 w 5989566"/>
+              <a:gd name="connsiteY2" fmla="*/ 6874411 h 6874411"/>
+              <a:gd name="connsiteX3" fmla="*/ 1369434 w 5989566"/>
+              <a:gd name="connsiteY3" fmla="*/ 6874411 h 6874411"/>
+              <a:gd name="connsiteX4" fmla="*/ 4484 w 5989566"/>
+              <a:gd name="connsiteY4" fmla="*/ 5239586 h 6874411"/>
+              <a:gd name="connsiteX5" fmla="*/ 1309 w 5989566"/>
+              <a:gd name="connsiteY5" fmla="*/ 6586 h 6874411"/>
+              <a:gd name="connsiteX0" fmla="*/ 19849 w 6008106"/>
+              <a:gd name="connsiteY0" fmla="*/ 6586 h 6995509"/>
+              <a:gd name="connsiteX1" fmla="*/ 6001549 w 6008106"/>
+              <a:gd name="connsiteY1" fmla="*/ 0 h 6995509"/>
+              <a:gd name="connsiteX2" fmla="*/ 6000254 w 6008106"/>
+              <a:gd name="connsiteY2" fmla="*/ 6874411 h 6995509"/>
+              <a:gd name="connsiteX3" fmla="*/ 1387974 w 6008106"/>
+              <a:gd name="connsiteY3" fmla="*/ 6874411 h 6995509"/>
+              <a:gd name="connsiteX4" fmla="*/ 799 w 6008106"/>
+              <a:gd name="connsiteY4" fmla="*/ 5239586 h 6995509"/>
+              <a:gd name="connsiteX5" fmla="*/ 19849 w 6008106"/>
+              <a:gd name="connsiteY5" fmla="*/ 6586 h 6995509"/>
+              <a:gd name="connsiteX0" fmla="*/ 19849 w 6008106"/>
+              <a:gd name="connsiteY0" fmla="*/ 6586 h 6874411"/>
+              <a:gd name="connsiteX1" fmla="*/ 6001549 w 6008106"/>
+              <a:gd name="connsiteY1" fmla="*/ 0 h 6874411"/>
+              <a:gd name="connsiteX2" fmla="*/ 6000254 w 6008106"/>
+              <a:gd name="connsiteY2" fmla="*/ 6874411 h 6874411"/>
+              <a:gd name="connsiteX3" fmla="*/ 1387974 w 6008106"/>
+              <a:gd name="connsiteY3" fmla="*/ 6874411 h 6874411"/>
+              <a:gd name="connsiteX4" fmla="*/ 799 w 6008106"/>
+              <a:gd name="connsiteY4" fmla="*/ 5239586 h 6874411"/>
+              <a:gd name="connsiteX5" fmla="*/ 19849 w 6008106"/>
+              <a:gd name="connsiteY5" fmla="*/ 6586 h 6874411"/>
+              <a:gd name="connsiteX0" fmla="*/ 19849 w 6008106"/>
+              <a:gd name="connsiteY0" fmla="*/ 6586 h 6874411"/>
+              <a:gd name="connsiteX1" fmla="*/ 6001549 w 6008106"/>
+              <a:gd name="connsiteY1" fmla="*/ 0 h 6874411"/>
+              <a:gd name="connsiteX2" fmla="*/ 6000254 w 6008106"/>
+              <a:gd name="connsiteY2" fmla="*/ 6874411 h 6874411"/>
+              <a:gd name="connsiteX3" fmla="*/ 1387974 w 6008106"/>
+              <a:gd name="connsiteY3" fmla="*/ 6874411 h 6874411"/>
+              <a:gd name="connsiteX4" fmla="*/ 799 w 6008106"/>
+              <a:gd name="connsiteY4" fmla="*/ 5239586 h 6874411"/>
+              <a:gd name="connsiteX5" fmla="*/ 19849 w 6008106"/>
+              <a:gd name="connsiteY5" fmla="*/ 6586 h 6874411"/>
+              <a:gd name="connsiteX0" fmla="*/ 19849 w 6008106"/>
+              <a:gd name="connsiteY0" fmla="*/ 6586 h 6874447"/>
+              <a:gd name="connsiteX1" fmla="*/ 6001549 w 6008106"/>
+              <a:gd name="connsiteY1" fmla="*/ 0 h 6874447"/>
+              <a:gd name="connsiteX2" fmla="*/ 6000254 w 6008106"/>
+              <a:gd name="connsiteY2" fmla="*/ 6874411 h 6874447"/>
+              <a:gd name="connsiteX3" fmla="*/ 1387974 w 6008106"/>
+              <a:gd name="connsiteY3" fmla="*/ 6874411 h 6874447"/>
+              <a:gd name="connsiteX4" fmla="*/ 799 w 6008106"/>
+              <a:gd name="connsiteY4" fmla="*/ 5239586 h 6874447"/>
+              <a:gd name="connsiteX5" fmla="*/ 19849 w 6008106"/>
+              <a:gd name="connsiteY5" fmla="*/ 6586 h 6874447"/>
+              <a:gd name="connsiteX0" fmla="*/ 21445 w 6009702"/>
+              <a:gd name="connsiteY0" fmla="*/ 6586 h 6874477"/>
+              <a:gd name="connsiteX1" fmla="*/ 6003145 w 6009702"/>
+              <a:gd name="connsiteY1" fmla="*/ 0 h 6874477"/>
+              <a:gd name="connsiteX2" fmla="*/ 6001850 w 6009702"/>
+              <a:gd name="connsiteY2" fmla="*/ 6874411 h 6874477"/>
+              <a:gd name="connsiteX3" fmla="*/ 1389570 w 6009702"/>
+              <a:gd name="connsiteY3" fmla="*/ 6874411 h 6874477"/>
+              <a:gd name="connsiteX4" fmla="*/ 2395 w 6009702"/>
+              <a:gd name="connsiteY4" fmla="*/ 5239586 h 6874477"/>
+              <a:gd name="connsiteX5" fmla="*/ 21445 w 6009702"/>
+              <a:gd name="connsiteY5" fmla="*/ 6586 h 6874477"/>
+              <a:gd name="connsiteX0" fmla="*/ 21685 w 6009942"/>
+              <a:gd name="connsiteY0" fmla="*/ 6586 h 6874411"/>
+              <a:gd name="connsiteX1" fmla="*/ 6003385 w 6009942"/>
+              <a:gd name="connsiteY1" fmla="*/ 0 h 6874411"/>
+              <a:gd name="connsiteX2" fmla="*/ 6002090 w 6009942"/>
+              <a:gd name="connsiteY2" fmla="*/ 6874411 h 6874411"/>
+              <a:gd name="connsiteX3" fmla="*/ 1389810 w 6009942"/>
+              <a:gd name="connsiteY3" fmla="*/ 6874411 h 6874411"/>
+              <a:gd name="connsiteX4" fmla="*/ 2635 w 6009942"/>
+              <a:gd name="connsiteY4" fmla="*/ 5239586 h 6874411"/>
+              <a:gd name="connsiteX5" fmla="*/ 21685 w 6009942"/>
+              <a:gd name="connsiteY5" fmla="*/ 6586 h 6874411"/>
+              <a:gd name="connsiteX0" fmla="*/ 1308 w 6011790"/>
+              <a:gd name="connsiteY0" fmla="*/ 660636 h 6874411"/>
+              <a:gd name="connsiteX1" fmla="*/ 6005233 w 6011790"/>
+              <a:gd name="connsiteY1" fmla="*/ 0 h 6874411"/>
+              <a:gd name="connsiteX2" fmla="*/ 6003938 w 6011790"/>
+              <a:gd name="connsiteY2" fmla="*/ 6874411 h 6874411"/>
+              <a:gd name="connsiteX3" fmla="*/ 1391658 w 6011790"/>
+              <a:gd name="connsiteY3" fmla="*/ 6874411 h 6874411"/>
+              <a:gd name="connsiteX4" fmla="*/ 4483 w 6011790"/>
+              <a:gd name="connsiteY4" fmla="*/ 5239586 h 6874411"/>
+              <a:gd name="connsiteX5" fmla="*/ 1308 w 6011790"/>
+              <a:gd name="connsiteY5" fmla="*/ 660636 h 6874411"/>
+              <a:gd name="connsiteX0" fmla="*/ 1308 w 6010421"/>
+              <a:gd name="connsiteY0" fmla="*/ 9761 h 6223536"/>
+              <a:gd name="connsiteX1" fmla="*/ 6002058 w 6010421"/>
+              <a:gd name="connsiteY1" fmla="*/ 0 h 6223536"/>
+              <a:gd name="connsiteX2" fmla="*/ 6003938 w 6010421"/>
+              <a:gd name="connsiteY2" fmla="*/ 6223536 h 6223536"/>
+              <a:gd name="connsiteX3" fmla="*/ 1391658 w 6010421"/>
+              <a:gd name="connsiteY3" fmla="*/ 6223536 h 6223536"/>
+              <a:gd name="connsiteX4" fmla="*/ 4483 w 6010421"/>
+              <a:gd name="connsiteY4" fmla="*/ 4588711 h 6223536"/>
+              <a:gd name="connsiteX5" fmla="*/ 1308 w 6010421"/>
+              <a:gd name="connsiteY5" fmla="*/ 9761 h 6223536"/>
+              <a:gd name="connsiteX0" fmla="*/ 1308 w 6005272"/>
+              <a:gd name="connsiteY0" fmla="*/ 6586 h 6220361"/>
+              <a:gd name="connsiteX1" fmla="*/ 5944908 w 6005272"/>
+              <a:gd name="connsiteY1" fmla="*/ 0 h 6220361"/>
+              <a:gd name="connsiteX2" fmla="*/ 6003938 w 6005272"/>
+              <a:gd name="connsiteY2" fmla="*/ 6220361 h 6220361"/>
+              <a:gd name="connsiteX3" fmla="*/ 1391658 w 6005272"/>
+              <a:gd name="connsiteY3" fmla="*/ 6220361 h 6220361"/>
+              <a:gd name="connsiteX4" fmla="*/ 4483 w 6005272"/>
+              <a:gd name="connsiteY4" fmla="*/ 4585536 h 6220361"/>
+              <a:gd name="connsiteX5" fmla="*/ 1308 w 6005272"/>
+              <a:gd name="connsiteY5" fmla="*/ 6586 h 6220361"/>
+              <a:gd name="connsiteX0" fmla="*/ 1308 w 5953271"/>
+              <a:gd name="connsiteY0" fmla="*/ 6586 h 6220361"/>
+              <a:gd name="connsiteX1" fmla="*/ 5944908 w 5953271"/>
+              <a:gd name="connsiteY1" fmla="*/ 0 h 6220361"/>
+              <a:gd name="connsiteX2" fmla="*/ 5946788 w 5953271"/>
+              <a:gd name="connsiteY2" fmla="*/ 6217186 h 6220361"/>
+              <a:gd name="connsiteX3" fmla="*/ 1391658 w 5953271"/>
+              <a:gd name="connsiteY3" fmla="*/ 6220361 h 6220361"/>
+              <a:gd name="connsiteX4" fmla="*/ 4483 w 5953271"/>
+              <a:gd name="connsiteY4" fmla="*/ 4585536 h 6220361"/>
+              <a:gd name="connsiteX5" fmla="*/ 1308 w 5953271"/>
+              <a:gd name="connsiteY5" fmla="*/ 6586 h 6220361"/>
+            </a:gdLst>
+            <a:ahLst/>
+            <a:cxnLst>
+              <a:cxn ang="0">
+                <a:pos x="connsiteX0" y="connsiteY0"/>
+              </a:cxn>
+              <a:cxn ang="0">
+                <a:pos x="connsiteX1" y="connsiteY1"/>
+              </a:cxn>
+              <a:cxn ang="0">
+                <a:pos x="connsiteX2" y="connsiteY2"/>
+              </a:cxn>
+              <a:cxn ang="0">
+                <a:pos x="connsiteX3" y="connsiteY3"/>
+              </a:cxn>
+              <a:cxn ang="0">
+                <a:pos x="connsiteX4" y="connsiteY4"/>
+              </a:cxn>
+              <a:cxn ang="0">
+                <a:pos x="connsiteX5" y="connsiteY5"/>
+              </a:cxn>
+            </a:cxnLst>
+            <a:rect l="l" t="t" r="r" b="b"/>
+            <a:pathLst>
+              <a:path w="5953271" h="6220361">
+                <a:moveTo>
+                  <a:pt x="1308" y="6586"/>
+                </a:moveTo>
+                <a:lnTo>
+                  <a:pt x="5944908" y="0"/>
+                </a:lnTo>
+                <a:cubicBezTo>
+                  <a:pt x="5952972" y="2835940"/>
+                  <a:pt x="5957933" y="3109916"/>
+                  <a:pt x="5946788" y="6217186"/>
+                </a:cubicBezTo>
+                <a:lnTo>
+                  <a:pt x="1391658" y="6220361"/>
+                </a:lnTo>
+                <a:cubicBezTo>
+                  <a:pt x="1177495" y="6218923"/>
+                  <a:pt x="-62771" y="5961948"/>
+                  <a:pt x="4483" y="4585536"/>
+                </a:cubicBezTo>
+                <a:cubicBezTo>
+                  <a:pt x="-759" y="3390099"/>
+                  <a:pt x="-809" y="1739278"/>
+                  <a:pt x="1308" y="6586"/>
+                </a:cubicBezTo>
+                <a:close/>
+              </a:path>
+            </a:pathLst>
+          </a:custGeom>
+          <a:solidFill>
+            <a:srgbClr val="CCCCCC">
+              <a:alpha val="72170"/>
+            </a:srgbClr>
+          </a:solidFill>
+        </p:spPr>
+      </p:pic>
+    </p:spTree>
+    <p:extLst>
+      <p:ext uri="{BB962C8B-B14F-4D97-AF65-F5344CB8AC3E}">
+        <p14:creationId xmlns:p14="http://schemas.microsoft.com/office/powerpoint/2010/main" val="3456812961"/>
+      </p:ext>
+    </p:extLst>
+  </p:cSld>
+  <p:clrMapOvr>
+    <a:masterClrMapping/>
+  </p:clrMapOvr>
+</p:sld>
+</file>
+
+<file path=ppt/slides/slide31.xml><?xml version="1.0" encoding="utf-8"?>
+<p:sld xmlns:a="http://schemas.openxmlformats.org/drawingml/2006/main" xmlns:r="http://schemas.openxmlformats.org/officeDocument/2006/relationships" xmlns:p="http://schemas.openxmlformats.org/presentationml/2006/main">
+  <p:cSld>
+    <p:spTree>
+      <p:nvGrpSpPr>
+        <p:cNvPr id="1" name=""/>
+        <p:cNvGrpSpPr/>
+        <p:nvPr/>
+      </p:nvGrpSpPr>
+      <p:grpSpPr>
+        <a:xfrm>
+          <a:off x="0" y="0"/>
+          <a:ext cx="0" cy="0"/>
+          <a:chOff x="0" y="0"/>
+          <a:chExt cx="0" cy="0"/>
+        </a:xfrm>
+      </p:grpSpPr>
+      <p:sp>
+        <p:nvSpPr>
+          <p:cNvPr id="2" name="Title 1">
+            <a:extLst>
+              <a:ext uri="{FF2B5EF4-FFF2-40B4-BE49-F238E27FC236}">
                 <a16:creationId xmlns:a16="http://schemas.microsoft.com/office/drawing/2014/main" id="{BA6C69B8-5719-314E-939A-ECE8F8D96F02}"/>
               </a:ext>
             </a:extLst>
@@ -21106,7 +21594,7 @@
             <a:fld id="{888928BD-9DD5-4B49-B597-3FD2BD4272DD}" type="slidenum">
               <a:rPr smtClean="0"/>
               <a:pPr/>
-              <a:t>30</a:t>
+              <a:t>31</a:t>
             </a:fld>
             <a:endParaRPr dirty="0"/>
           </a:p>
@@ -21225,7 +21713,7 @@
 </p:sld>
 </file>
 
-<file path=ppt/slides/slide31.xml><?xml version="1.0" encoding="utf-8"?>
+<file path=ppt/slides/slide32.xml><?xml version="1.0" encoding="utf-8"?>
 <p:sld xmlns:a="http://schemas.openxmlformats.org/drawingml/2006/main" xmlns:r="http://schemas.openxmlformats.org/officeDocument/2006/relationships" xmlns:p="http://schemas.openxmlformats.org/presentationml/2006/main">
   <p:cSld>
     <p:spTree>
@@ -21303,7 +21791,7 @@
             <a:fld id="{888928BD-9DD5-4B49-B597-3FD2BD4272DD}" type="slidenum">
               <a:rPr smtClean="0"/>
               <a:pPr/>
-              <a:t>31</a:t>
+              <a:t>32</a:t>
             </a:fld>
             <a:endParaRPr dirty="0"/>
           </a:p>
@@ -22373,7 +22861,7 @@
 </p:sld>
 </file>
 
-<file path=ppt/slides/slide32.xml><?xml version="1.0" encoding="utf-8"?>
+<file path=ppt/slides/slide33.xml><?xml version="1.0" encoding="utf-8"?>
 <p:sld xmlns:a="http://schemas.openxmlformats.org/drawingml/2006/main" xmlns:r="http://schemas.openxmlformats.org/officeDocument/2006/relationships" xmlns:p="http://schemas.openxmlformats.org/presentationml/2006/main">
   <p:cSld>
     <p:spTree>
@@ -22446,7 +22934,7 @@
             <a:fld id="{888928BD-9DD5-4B49-B597-3FD2BD4272DD}" type="slidenum">
               <a:rPr smtClean="0"/>
               <a:pPr/>
-              <a:t>32</a:t>
+              <a:t>33</a:t>
             </a:fld>
             <a:endParaRPr dirty="0"/>
           </a:p>
@@ -22579,7 +23067,7 @@
 </p:sld>
 </file>
 
-<file path=ppt/slides/slide33.xml><?xml version="1.0" encoding="utf-8"?>
+<file path=ppt/slides/slide34.xml><?xml version="1.0" encoding="utf-8"?>
 <p:sld xmlns:a="http://schemas.openxmlformats.org/drawingml/2006/main" xmlns:r="http://schemas.openxmlformats.org/officeDocument/2006/relationships" xmlns:p="http://schemas.openxmlformats.org/presentationml/2006/main">
   <p:cSld>
     <p:spTree>
@@ -22686,7 +23174,7 @@
             <a:fld id="{888928BD-9DD5-4B49-B597-3FD2BD4272DD}" type="slidenum">
               <a:rPr smtClean="0"/>
               <a:pPr/>
-              <a:t>33</a:t>
+              <a:t>34</a:t>
             </a:fld>
             <a:endParaRPr dirty="0"/>
           </a:p>
@@ -22705,7 +23193,7 @@
 </p:sld>
 </file>
 
-<file path=ppt/slides/slide34.xml><?xml version="1.0" encoding="utf-8"?>
+<file path=ppt/slides/slide35.xml><?xml version="1.0" encoding="utf-8"?>
 <p:sld xmlns:a="http://schemas.openxmlformats.org/drawingml/2006/main" xmlns:r="http://schemas.openxmlformats.org/officeDocument/2006/relationships" xmlns:p="http://schemas.openxmlformats.org/presentationml/2006/main">
   <p:cSld>
     <p:spTree>
@@ -22778,7 +23266,7 @@
             <a:fld id="{888928BD-9DD5-4B49-B597-3FD2BD4272DD}" type="slidenum">
               <a:rPr smtClean="0"/>
               <a:pPr/>
-              <a:t>34</a:t>
+              <a:t>35</a:t>
             </a:fld>
             <a:endParaRPr dirty="0"/>
           </a:p>
@@ -23203,7 +23691,7 @@
 </p:sld>
 </file>
 
-<file path=ppt/slides/slide35.xml><?xml version="1.0" encoding="utf-8"?>
+<file path=ppt/slides/slide36.xml><?xml version="1.0" encoding="utf-8"?>
 <p:sld xmlns:a="http://schemas.openxmlformats.org/drawingml/2006/main" xmlns:r="http://schemas.openxmlformats.org/officeDocument/2006/relationships" xmlns:p="http://schemas.openxmlformats.org/presentationml/2006/main">
   <p:cSld>
     <p:spTree>
@@ -23310,7 +23798,7 @@
             <a:fld id="{888928BD-9DD5-4B49-B597-3FD2BD4272DD}" type="slidenum">
               <a:rPr smtClean="0"/>
               <a:pPr/>
-              <a:t>35</a:t>
+              <a:t>36</a:t>
             </a:fld>
             <a:endParaRPr dirty="0"/>
           </a:p>
@@ -23329,7 +23817,7 @@
 </p:sld>
 </file>
 
-<file path=ppt/slides/slide36.xml><?xml version="1.0" encoding="utf-8"?>
+<file path=ppt/slides/slide37.xml><?xml version="1.0" encoding="utf-8"?>
 <p:sld xmlns:a="http://schemas.openxmlformats.org/drawingml/2006/main" xmlns:r="http://schemas.openxmlformats.org/officeDocument/2006/relationships" xmlns:p="http://schemas.openxmlformats.org/presentationml/2006/main">
   <p:cSld>
     <p:spTree>
@@ -23402,7 +23890,7 @@
             <a:fld id="{888928BD-9DD5-4B49-B597-3FD2BD4272DD}" type="slidenum">
               <a:rPr smtClean="0"/>
               <a:pPr/>
-              <a:t>36</a:t>
+              <a:t>37</a:t>
             </a:fld>
             <a:endParaRPr dirty="0"/>
           </a:p>
@@ -23873,7 +24361,7 @@
 </p:sld>
 </file>
 
-<file path=ppt/slides/slide37.xml><?xml version="1.0" encoding="utf-8"?>
+<file path=ppt/slides/slide38.xml><?xml version="1.0" encoding="utf-8"?>
 <p:sld xmlns:a="http://schemas.openxmlformats.org/drawingml/2006/main" xmlns:r="http://schemas.openxmlformats.org/officeDocument/2006/relationships" xmlns:p="http://schemas.openxmlformats.org/presentationml/2006/main">
   <p:cSld>
     <p:spTree>
@@ -23946,7 +24434,7 @@
             <a:fld id="{888928BD-9DD5-4B49-B597-3FD2BD4272DD}" type="slidenum">
               <a:rPr smtClean="0"/>
               <a:pPr/>
-              <a:t>37</a:t>
+              <a:t>38</a:t>
             </a:fld>
             <a:endParaRPr dirty="0"/>
           </a:p>
@@ -25016,7 +25504,7 @@
 </p:sld>
 </file>
 
-<file path=ppt/slides/slide38.xml><?xml version="1.0" encoding="utf-8"?>
+<file path=ppt/slides/slide39.xml><?xml version="1.0" encoding="utf-8"?>
 <p:sld xmlns:a="http://schemas.openxmlformats.org/drawingml/2006/main" xmlns:r="http://schemas.openxmlformats.org/officeDocument/2006/relationships" xmlns:p="http://schemas.openxmlformats.org/presentationml/2006/main">
   <p:cSld>
     <p:spTree>
@@ -25089,7 +25577,7 @@
             <a:fld id="{888928BD-9DD5-4B49-B597-3FD2BD4272DD}" type="slidenum">
               <a:rPr smtClean="0"/>
               <a:pPr/>
-              <a:t>38</a:t>
+              <a:t>39</a:t>
             </a:fld>
             <a:endParaRPr dirty="0"/>
           </a:p>
@@ -25275,64 +25763,6 @@
     <p:extLst>
       <p:ext uri="{BB962C8B-B14F-4D97-AF65-F5344CB8AC3E}">
         <p14:creationId xmlns:p14="http://schemas.microsoft.com/office/powerpoint/2010/main" val="325507427"/>
-      </p:ext>
-    </p:extLst>
-  </p:cSld>
-  <p:clrMapOvr>
-    <a:masterClrMapping/>
-  </p:clrMapOvr>
-</p:sld>
-</file>
-
-<file path=ppt/slides/slide39.xml><?xml version="1.0" encoding="utf-8"?>
-<p:sld xmlns:a="http://schemas.openxmlformats.org/drawingml/2006/main" xmlns:r="http://schemas.openxmlformats.org/officeDocument/2006/relationships" xmlns:p="http://schemas.openxmlformats.org/presentationml/2006/main">
-  <p:cSld>
-    <p:spTree>
-      <p:nvGrpSpPr>
-        <p:cNvPr id="1" name=""/>
-        <p:cNvGrpSpPr/>
-        <p:nvPr/>
-      </p:nvGrpSpPr>
-      <p:grpSpPr>
-        <a:xfrm>
-          <a:off x="0" y="0"/>
-          <a:ext cx="0" cy="0"/>
-          <a:chOff x="0" y="0"/>
-          <a:chExt cx="0" cy="0"/>
-        </a:xfrm>
-      </p:grpSpPr>
-      <p:sp>
-        <p:nvSpPr>
-          <p:cNvPr id="2" name="Title 1">
-            <a:extLst>
-              <a:ext uri="{FF2B5EF4-FFF2-40B4-BE49-F238E27FC236}">
-                <a16:creationId xmlns:a16="http://schemas.microsoft.com/office/drawing/2014/main" id="{144EFC2C-5A08-6F46-8E65-E43E85D295D3}"/>
-              </a:ext>
-            </a:extLst>
-          </p:cNvPr>
-          <p:cNvSpPr>
-            <a:spLocks noGrp="1"/>
-          </p:cNvSpPr>
-          <p:nvPr>
-            <p:ph type="title"/>
-          </p:nvPr>
-        </p:nvSpPr>
-        <p:spPr/>
-        <p:txBody>
-          <a:bodyPr/>
-          <a:lstStyle/>
-          <a:p>
-            <a:r>
-              <a:rPr lang="en-US" dirty="0"/>
-              <a:t>Thank you!</a:t>
-            </a:r>
-          </a:p>
-        </p:txBody>
-      </p:sp>
-    </p:spTree>
-    <p:extLst>
-      <p:ext uri="{BB962C8B-B14F-4D97-AF65-F5344CB8AC3E}">
-        <p14:creationId xmlns:p14="http://schemas.microsoft.com/office/powerpoint/2010/main" val="1196893284"/>
       </p:ext>
     </p:extLst>
   </p:cSld>
@@ -25607,7 +26037,7 @@
           <p:nvPr>
             <p:extLst>
               <p:ext uri="{D42A27DB-BD31-4B8C-83A1-F6EECF244321}">
-                <p14:modId xmlns:p14="http://schemas.microsoft.com/office/powerpoint/2010/main" val="161430488"/>
+                <p14:modId xmlns:p14="http://schemas.microsoft.com/office/powerpoint/2010/main" val="2842000723"/>
               </p:ext>
             </p:extLst>
           </p:nvPr>
@@ -25700,8 +26130,35 @@
                       </a:pPr>
                       <a:r>
                         <a:rPr lang="en-US" sz="1600" dirty="0"/>
-                        <a:t>N/A</a:t>
+                        <a:t>Updated the Receipts Sample’s ..Behaviour.js file to perform ‘pagehide’ instead of ‘unload’</a:t>
                       </a:r>
+                    </a:p>
+                    <a:p>
+                      <a:pPr marL="628650" lvl="1" indent="-171450">
+                        <a:spcAft>
+                          <a:spcPts val="300"/>
+                        </a:spcAft>
+                        <a:buFont typeface="Arial" panose="020B0604020202020204" pitchFamily="34" charset="0"/>
+                        <a:buChar char="•"/>
+                      </a:pPr>
+                      <a:r>
+                        <a:rPr lang="en-US" sz="1600" dirty="0">
+                          <a:solidFill>
+                            <a:srgbClr val="FF0000"/>
+                          </a:solidFill>
+                        </a:rPr>
+                        <a:t>Important! See the following notice in this presentation</a:t>
+                      </a:r>
+                    </a:p>
+                    <a:p>
+                      <a:pPr marL="171450" indent="-171450">
+                        <a:spcAft>
+                          <a:spcPts val="300"/>
+                        </a:spcAft>
+                        <a:buFont typeface="Arial" panose="020B0604020202020204" pitchFamily="34" charset="0"/>
+                        <a:buChar char="•"/>
+                      </a:pPr>
+                      <a:endParaRPr lang="en-US" sz="1600" dirty="0"/>
                     </a:p>
                   </a:txBody>
                   <a:tcPr marL="0" marR="0">
@@ -25826,7 +26283,318 @@
 </p:sld>
 </file>
 
+<file path=ppt/slides/slide40.xml><?xml version="1.0" encoding="utf-8"?>
+<p:sld xmlns:a="http://schemas.openxmlformats.org/drawingml/2006/main" xmlns:r="http://schemas.openxmlformats.org/officeDocument/2006/relationships" xmlns:p="http://schemas.openxmlformats.org/presentationml/2006/main">
+  <p:cSld>
+    <p:spTree>
+      <p:nvGrpSpPr>
+        <p:cNvPr id="1" name=""/>
+        <p:cNvGrpSpPr/>
+        <p:nvPr/>
+      </p:nvGrpSpPr>
+      <p:grpSpPr>
+        <a:xfrm>
+          <a:off x="0" y="0"/>
+          <a:ext cx="0" cy="0"/>
+          <a:chOff x="0" y="0"/>
+          <a:chExt cx="0" cy="0"/>
+        </a:xfrm>
+      </p:grpSpPr>
+      <p:sp>
+        <p:nvSpPr>
+          <p:cNvPr id="2" name="Title 1">
+            <a:extLst>
+              <a:ext uri="{FF2B5EF4-FFF2-40B4-BE49-F238E27FC236}">
+                <a16:creationId xmlns:a16="http://schemas.microsoft.com/office/drawing/2014/main" id="{144EFC2C-5A08-6F46-8E65-E43E85D295D3}"/>
+              </a:ext>
+            </a:extLst>
+          </p:cNvPr>
+          <p:cNvSpPr>
+            <a:spLocks noGrp="1"/>
+          </p:cNvSpPr>
+          <p:nvPr>
+            <p:ph type="title"/>
+          </p:nvPr>
+        </p:nvSpPr>
+        <p:spPr/>
+        <p:txBody>
+          <a:bodyPr/>
+          <a:lstStyle/>
+          <a:p>
+            <a:r>
+              <a:rPr lang="en-US" dirty="0"/>
+              <a:t>Thank you!</a:t>
+            </a:r>
+          </a:p>
+        </p:txBody>
+      </p:sp>
+    </p:spTree>
+    <p:extLst>
+      <p:ext uri="{BB962C8B-B14F-4D97-AF65-F5344CB8AC3E}">
+        <p14:creationId xmlns:p14="http://schemas.microsoft.com/office/powerpoint/2010/main" val="1196893284"/>
+      </p:ext>
+    </p:extLst>
+  </p:cSld>
+  <p:clrMapOvr>
+    <a:masterClrMapping/>
+  </p:clrMapOvr>
+</p:sld>
+</file>
+
 <file path=ppt/slides/slide5.xml><?xml version="1.0" encoding="utf-8"?>
+<p:sld xmlns:a="http://schemas.openxmlformats.org/drawingml/2006/main" xmlns:r="http://schemas.openxmlformats.org/officeDocument/2006/relationships" xmlns:p="http://schemas.openxmlformats.org/presentationml/2006/main">
+  <p:cSld>
+    <p:spTree>
+      <p:nvGrpSpPr>
+        <p:cNvPr id="1" name="">
+          <a:extLst>
+            <a:ext uri="{FF2B5EF4-FFF2-40B4-BE49-F238E27FC236}">
+              <a16:creationId xmlns:a16="http://schemas.microsoft.com/office/drawing/2014/main" id="{26673A6C-4311-36C9-9300-0C30A3B477D1}"/>
+            </a:ext>
+          </a:extLst>
+        </p:cNvPr>
+        <p:cNvGrpSpPr/>
+        <p:nvPr/>
+      </p:nvGrpSpPr>
+      <p:grpSpPr>
+        <a:xfrm>
+          <a:off x="0" y="0"/>
+          <a:ext cx="0" cy="0"/>
+          <a:chOff x="0" y="0"/>
+          <a:chExt cx="0" cy="0"/>
+        </a:xfrm>
+      </p:grpSpPr>
+      <p:sp>
+        <p:nvSpPr>
+          <p:cNvPr id="2" name="Title 1">
+            <a:extLst>
+              <a:ext uri="{FF2B5EF4-FFF2-40B4-BE49-F238E27FC236}">
+                <a16:creationId xmlns:a16="http://schemas.microsoft.com/office/drawing/2014/main" id="{F14340BB-B856-04A5-DE53-4C7B6A3128C1}"/>
+              </a:ext>
+            </a:extLst>
+          </p:cNvPr>
+          <p:cNvSpPr>
+            <a:spLocks noGrp="1"/>
+          </p:cNvSpPr>
+          <p:nvPr>
+            <p:ph type="title"/>
+          </p:nvPr>
+        </p:nvSpPr>
+        <p:spPr/>
+        <p:txBody>
+          <a:bodyPr/>
+          <a:lstStyle/>
+          <a:p>
+            <a:r>
+              <a:rPr lang="en-US" dirty="0"/>
+              <a:t>Chrome Browser</a:t>
+            </a:r>
+          </a:p>
+        </p:txBody>
+      </p:sp>
+      <p:sp>
+        <p:nvSpPr>
+          <p:cNvPr id="4" name="Slide Number Placeholder 3">
+            <a:extLst>
+              <a:ext uri="{FF2B5EF4-FFF2-40B4-BE49-F238E27FC236}">
+                <a16:creationId xmlns:a16="http://schemas.microsoft.com/office/drawing/2014/main" id="{406AFCC9-0F69-2FD9-1ED4-0C3895D6426D}"/>
+              </a:ext>
+            </a:extLst>
+          </p:cNvPr>
+          <p:cNvSpPr>
+            <a:spLocks noGrp="1"/>
+          </p:cNvSpPr>
+          <p:nvPr>
+            <p:ph type="sldNum" sz="quarter" idx="10"/>
+          </p:nvPr>
+        </p:nvSpPr>
+        <p:spPr/>
+        <p:txBody>
+          <a:bodyPr/>
+          <a:lstStyle/>
+          <a:p>
+            <a:r>
+              <a:rPr lang="en-US"/>
+              <a:t>Page </a:t>
+            </a:r>
+            <a:fld id="{888928BD-9DD5-4B49-B597-3FD2BD4272DD}" type="slidenum">
+              <a:rPr smtClean="0"/>
+              <a:pPr/>
+              <a:t>5</a:t>
+            </a:fld>
+            <a:endParaRPr dirty="0"/>
+          </a:p>
+        </p:txBody>
+      </p:sp>
+      <p:sp>
+        <p:nvSpPr>
+          <p:cNvPr id="53" name="Text Placeholder 2">
+            <a:extLst>
+              <a:ext uri="{FF2B5EF4-FFF2-40B4-BE49-F238E27FC236}">
+                <a16:creationId xmlns:a16="http://schemas.microsoft.com/office/drawing/2014/main" id="{59D84DDB-182F-10BF-81F5-4ABEF5761925}"/>
+              </a:ext>
+            </a:extLst>
+          </p:cNvPr>
+          <p:cNvSpPr>
+            <a:spLocks noGrp="1"/>
+          </p:cNvSpPr>
+          <p:nvPr>
+            <p:ph type="body" sz="quarter" idx="12"/>
+          </p:nvPr>
+        </p:nvSpPr>
+        <p:spPr>
+          <a:xfrm>
+            <a:off x="419098" y="1138680"/>
+            <a:ext cx="11346180" cy="438912"/>
+          </a:xfrm>
+        </p:spPr>
+        <p:txBody>
+          <a:bodyPr/>
+          <a:lstStyle/>
+          <a:p>
+            <a:r>
+              <a:rPr lang="en-US" dirty="0"/>
+              <a:t>The ‘unload’ event is being deprecated</a:t>
+            </a:r>
+          </a:p>
+        </p:txBody>
+      </p:sp>
+      <p:sp>
+        <p:nvSpPr>
+          <p:cNvPr id="3" name="TextBox 2">
+            <a:extLst>
+              <a:ext uri="{FF2B5EF4-FFF2-40B4-BE49-F238E27FC236}">
+                <a16:creationId xmlns:a16="http://schemas.microsoft.com/office/drawing/2014/main" id="{901BC6BD-B7A0-B1DC-1EDB-AFA4BA46102A}"/>
+              </a:ext>
+            </a:extLst>
+          </p:cNvPr>
+          <p:cNvSpPr txBox="1"/>
+          <p:nvPr/>
+        </p:nvSpPr>
+        <p:spPr>
+          <a:xfrm>
+            <a:off x="560438" y="1887793"/>
+            <a:ext cx="11204840" cy="4018935"/>
+          </a:xfrm>
+          <a:prstGeom prst="rect">
+            <a:avLst/>
+          </a:prstGeom>
+          <a:noFill/>
+        </p:spPr>
+        <p:txBody>
+          <a:bodyPr wrap="square" lIns="0" tIns="0" rIns="0" bIns="0" rtlCol="0">
+            <a:noAutofit/>
+          </a:bodyPr>
+          <a:lstStyle/>
+          <a:p>
+            <a:r>
+              <a:rPr lang="en-US" sz="1600" b="0" i="0" dirty="0">
+                <a:solidFill>
+                  <a:schemeClr val="tx1"/>
+                </a:solidFill>
+                <a:latin typeface="Sage Text" panose="02010503040201060103" pitchFamily="2" charset="77"/>
+              </a:rPr>
+              <a:t>The unload event is being gradually deprecated by changing the default so that unload handlers stop firing on pages unless a page explicitl</a:t>
+            </a:r>
+            <a:r>
+              <a:rPr lang="en-US" sz="1600" dirty="0">
+                <a:latin typeface="Sage Text" panose="02010503040201060103" pitchFamily="2" charset="77"/>
+              </a:rPr>
+              <a:t>y opts in to re-enable them. See the following link for the rollout schedule: </a:t>
+            </a:r>
+            <a:r>
+              <a:rPr lang="en-US" sz="1600" dirty="0">
+                <a:hlinkClick r:id="rId3"/>
+              </a:rPr>
+              <a:t>Deprecating the unload event | Web Platform | Chrome for Developers</a:t>
+            </a:r>
+            <a:endParaRPr lang="en-US" sz="1600" dirty="0"/>
+          </a:p>
+          <a:p>
+            <a:endParaRPr lang="en-US" sz="1600" b="0" i="0" dirty="0">
+              <a:solidFill>
+                <a:schemeClr val="tx1"/>
+              </a:solidFill>
+              <a:latin typeface="Sage Text" panose="02010503040201060103" pitchFamily="2" charset="77"/>
+            </a:endParaRPr>
+          </a:p>
+          <a:p>
+            <a:r>
+              <a:rPr lang="en-US" sz="1600" dirty="0">
+                <a:latin typeface="Sage Text" panose="02010503040201060103" pitchFamily="2" charset="77"/>
+              </a:rPr>
+              <a:t>This is critical for Sage 300 “stateful” screens since the unload event is where the session is released/destroyed.</a:t>
+            </a:r>
+          </a:p>
+          <a:p>
+            <a:endParaRPr lang="en-US" sz="1600" b="0" i="0" dirty="0">
+              <a:solidFill>
+                <a:schemeClr val="tx1"/>
+              </a:solidFill>
+              <a:latin typeface="Sage Text" panose="02010503040201060103" pitchFamily="2" charset="77"/>
+            </a:endParaRPr>
+          </a:p>
+          <a:p>
+            <a:r>
+              <a:rPr lang="en-US" sz="1600" dirty="0">
+                <a:latin typeface="Sage Text" panose="02010503040201060103" pitchFamily="2" charset="77"/>
+              </a:rPr>
+              <a:t>For the upcoming 2027.0 release and the N-2 supported releases (2026.3 and 2025.6), a new pattern has been implemented as we have moved away from the unload event. </a:t>
+            </a:r>
+          </a:p>
+          <a:p>
+            <a:endParaRPr lang="en-US" sz="1600" dirty="0">
+              <a:latin typeface="Sage Text" panose="02010503040201060103" pitchFamily="2" charset="77"/>
+            </a:endParaRPr>
+          </a:p>
+          <a:p>
+            <a:r>
+              <a:rPr lang="en-US" sz="1600" dirty="0">
+                <a:latin typeface="Sage Text" panose="02010503040201060103" pitchFamily="2" charset="77"/>
+              </a:rPr>
+              <a:t>Third-party developers will also need to make this change.</a:t>
+            </a:r>
+          </a:p>
+          <a:p>
+            <a:endParaRPr lang="en-US" sz="1600" dirty="0">
+              <a:latin typeface="Sage Text" panose="02010503040201060103" pitchFamily="2" charset="77"/>
+            </a:endParaRPr>
+          </a:p>
+          <a:p>
+            <a:r>
+              <a:rPr lang="en-US" sz="1600" dirty="0">
+                <a:solidFill>
+                  <a:srgbClr val="FF0000"/>
+                </a:solidFill>
+                <a:latin typeface="Sage Text" panose="02010503040201060103" pitchFamily="2" charset="77"/>
+              </a:rPr>
+              <a:t>See section 4.6 of the Upgrade Document (Sage300SDK_2027_0UpgradeGuide.docx) as this is a manual change.</a:t>
+            </a:r>
+          </a:p>
+          <a:p>
+            <a:endParaRPr lang="en-US" sz="1600" b="0" i="0" dirty="0">
+              <a:solidFill>
+                <a:schemeClr val="tx1"/>
+              </a:solidFill>
+              <a:latin typeface="Sage Text" panose="02010503040201060103" pitchFamily="2" charset="77"/>
+            </a:endParaRPr>
+          </a:p>
+        </p:txBody>
+      </p:sp>
+    </p:spTree>
+    <p:extLst>
+      <p:ext uri="{BB962C8B-B14F-4D97-AF65-F5344CB8AC3E}">
+        <p14:creationId xmlns:p14="http://schemas.microsoft.com/office/powerpoint/2010/main" val="1047679658"/>
+      </p:ext>
+    </p:extLst>
+  </p:cSld>
+  <p:clrMapOvr>
+    <a:masterClrMapping/>
+  </p:clrMapOvr>
+</p:sld>
+</file>
+
+<file path=ppt/slides/slide6.xml><?xml version="1.0" encoding="utf-8"?>
 <p:sld xmlns:a="http://schemas.openxmlformats.org/drawingml/2006/main" xmlns:r="http://schemas.openxmlformats.org/officeDocument/2006/relationships" xmlns:p="http://schemas.openxmlformats.org/presentationml/2006/main">
   <p:cSld>
     <p:spTree>
@@ -25933,7 +26701,7 @@
             <a:fld id="{888928BD-9DD5-4B49-B597-3FD2BD4272DD}" type="slidenum">
               <a:rPr smtClean="0"/>
               <a:pPr/>
-              <a:t>5</a:t>
+              <a:t>6</a:t>
             </a:fld>
             <a:endParaRPr dirty="0"/>
           </a:p>
@@ -25952,7 +26720,7 @@
 </p:sld>
 </file>
 
-<file path=ppt/slides/slide6.xml><?xml version="1.0" encoding="utf-8"?>
+<file path=ppt/slides/slide7.xml><?xml version="1.0" encoding="utf-8"?>
 <p:sld xmlns:a="http://schemas.openxmlformats.org/drawingml/2006/main" xmlns:r="http://schemas.openxmlformats.org/officeDocument/2006/relationships" xmlns:p="http://schemas.openxmlformats.org/presentationml/2006/main">
   <p:cSld>
     <p:spTree>
@@ -26025,7 +26793,7 @@
             <a:fld id="{888928BD-9DD5-4B49-B597-3FD2BD4272DD}" type="slidenum">
               <a:rPr smtClean="0"/>
               <a:pPr/>
-              <a:t>6</a:t>
+              <a:t>7</a:t>
             </a:fld>
             <a:endParaRPr dirty="0"/>
           </a:p>
@@ -27635,7 +28403,7 @@
 </p:sld>
 </file>
 
-<file path=ppt/slides/slide7.xml><?xml version="1.0" encoding="utf-8"?>
+<file path=ppt/slides/slide8.xml><?xml version="1.0" encoding="utf-8"?>
 <p:sld xmlns:a="http://schemas.openxmlformats.org/drawingml/2006/main" xmlns:r="http://schemas.openxmlformats.org/officeDocument/2006/relationships" xmlns:p="http://schemas.openxmlformats.org/presentationml/2006/main">
   <p:cSld>
     <p:spTree>
@@ -27708,7 +28476,7 @@
             <a:fld id="{888928BD-9DD5-4B49-B597-3FD2BD4272DD}" type="slidenum">
               <a:rPr smtClean="0"/>
               <a:pPr/>
-              <a:t>7</a:t>
+              <a:t>8</a:t>
             </a:fld>
             <a:endParaRPr dirty="0"/>
           </a:p>
@@ -27936,387 +28704,6 @@
 </p:sld>
 </file>
 
-<file path=ppt/slides/slide8.xml><?xml version="1.0" encoding="utf-8"?>
-<p:sld xmlns:a="http://schemas.openxmlformats.org/drawingml/2006/main" xmlns:r="http://schemas.openxmlformats.org/officeDocument/2006/relationships" xmlns:p="http://schemas.openxmlformats.org/presentationml/2006/main">
-  <p:cSld>
-    <p:spTree>
-      <p:nvGrpSpPr>
-        <p:cNvPr id="1" name=""/>
-        <p:cNvGrpSpPr/>
-        <p:nvPr/>
-      </p:nvGrpSpPr>
-      <p:grpSpPr>
-        <a:xfrm>
-          <a:off x="0" y="0"/>
-          <a:ext cx="0" cy="0"/>
-          <a:chOff x="0" y="0"/>
-          <a:chExt cx="0" cy="0"/>
-        </a:xfrm>
-      </p:grpSpPr>
-      <p:sp>
-        <p:nvSpPr>
-          <p:cNvPr id="2" name="Title 1">
-            <a:extLst>
-              <a:ext uri="{FF2B5EF4-FFF2-40B4-BE49-F238E27FC236}">
-                <a16:creationId xmlns:a16="http://schemas.microsoft.com/office/drawing/2014/main" id="{BA6C69B8-5719-314E-939A-ECE8F8D96F02}"/>
-              </a:ext>
-            </a:extLst>
-          </p:cNvPr>
-          <p:cNvSpPr>
-            <a:spLocks noGrp="1"/>
-          </p:cNvSpPr>
-          <p:nvPr>
-            <p:ph type="title"/>
-          </p:nvPr>
-        </p:nvSpPr>
-        <p:spPr/>
-        <p:txBody>
-          <a:bodyPr/>
-          <a:lstStyle/>
-          <a:p>
-            <a:r>
-              <a:rPr lang="en-US" dirty="0"/>
-              <a:t>Wizards</a:t>
-            </a:r>
-          </a:p>
-        </p:txBody>
-      </p:sp>
-      <p:sp>
-        <p:nvSpPr>
-          <p:cNvPr id="4" name="Slide Number Placeholder 3">
-            <a:extLst>
-              <a:ext uri="{FF2B5EF4-FFF2-40B4-BE49-F238E27FC236}">
-                <a16:creationId xmlns:a16="http://schemas.microsoft.com/office/drawing/2014/main" id="{7DB49043-0D36-3944-8C61-89B95273C808}"/>
-              </a:ext>
-            </a:extLst>
-          </p:cNvPr>
-          <p:cNvSpPr>
-            <a:spLocks noGrp="1"/>
-          </p:cNvSpPr>
-          <p:nvPr>
-            <p:ph type="sldNum" sz="quarter" idx="10"/>
-          </p:nvPr>
-        </p:nvSpPr>
-        <p:spPr/>
-        <p:txBody>
-          <a:bodyPr/>
-          <a:lstStyle/>
-          <a:p>
-            <a:r>
-              <a:rPr lang="en-US"/>
-              <a:t>Page </a:t>
-            </a:r>
-            <a:fld id="{888928BD-9DD5-4B49-B597-3FD2BD4272DD}" type="slidenum">
-              <a:rPr smtClean="0"/>
-              <a:pPr/>
-              <a:t>8</a:t>
-            </a:fld>
-            <a:endParaRPr dirty="0"/>
-          </a:p>
-        </p:txBody>
-      </p:sp>
-      <p:sp>
-        <p:nvSpPr>
-          <p:cNvPr id="53" name="Text Placeholder 2">
-            <a:extLst>
-              <a:ext uri="{FF2B5EF4-FFF2-40B4-BE49-F238E27FC236}">
-                <a16:creationId xmlns:a16="http://schemas.microsoft.com/office/drawing/2014/main" id="{58DA4C5B-4108-11B9-A843-26E66321E63A}"/>
-              </a:ext>
-            </a:extLst>
-          </p:cNvPr>
-          <p:cNvSpPr>
-            <a:spLocks noGrp="1"/>
-          </p:cNvSpPr>
-          <p:nvPr>
-            <p:ph type="body" sz="quarter" idx="12"/>
-          </p:nvPr>
-        </p:nvSpPr>
-        <p:spPr>
-          <a:xfrm>
-            <a:off x="419098" y="1138680"/>
-            <a:ext cx="11346180" cy="438912"/>
-          </a:xfrm>
-        </p:spPr>
-        <p:txBody>
-          <a:bodyPr/>
-          <a:lstStyle/>
-          <a:p>
-            <a:r>
-              <a:rPr lang="en-US" dirty="0"/>
-              <a:t>2027.0 uninstall and install instructions</a:t>
-            </a:r>
-          </a:p>
-        </p:txBody>
-      </p:sp>
-      <p:sp>
-        <p:nvSpPr>
-          <p:cNvPr id="60" name="TextBox 59">
-            <a:extLst>
-              <a:ext uri="{FF2B5EF4-FFF2-40B4-BE49-F238E27FC236}">
-                <a16:creationId xmlns:a16="http://schemas.microsoft.com/office/drawing/2014/main" id="{762783B5-FD4E-BC08-47E6-35BC4116609A}"/>
-              </a:ext>
-            </a:extLst>
-          </p:cNvPr>
-          <p:cNvSpPr txBox="1"/>
-          <p:nvPr/>
-        </p:nvSpPr>
-        <p:spPr>
-          <a:xfrm>
-            <a:off x="411478" y="1825795"/>
-            <a:ext cx="10268713" cy="887604"/>
-          </a:xfrm>
-          <a:prstGeom prst="rect">
-            <a:avLst/>
-          </a:prstGeom>
-          <a:noFill/>
-        </p:spPr>
-        <p:txBody>
-          <a:bodyPr wrap="square" lIns="0" tIns="0" rIns="0" bIns="0" rtlCol="0">
-            <a:noAutofit/>
-          </a:bodyPr>
-          <a:lstStyle/>
-          <a:p>
-            <a:pPr marL="285750" indent="-285750" algn="l">
-              <a:buFont typeface="Arial" panose="020B0604020202020204" pitchFamily="34" charset="0"/>
-              <a:buChar char="•"/>
-            </a:pPr>
-            <a:r>
-              <a:rPr lang="en-US" sz="1600" dirty="0">
-                <a:latin typeface="Sage Text" panose="02010503040201060103" pitchFamily="2" charset="77"/>
-              </a:rPr>
-              <a:t>Uninstall all Sage 300 wizards </a:t>
-            </a:r>
-          </a:p>
-          <a:p>
-            <a:pPr marL="742950" lvl="1" indent="-285750">
-              <a:buFont typeface="Arial" panose="020B0604020202020204" pitchFamily="34" charset="0"/>
-              <a:buChar char="•"/>
-            </a:pPr>
-            <a:r>
-              <a:rPr lang="en-US" sz="1400" dirty="0">
-                <a:latin typeface="Sage Text" panose="02010503040201060103" pitchFamily="2" charset="77"/>
-              </a:rPr>
-              <a:t>(Visual Studio 2022/2026 – Extensions </a:t>
-            </a:r>
-            <a:r>
-              <a:rPr lang="en-US" sz="1400" dirty="0">
-                <a:latin typeface="Sage Text" panose="02010503040201060103" pitchFamily="2" charset="77"/>
-                <a:sym typeface="Wingdings" panose="05000000000000000000" pitchFamily="2" charset="2"/>
-              </a:rPr>
-              <a:t> Installed  uninstall all “Sage” wizards</a:t>
-            </a:r>
-          </a:p>
-          <a:p>
-            <a:pPr marL="285750" indent="-285750">
-              <a:buFont typeface="Arial" panose="020B0604020202020204" pitchFamily="34" charset="0"/>
-              <a:buChar char="•"/>
-            </a:pPr>
-            <a:r>
-              <a:rPr lang="en-US" sz="1600" b="0" i="0" dirty="0">
-                <a:solidFill>
-                  <a:schemeClr val="tx1"/>
-                </a:solidFill>
-                <a:latin typeface="Sage Text" panose="02010503040201060103" pitchFamily="2" charset="77"/>
-                <a:sym typeface="Wingdings" panose="05000000000000000000" pitchFamily="2" charset="2"/>
-              </a:rPr>
-              <a:t>Install Sage 300 Wizards</a:t>
-            </a:r>
-          </a:p>
-          <a:p>
-            <a:pPr marL="742950" lvl="1" indent="-285750">
-              <a:buFont typeface="Arial" panose="020B0604020202020204" pitchFamily="34" charset="0"/>
-              <a:buChar char="•"/>
-            </a:pPr>
-            <a:r>
-              <a:rPr lang="en-US" sz="1400" dirty="0">
-                <a:solidFill>
-                  <a:srgbClr val="FF0000"/>
-                </a:solidFill>
-                <a:latin typeface="Sage Text" panose="02010503040201060103" pitchFamily="2" charset="77"/>
-                <a:sym typeface="Wingdings" panose="05000000000000000000" pitchFamily="2" charset="2"/>
-              </a:rPr>
-              <a:t>Visual Studio 2022 or Visual Studio 2026</a:t>
-            </a:r>
-          </a:p>
-          <a:p>
-            <a:pPr marL="742950" lvl="1" indent="-285750">
-              <a:buFont typeface="Arial" panose="020B0604020202020204" pitchFamily="34" charset="0"/>
-              <a:buChar char="•"/>
-            </a:pPr>
-            <a:r>
-              <a:rPr lang="en-US" sz="1400" b="0" i="0" dirty="0">
-                <a:solidFill>
-                  <a:schemeClr val="tx1"/>
-                </a:solidFill>
-                <a:latin typeface="Sage Text" panose="02010503040201060103" pitchFamily="2" charset="77"/>
-                <a:sym typeface="Wingdings" panose="05000000000000000000" pitchFamily="2" charset="2"/>
-              </a:rPr>
-              <a:t>Solution Wizard (Visual Studio plug-in)</a:t>
-            </a:r>
-          </a:p>
-          <a:p>
-            <a:pPr marL="1200150" lvl="2" indent="-285750">
-              <a:buFont typeface="Arial" panose="020B0604020202020204" pitchFamily="34" charset="0"/>
-              <a:buChar char="•"/>
-            </a:pPr>
-            <a:r>
-              <a:rPr lang="en-US" sz="1200" dirty="0">
-                <a:latin typeface="Sage Text" panose="02010503040201060103" pitchFamily="2" charset="77"/>
-                <a:sym typeface="Wingdings" panose="05000000000000000000" pitchFamily="2" charset="2"/>
-              </a:rPr>
-              <a:t>Double-click </a:t>
-            </a:r>
-            <a:r>
-              <a:rPr lang="en-US" sz="1200" b="1" dirty="0">
-                <a:latin typeface="Sage Text" panose="02010503040201060103" pitchFamily="2" charset="77"/>
-                <a:sym typeface="Wingdings" panose="05000000000000000000" pitchFamily="2" charset="2"/>
-              </a:rPr>
-              <a:t>Sage.CA.SBS.ERP.Sage300.SolutionWizardPackage.vsix</a:t>
-            </a:r>
-          </a:p>
-          <a:p>
-            <a:pPr marL="742950" lvl="1" indent="-285750">
-              <a:buFont typeface="Arial" panose="020B0604020202020204" pitchFamily="34" charset="0"/>
-              <a:buChar char="•"/>
-            </a:pPr>
-            <a:r>
-              <a:rPr lang="en-US" sz="1400" b="0" i="0" dirty="0">
-                <a:solidFill>
-                  <a:schemeClr val="tx1"/>
-                </a:solidFill>
-                <a:latin typeface="Sage Text" panose="02010503040201060103" pitchFamily="2" charset="77"/>
-                <a:sym typeface="Wingdings" panose="05000000000000000000" pitchFamily="2" charset="2"/>
-              </a:rPr>
-              <a:t>Customization Wizard (Visual Studio plug-in)</a:t>
-            </a:r>
-          </a:p>
-          <a:p>
-            <a:pPr marL="1200150" lvl="2" indent="-285750">
-              <a:buFont typeface="Arial" panose="020B0604020202020204" pitchFamily="34" charset="0"/>
-              <a:buChar char="•"/>
-            </a:pPr>
-            <a:r>
-              <a:rPr lang="en-US" sz="1200" dirty="0">
-                <a:latin typeface="Sage Text" panose="02010503040201060103" pitchFamily="2" charset="77"/>
-                <a:sym typeface="Wingdings" panose="05000000000000000000" pitchFamily="2" charset="2"/>
-              </a:rPr>
-              <a:t>Double-click </a:t>
-            </a:r>
-            <a:r>
-              <a:rPr lang="en-US" sz="1200" b="1" dirty="0">
-                <a:latin typeface="Sage Text" panose="02010503040201060103" pitchFamily="2" charset="77"/>
-                <a:sym typeface="Wingdings" panose="05000000000000000000" pitchFamily="2" charset="2"/>
-              </a:rPr>
-              <a:t>Sage.CA.SBS.ERP.Sage300.CustomizationWizardPackage.vsix</a:t>
-            </a:r>
-          </a:p>
-          <a:p>
-            <a:pPr marL="742950" lvl="1" indent="-285750">
-              <a:buFont typeface="Arial" panose="020B0604020202020204" pitchFamily="34" charset="0"/>
-              <a:buChar char="•"/>
-            </a:pPr>
-            <a:r>
-              <a:rPr lang="en-US" sz="1400" b="0" i="0" dirty="0">
-                <a:solidFill>
-                  <a:schemeClr val="tx1"/>
-                </a:solidFill>
-                <a:latin typeface="Sage Text" panose="02010503040201060103" pitchFamily="2" charset="77"/>
-                <a:sym typeface="Wingdings" panose="05000000000000000000" pitchFamily="2" charset="2"/>
-              </a:rPr>
-              <a:t>Code Generation Wizard, Finder Generator, Language Resource Wizard, Upgrade Wizard, Sync Assemblies Wizard</a:t>
-            </a:r>
-          </a:p>
-          <a:p>
-            <a:pPr marL="1200150" lvl="2" indent="-285750">
-              <a:buFont typeface="Arial" panose="020B0604020202020204" pitchFamily="34" charset="0"/>
-              <a:buChar char="•"/>
-            </a:pPr>
-            <a:r>
-              <a:rPr lang="en-US" sz="1200" dirty="0">
-                <a:latin typeface="Sage Text" panose="02010503040201060103" pitchFamily="2" charset="77"/>
-                <a:sym typeface="Wingdings" panose="05000000000000000000" pitchFamily="2" charset="2"/>
-              </a:rPr>
-              <a:t>Double-click </a:t>
-            </a:r>
-            <a:r>
-              <a:rPr lang="en-US" sz="1200" b="1" dirty="0">
-                <a:latin typeface="Sage Text" panose="02010503040201060103" pitchFamily="2" charset="77"/>
-                <a:sym typeface="Wingdings" panose="05000000000000000000" pitchFamily="2" charset="2"/>
-              </a:rPr>
-              <a:t>Sage.CA.SBS.ERP.Sage300.WizardPackage.vsix</a:t>
-            </a:r>
-          </a:p>
-          <a:p>
-            <a:pPr marL="1200150" lvl="2" indent="-285750">
-              <a:buFont typeface="Arial" panose="020B0604020202020204" pitchFamily="34" charset="0"/>
-              <a:buChar char="•"/>
-            </a:pPr>
-            <a:endParaRPr lang="en-US" sz="1600" b="0" i="0" dirty="0">
-              <a:solidFill>
-                <a:schemeClr val="tx1"/>
-              </a:solidFill>
-              <a:latin typeface="Sage Text" panose="02010503040201060103" pitchFamily="2" charset="77"/>
-            </a:endParaRPr>
-          </a:p>
-        </p:txBody>
-      </p:sp>
-      <p:sp>
-        <p:nvSpPr>
-          <p:cNvPr id="63" name="TextBox 62">
-            <a:extLst>
-              <a:ext uri="{FF2B5EF4-FFF2-40B4-BE49-F238E27FC236}">
-                <a16:creationId xmlns:a16="http://schemas.microsoft.com/office/drawing/2014/main" id="{F37AF845-CA74-0EA3-F130-A50833CFB2A8}"/>
-              </a:ext>
-            </a:extLst>
-          </p:cNvPr>
-          <p:cNvSpPr txBox="1"/>
-          <p:nvPr/>
-        </p:nvSpPr>
-        <p:spPr>
-          <a:xfrm>
-            <a:off x="411477" y="4399957"/>
-            <a:ext cx="10268713" cy="887604"/>
-          </a:xfrm>
-          <a:prstGeom prst="rect">
-            <a:avLst/>
-          </a:prstGeom>
-          <a:noFill/>
-        </p:spPr>
-        <p:txBody>
-          <a:bodyPr wrap="square" lIns="0" tIns="0" rIns="0" bIns="0" rtlCol="0">
-            <a:noAutofit/>
-          </a:bodyPr>
-          <a:lstStyle/>
-          <a:p>
-            <a:pPr marL="285750" indent="-285750" algn="l">
-              <a:buFont typeface="Arial" panose="020B0604020202020204" pitchFamily="34" charset="0"/>
-              <a:buChar char="•"/>
-            </a:pPr>
-            <a:r>
-              <a:rPr lang="en-US" sz="1600" dirty="0">
-                <a:solidFill>
-                  <a:srgbClr val="FF0000"/>
-                </a:solidFill>
-                <a:latin typeface="Sage Text" panose="02010503040201060103" pitchFamily="2" charset="77"/>
-              </a:rPr>
-              <a:t>Note: Now that the plug-in wizards are in Visual Studio 2022/2026, they must reference 64-bit libraries (targeting AnyCPU). Since the wizards access the ACCPAC.Advantage.dll (which targets x86), a local version of ACCPAC.Advantage.dll and supporting DLLs have been placed in the bin folder targeting AnyCPU. This is solely for the wizards as it has not yet been tested in the application. </a:t>
-            </a:r>
-          </a:p>
-        </p:txBody>
-      </p:sp>
-    </p:spTree>
-    <p:extLst>
-      <p:ext uri="{BB962C8B-B14F-4D97-AF65-F5344CB8AC3E}">
-        <p14:creationId xmlns:p14="http://schemas.microsoft.com/office/powerpoint/2010/main" val="3889140434"/>
-      </p:ext>
-    </p:extLst>
-  </p:cSld>
-  <p:clrMapOvr>
-    <a:masterClrMapping/>
-  </p:clrMapOvr>
-</p:sld>
-</file>
-
 <file path=ppt/slides/slide9.xml><?xml version="1.0" encoding="utf-8"?>
 <p:sld xmlns:a="http://schemas.openxmlformats.org/drawingml/2006/main" xmlns:r="http://schemas.openxmlformats.org/officeDocument/2006/relationships" xmlns:p="http://schemas.openxmlformats.org/presentationml/2006/main">
   <p:cSld>
@@ -28424,179 +28811,11 @@
           <a:p>
             <a:r>
               <a:rPr lang="en-US" dirty="0"/>
-              <a:t>Code Generation Wizard</a:t>
+              <a:t>2027.0 uninstall and install instructions</a:t>
             </a:r>
           </a:p>
         </p:txBody>
       </p:sp>
-      <p:sp>
-        <p:nvSpPr>
-          <p:cNvPr id="54" name="TextBox 53">
-            <a:extLst>
-              <a:ext uri="{FF2B5EF4-FFF2-40B4-BE49-F238E27FC236}">
-                <a16:creationId xmlns:a16="http://schemas.microsoft.com/office/drawing/2014/main" id="{F2370D7B-846B-8CA3-39B2-C805DBE05ECB}"/>
-              </a:ext>
-            </a:extLst>
-          </p:cNvPr>
-          <p:cNvSpPr txBox="1"/>
-          <p:nvPr/>
-        </p:nvSpPr>
-        <p:spPr>
-          <a:xfrm>
-            <a:off x="7025562" y="4566558"/>
-            <a:ext cx="4791995" cy="887604"/>
-          </a:xfrm>
-          <a:prstGeom prst="rect">
-            <a:avLst/>
-          </a:prstGeom>
-          <a:noFill/>
-        </p:spPr>
-        <p:txBody>
-          <a:bodyPr wrap="square" lIns="0" tIns="0" rIns="0" bIns="0" rtlCol="0">
-            <a:noAutofit/>
-          </a:bodyPr>
-          <a:lstStyle/>
-          <a:p>
-            <a:pPr marL="285750" indent="-285750" algn="l">
-              <a:buFont typeface="Arial" panose="020B0604020202020204" pitchFamily="34" charset="0"/>
-              <a:buChar char="•"/>
-            </a:pPr>
-            <a:r>
-              <a:rPr lang="en-US" sz="1600" dirty="0">
-                <a:latin typeface="Sage Text" panose="02010503040201060103" pitchFamily="2" charset="77"/>
-              </a:rPr>
-              <a:t>Added to the Wizard Package</a:t>
-            </a:r>
-          </a:p>
-          <a:p>
-            <a:pPr marL="285750" indent="-285750" algn="l">
-              <a:buFont typeface="Arial" panose="020B0604020202020204" pitchFamily="34" charset="0"/>
-              <a:buChar char="•"/>
-            </a:pPr>
-            <a:r>
-              <a:rPr lang="en-US" sz="1600" dirty="0">
-                <a:latin typeface="Sage Text" panose="02010503040201060103" pitchFamily="2" charset="77"/>
-              </a:rPr>
-              <a:t>Added Web API code generation for 2025.1</a:t>
-            </a:r>
-          </a:p>
-        </p:txBody>
-      </p:sp>
-      <p:pic>
-        <p:nvPicPr>
-          <p:cNvPr id="57" name="Picture 56">
-            <a:extLst>
-              <a:ext uri="{FF2B5EF4-FFF2-40B4-BE49-F238E27FC236}">
-                <a16:creationId xmlns:a16="http://schemas.microsoft.com/office/drawing/2014/main" id="{A9CFDC2F-8E0A-BEA7-2BC4-2257666AEE1A}"/>
-              </a:ext>
-            </a:extLst>
-          </p:cNvPr>
-          <p:cNvPicPr>
-            <a:picLocks noChangeAspect="1"/>
-          </p:cNvPicPr>
-          <p:nvPr/>
-        </p:nvPicPr>
-        <p:blipFill>
-          <a:blip r:embed="rId2"/>
-          <a:stretch>
-            <a:fillRect/>
-          </a:stretch>
-        </p:blipFill>
-        <p:spPr>
-          <a:xfrm>
-            <a:off x="419099" y="1820426"/>
-            <a:ext cx="2265580" cy="1398164"/>
-          </a:xfrm>
-          <a:prstGeom prst="rect">
-            <a:avLst/>
-          </a:prstGeom>
-        </p:spPr>
-      </p:pic>
-      <p:sp>
-        <p:nvSpPr>
-          <p:cNvPr id="58" name="TextBox 57">
-            <a:extLst>
-              <a:ext uri="{FF2B5EF4-FFF2-40B4-BE49-F238E27FC236}">
-                <a16:creationId xmlns:a16="http://schemas.microsoft.com/office/drawing/2014/main" id="{961244FC-FFEC-9259-CE9D-9DC3544F17A7}"/>
-              </a:ext>
-            </a:extLst>
-          </p:cNvPr>
-          <p:cNvSpPr txBox="1"/>
-          <p:nvPr/>
-        </p:nvSpPr>
-        <p:spPr>
-          <a:xfrm>
-            <a:off x="406602" y="3374154"/>
-            <a:ext cx="4423868" cy="887604"/>
-          </a:xfrm>
-          <a:prstGeom prst="rect">
-            <a:avLst/>
-          </a:prstGeom>
-          <a:noFill/>
-        </p:spPr>
-        <p:txBody>
-          <a:bodyPr wrap="square" lIns="0" tIns="0" rIns="0" bIns="0" rtlCol="0">
-            <a:noAutofit/>
-          </a:bodyPr>
-          <a:lstStyle/>
-          <a:p>
-            <a:pPr marL="285750" indent="-285750" algn="l">
-              <a:buFont typeface="Arial" panose="020B0604020202020204" pitchFamily="34" charset="0"/>
-              <a:buChar char="•"/>
-            </a:pPr>
-            <a:r>
-              <a:rPr lang="en-US" sz="1600" b="0" i="0" dirty="0">
-                <a:solidFill>
-                  <a:schemeClr val="tx1"/>
-                </a:solidFill>
-                <a:latin typeface="Sage Text" panose="02010503040201060103" pitchFamily="2" charset="77"/>
-              </a:rPr>
-              <a:t>Only accessible in Visual Studio 2022 or 2026</a:t>
-            </a:r>
-          </a:p>
-        </p:txBody>
-      </p:sp>
-      <p:pic>
-        <p:nvPicPr>
-          <p:cNvPr id="59" name="Picture 58">
-            <a:extLst>
-              <a:ext uri="{FF2B5EF4-FFF2-40B4-BE49-F238E27FC236}">
-                <a16:creationId xmlns:a16="http://schemas.microsoft.com/office/drawing/2014/main" id="{4D0DA847-A3EB-AC80-EA3D-B0CAF4AD5013}"/>
-              </a:ext>
-            </a:extLst>
-          </p:cNvPr>
-          <p:cNvPicPr>
-            <a:picLocks noChangeAspect="1"/>
-          </p:cNvPicPr>
-          <p:nvPr/>
-        </p:nvPicPr>
-        <p:blipFill>
-          <a:blip r:embed="rId3">
-            <a:extLst>
-              <a:ext uri="{28A0092B-C50C-407E-A947-70E740481C1C}">
-                <a14:useLocalDpi xmlns:a14="http://schemas.microsoft.com/office/drawing/2010/main" val="0"/>
-              </a:ext>
-            </a:extLst>
-          </a:blip>
-          <a:srcRect/>
-          <a:stretch>
-            <a:fillRect/>
-          </a:stretch>
-        </p:blipFill>
-        <p:spPr bwMode="auto">
-          <a:xfrm>
-            <a:off x="374442" y="4055900"/>
-            <a:ext cx="5848350" cy="1171575"/>
-          </a:xfrm>
-          <a:prstGeom prst="rect">
-            <a:avLst/>
-          </a:prstGeom>
-          <a:noFill/>
-          <a:ln>
-            <a:noFill/>
-          </a:ln>
-        </p:spPr>
-      </p:pic>
       <p:sp>
         <p:nvSpPr>
           <p:cNvPr id="60" name="TextBox 59">
@@ -28611,8 +28830,8 @@
         </p:nvSpPr>
         <p:spPr>
           <a:xfrm>
-            <a:off x="406602" y="5338150"/>
-            <a:ext cx="4423868" cy="887604"/>
+            <a:off x="411478" y="1825795"/>
+            <a:ext cx="10268713" cy="887604"/>
           </a:xfrm>
           <a:prstGeom prst="rect">
             <a:avLst/>
@@ -28630,87 +28849,233 @@
               <a:buChar char="•"/>
             </a:pPr>
             <a:r>
+              <a:rPr lang="en-US" sz="1600" dirty="0">
+                <a:latin typeface="Sage Text" panose="02010503040201060103" pitchFamily="2" charset="77"/>
+              </a:rPr>
+              <a:t>Uninstall all Sage 300 wizards </a:t>
+            </a:r>
+          </a:p>
+          <a:p>
+            <a:pPr marL="742950" lvl="1" indent="-285750">
+              <a:buFont typeface="Arial" panose="020B0604020202020204" pitchFamily="34" charset="0"/>
+              <a:buChar char="•"/>
+            </a:pPr>
+            <a:r>
+              <a:rPr lang="en-US" sz="1400" dirty="0">
+                <a:latin typeface="Sage Text" panose="02010503040201060103" pitchFamily="2" charset="77"/>
+              </a:rPr>
+              <a:t>(Visual Studio 2022/2026 – Extensions </a:t>
+            </a:r>
+            <a:r>
+              <a:rPr lang="en-US" sz="1400" dirty="0">
+                <a:latin typeface="Sage Text" panose="02010503040201060103" pitchFamily="2" charset="77"/>
+                <a:sym typeface="Wingdings" panose="05000000000000000000" pitchFamily="2" charset="2"/>
+              </a:rPr>
+              <a:t> Installed  uninstall all “Sage” wizards</a:t>
+            </a:r>
+          </a:p>
+          <a:p>
+            <a:pPr marL="285750" indent="-285750">
+              <a:buFont typeface="Arial" panose="020B0604020202020204" pitchFamily="34" charset="0"/>
+              <a:buChar char="•"/>
+            </a:pPr>
+            <a:r>
               <a:rPr lang="en-US" sz="1600" b="0" i="0" dirty="0">
                 <a:solidFill>
                   <a:schemeClr val="tx1"/>
                 </a:solidFill>
                 <a:latin typeface="Sage Text" panose="02010503040201060103" pitchFamily="2" charset="77"/>
+                <a:sym typeface="Wingdings" panose="05000000000000000000" pitchFamily="2" charset="2"/>
               </a:rPr>
-              <a:t>Access from Extensions</a:t>
-            </a:r>
-            <a:r>
-              <a:rPr lang="en-US" sz="1600" dirty="0">
+              <a:t>Install Sage 300 Wizards</a:t>
+            </a:r>
+          </a:p>
+          <a:p>
+            <a:pPr marL="742950" lvl="1" indent="-285750">
+              <a:buFont typeface="Arial" panose="020B0604020202020204" pitchFamily="34" charset="0"/>
+              <a:buChar char="•"/>
+            </a:pPr>
+            <a:r>
+              <a:rPr lang="en-US" sz="1400" dirty="0">
+                <a:solidFill>
+                  <a:srgbClr val="FF0000"/>
+                </a:solidFill>
                 <a:latin typeface="Sage Text" panose="02010503040201060103" pitchFamily="2" charset="77"/>
+                <a:sym typeface="Wingdings" panose="05000000000000000000" pitchFamily="2" charset="2"/>
               </a:rPr>
-              <a:t>/Sage 300 menu</a:t>
-            </a:r>
+              <a:t>Visual Studio 2022 or Visual Studio 2026</a:t>
+            </a:r>
+          </a:p>
+          <a:p>
+            <a:pPr marL="742950" lvl="1" indent="-285750">
+              <a:buFont typeface="Arial" panose="020B0604020202020204" pitchFamily="34" charset="0"/>
+              <a:buChar char="•"/>
+            </a:pPr>
+            <a:r>
+              <a:rPr lang="en-US" sz="1400" b="0" i="0" dirty="0">
+                <a:solidFill>
+                  <a:schemeClr val="tx1"/>
+                </a:solidFill>
+                <a:latin typeface="Sage Text" panose="02010503040201060103" pitchFamily="2" charset="77"/>
+                <a:sym typeface="Wingdings" panose="05000000000000000000" pitchFamily="2" charset="2"/>
+              </a:rPr>
+              <a:t>Solution Wizard (Visual Studio plug-in)</a:t>
+            </a:r>
+          </a:p>
+          <a:p>
+            <a:pPr marL="1200150" lvl="2" indent="-285750">
+              <a:buFont typeface="Arial" panose="020B0604020202020204" pitchFamily="34" charset="0"/>
+              <a:buChar char="•"/>
+            </a:pPr>
+            <a:r>
+              <a:rPr lang="en-US" sz="1200" dirty="0">
+                <a:latin typeface="Sage Text" panose="02010503040201060103" pitchFamily="2" charset="77"/>
+                <a:sym typeface="Wingdings" panose="05000000000000000000" pitchFamily="2" charset="2"/>
+              </a:rPr>
+              <a:t>Double-click </a:t>
+            </a:r>
+            <a:r>
+              <a:rPr lang="en-US" sz="1200" b="1" dirty="0">
+                <a:latin typeface="Sage Text" panose="02010503040201060103" pitchFamily="2" charset="77"/>
+                <a:sym typeface="Wingdings" panose="05000000000000000000" pitchFamily="2" charset="2"/>
+              </a:rPr>
+              <a:t>Sage.CA.SBS.ERP.Sage300.SolutionWizardPackage.vsix</a:t>
+            </a:r>
+          </a:p>
+          <a:p>
+            <a:pPr marL="742950" lvl="1" indent="-285750">
+              <a:buFont typeface="Arial" panose="020B0604020202020204" pitchFamily="34" charset="0"/>
+              <a:buChar char="•"/>
+            </a:pPr>
+            <a:r>
+              <a:rPr lang="en-US" sz="1400" b="0" i="0" dirty="0">
+                <a:solidFill>
+                  <a:schemeClr val="tx1"/>
+                </a:solidFill>
+                <a:latin typeface="Sage Text" panose="02010503040201060103" pitchFamily="2" charset="77"/>
+                <a:sym typeface="Wingdings" panose="05000000000000000000" pitchFamily="2" charset="2"/>
+              </a:rPr>
+              <a:t>Customization Wizard (Visual Studio plug-in)</a:t>
+            </a:r>
+          </a:p>
+          <a:p>
+            <a:pPr marL="1200150" lvl="2" indent="-285750">
+              <a:buFont typeface="Arial" panose="020B0604020202020204" pitchFamily="34" charset="0"/>
+              <a:buChar char="•"/>
+            </a:pPr>
+            <a:r>
+              <a:rPr lang="en-US" sz="1200" dirty="0">
+                <a:latin typeface="Sage Text" panose="02010503040201060103" pitchFamily="2" charset="77"/>
+                <a:sym typeface="Wingdings" panose="05000000000000000000" pitchFamily="2" charset="2"/>
+              </a:rPr>
+              <a:t>Double-click </a:t>
+            </a:r>
+            <a:r>
+              <a:rPr lang="en-US" sz="1200" b="1" dirty="0">
+                <a:latin typeface="Sage Text" panose="02010503040201060103" pitchFamily="2" charset="77"/>
+                <a:sym typeface="Wingdings" panose="05000000000000000000" pitchFamily="2" charset="2"/>
+              </a:rPr>
+              <a:t>Sage.CA.SBS.ERP.Sage300.CustomizationWizardPackage.vsix</a:t>
+            </a:r>
+          </a:p>
+          <a:p>
+            <a:pPr marL="742950" lvl="1" indent="-285750">
+              <a:buFont typeface="Arial" panose="020B0604020202020204" pitchFamily="34" charset="0"/>
+              <a:buChar char="•"/>
+            </a:pPr>
+            <a:r>
+              <a:rPr lang="en-US" sz="1400" b="0" i="0" dirty="0">
+                <a:solidFill>
+                  <a:schemeClr val="tx1"/>
+                </a:solidFill>
+                <a:latin typeface="Sage Text" panose="02010503040201060103" pitchFamily="2" charset="77"/>
+                <a:sym typeface="Wingdings" panose="05000000000000000000" pitchFamily="2" charset="2"/>
+              </a:rPr>
+              <a:t>Code Generation Wizard, Finder Generator, Language Resource Wizard, Upgrade Wizard, Sync Assemblies Wizard</a:t>
+            </a:r>
+          </a:p>
+          <a:p>
+            <a:pPr marL="1200150" lvl="2" indent="-285750">
+              <a:buFont typeface="Arial" panose="020B0604020202020204" pitchFamily="34" charset="0"/>
+              <a:buChar char="•"/>
+            </a:pPr>
+            <a:r>
+              <a:rPr lang="en-US" sz="1200" dirty="0">
+                <a:latin typeface="Sage Text" panose="02010503040201060103" pitchFamily="2" charset="77"/>
+                <a:sym typeface="Wingdings" panose="05000000000000000000" pitchFamily="2" charset="2"/>
+              </a:rPr>
+              <a:t>Double-click </a:t>
+            </a:r>
+            <a:r>
+              <a:rPr lang="en-US" sz="1200" b="1" dirty="0">
+                <a:latin typeface="Sage Text" panose="02010503040201060103" pitchFamily="2" charset="77"/>
+                <a:sym typeface="Wingdings" panose="05000000000000000000" pitchFamily="2" charset="2"/>
+              </a:rPr>
+              <a:t>Sage.CA.SBS.ERP.Sage300.WizardPackage.vsix</a:t>
+            </a:r>
+          </a:p>
+          <a:p>
+            <a:pPr marL="1200150" lvl="2" indent="-285750">
+              <a:buFont typeface="Arial" panose="020B0604020202020204" pitchFamily="34" charset="0"/>
+              <a:buChar char="•"/>
+            </a:pPr>
+            <a:endParaRPr lang="en-US" sz="1600" b="0" i="0" dirty="0">
+              <a:solidFill>
+                <a:schemeClr val="tx1"/>
+              </a:solidFill>
+              <a:latin typeface="Sage Text" panose="02010503040201060103" pitchFamily="2" charset="77"/>
+            </a:endParaRPr>
           </a:p>
         </p:txBody>
       </p:sp>
-      <p:pic>
-        <p:nvPicPr>
-          <p:cNvPr id="62" name="Picture 61">
+      <p:sp>
+        <p:nvSpPr>
+          <p:cNvPr id="63" name="TextBox 62">
             <a:extLst>
               <a:ext uri="{FF2B5EF4-FFF2-40B4-BE49-F238E27FC236}">
-                <a16:creationId xmlns:a16="http://schemas.microsoft.com/office/drawing/2014/main" id="{557637A0-E7D1-65F9-CE53-EEE6768A1F0E}"/>
+                <a16:creationId xmlns:a16="http://schemas.microsoft.com/office/drawing/2014/main" id="{F37AF845-CA74-0EA3-F130-A50833CFB2A8}"/>
               </a:ext>
             </a:extLst>
           </p:cNvPr>
-          <p:cNvPicPr>
-            <a:picLocks noChangeAspect="1"/>
-          </p:cNvPicPr>
+          <p:cNvSpPr txBox="1"/>
           <p:nvPr/>
-        </p:nvPicPr>
-        <p:blipFill>
-          <a:blip r:embed="rId4"/>
-          <a:stretch>
-            <a:fillRect/>
-          </a:stretch>
-        </p:blipFill>
+        </p:nvSpPr>
         <p:spPr>
           <a:xfrm>
-            <a:off x="6894347" y="657401"/>
-            <a:ext cx="4686300" cy="3667125"/>
+            <a:off x="411477" y="4399957"/>
+            <a:ext cx="10268713" cy="887604"/>
           </a:xfrm>
           <a:prstGeom prst="rect">
             <a:avLst/>
           </a:prstGeom>
+          <a:noFill/>
         </p:spPr>
-      </p:pic>
-      <p:pic>
-        <p:nvPicPr>
-          <p:cNvPr id="5" name="Picture 4">
-            <a:extLst>
-              <a:ext uri="{FF2B5EF4-FFF2-40B4-BE49-F238E27FC236}">
-                <a16:creationId xmlns:a16="http://schemas.microsoft.com/office/drawing/2014/main" id="{ECFA9E63-4A52-C747-4EF1-E7398F74FCC4}"/>
-              </a:ext>
-            </a:extLst>
-          </p:cNvPr>
-          <p:cNvPicPr>
-            <a:picLocks noChangeAspect="1"/>
-          </p:cNvPicPr>
-          <p:nvPr/>
-        </p:nvPicPr>
-        <p:blipFill>
-          <a:blip r:embed="rId5"/>
-          <a:stretch>
-            <a:fillRect/>
-          </a:stretch>
-        </p:blipFill>
-        <p:spPr>
-          <a:xfrm>
-            <a:off x="3559501" y="1820426"/>
-            <a:ext cx="2528877" cy="1399342"/>
-          </a:xfrm>
-          <a:prstGeom prst="rect">
-            <a:avLst/>
-          </a:prstGeom>
-        </p:spPr>
-      </p:pic>
+        <p:txBody>
+          <a:bodyPr wrap="square" lIns="0" tIns="0" rIns="0" bIns="0" rtlCol="0">
+            <a:noAutofit/>
+          </a:bodyPr>
+          <a:lstStyle/>
+          <a:p>
+            <a:pPr marL="285750" indent="-285750" algn="l">
+              <a:buFont typeface="Arial" panose="020B0604020202020204" pitchFamily="34" charset="0"/>
+              <a:buChar char="•"/>
+            </a:pPr>
+            <a:r>
+              <a:rPr lang="en-US" sz="1600" dirty="0">
+                <a:solidFill>
+                  <a:srgbClr val="FF0000"/>
+                </a:solidFill>
+                <a:latin typeface="Sage Text" panose="02010503040201060103" pitchFamily="2" charset="77"/>
+              </a:rPr>
+              <a:t>Note: Now that the plug-in wizards are in Visual Studio 2022/2026, they must reference 64-bit libraries (targeting AnyCPU). Since the wizards access the ACCPAC.Advantage.dll (which targets x86), a local version of ACCPAC.Advantage.dll and supporting DLLs have been placed in the bin folder targeting AnyCPU. This is solely for the wizards as it has not yet been tested in the application. </a:t>
+            </a:r>
+          </a:p>
+        </p:txBody>
+      </p:sp>
     </p:spTree>
     <p:extLst>
       <p:ext uri="{BB962C8B-B14F-4D97-AF65-F5344CB8AC3E}">
-        <p14:creationId xmlns:p14="http://schemas.microsoft.com/office/powerpoint/2010/main" val="769047783"/>
+        <p14:creationId xmlns:p14="http://schemas.microsoft.com/office/powerpoint/2010/main" val="3889140434"/>
       </p:ext>
     </p:extLst>
   </p:cSld>
